--- a/u08a_bTrees/notes/_a - Classifying binary trees and Tree Traversal.pptx
+++ b/u08a_bTrees/notes/_a - Classifying binary trees and Tree Traversal.pptx
@@ -1097,7 +1097,18 @@
           <a:bodyPr/>
           <a:lstStyle/>
           <a:p>
-            <a:endParaRPr lang="en-US"/>
+            <a:r>
+              <a:rPr lang="en-US" dirty="0"/>
+              <a:t>Which is the complement to the number of  parents, the number of children or the number of leaves? The number of leaves, </a:t>
+            </a:r>
+            <a:r>
+              <a:rPr lang="en-US" dirty="0" err="1"/>
+              <a:t>b.c.</a:t>
+            </a:r>
+            <a:r>
+              <a:rPr lang="en-US" dirty="0"/>
+              <a:t> 4 + 5 = 9</a:t>
+            </a:r>
           </a:p>
         </p:txBody>
       </p:sp>
@@ -27787,14 +27798,14 @@
           <a:noFill/>
           <a:extLst>
             <a:ext uri="{909E8E84-426E-40dd-AFC4-6F175D3DCCD1}">
-              <a14:hiddenFill xmlns="" xmlns:a14="http://schemas.microsoft.com/office/drawing/2010/main">
+              <a14:hiddenFill xmlns:a14="http://schemas.microsoft.com/office/drawing/2010/main" xmlns="">
                 <a:solidFill>
                   <a:srgbClr val="FFFFFF"/>
                 </a:solidFill>
               </a14:hiddenFill>
             </a:ext>
             <a:ext uri="{91240B29-F687-4f45-9708-019B960494DF}">
-              <a14:hiddenLine xmlns="" xmlns:a14="http://schemas.microsoft.com/office/drawing/2010/main" w="9525">
+              <a14:hiddenLine xmlns:a14="http://schemas.microsoft.com/office/drawing/2010/main" xmlns="" w="9525">
                 <a:solidFill>
                   <a:srgbClr val="000000"/>
                 </a:solidFill>
@@ -28217,14 +28228,14 @@
               </a:ln>
               <a:extLst>
                 <a:ext uri="{909E8E84-426E-40dd-AFC4-6F175D3DCCD1}">
-                  <a14:hiddenFill xmlns="" xmlns:a14="http://schemas.microsoft.com/office/drawing/2010/main">
+                  <a14:hiddenFill xmlns:a14="http://schemas.microsoft.com/office/drawing/2010/main" xmlns="">
                     <a:solidFill>
                       <a:srgbClr val="FFFFFF"/>
                     </a:solidFill>
                   </a14:hiddenFill>
                 </a:ext>
                 <a:ext uri="{91240B29-F687-4f45-9708-019B960494DF}">
-                  <a14:hiddenLine xmlns="" xmlns:a14="http://schemas.microsoft.com/office/drawing/2010/main" w="9525">
+                  <a14:hiddenLine xmlns:a14="http://schemas.microsoft.com/office/drawing/2010/main" xmlns="" w="9525">
                     <a:solidFill>
                       <a:srgbClr val="000000"/>
                     </a:solidFill>
@@ -28452,14 +28463,14 @@
               </a:ln>
               <a:extLst>
                 <a:ext uri="{909E8E84-426E-40dd-AFC4-6F175D3DCCD1}">
-                  <a14:hiddenFill xmlns="" xmlns:a14="http://schemas.microsoft.com/office/drawing/2010/main">
+                  <a14:hiddenFill xmlns:a14="http://schemas.microsoft.com/office/drawing/2010/main" xmlns="">
                     <a:solidFill>
                       <a:srgbClr val="FFFFFF"/>
                     </a:solidFill>
                   </a14:hiddenFill>
                 </a:ext>
                 <a:ext uri="{91240B29-F687-4f45-9708-019B960494DF}">
-                  <a14:hiddenLine xmlns="" xmlns:a14="http://schemas.microsoft.com/office/drawing/2010/main" w="9525">
+                  <a14:hiddenLine xmlns:a14="http://schemas.microsoft.com/office/drawing/2010/main" xmlns="" w="9525">
                     <a:solidFill>
                       <a:srgbClr val="000000"/>
                     </a:solidFill>
@@ -28646,7 +28657,7 @@
               </a:ln>
               <a:extLst>
                 <a:ext uri="{909E8E84-426E-40dd-AFC4-6F175D3DCCD1}">
-                  <a14:hiddenFill xmlns="" xmlns:a14="http://schemas.microsoft.com/office/drawing/2010/main">
+                  <a14:hiddenFill xmlns:a14="http://schemas.microsoft.com/office/drawing/2010/main" xmlns="">
                     <a:solidFill>
                       <a:srgbClr val="FFFFFF"/>
                     </a:solidFill>
@@ -28805,7 +28816,7 @@
               </a:ln>
               <a:extLst>
                 <a:ext uri="{909E8E84-426E-40dd-AFC4-6F175D3DCCD1}">
-                  <a14:hiddenFill xmlns="" xmlns:a14="http://schemas.microsoft.com/office/drawing/2010/main">
+                  <a14:hiddenFill xmlns:a14="http://schemas.microsoft.com/office/drawing/2010/main" xmlns="">
                     <a:solidFill>
                       <a:srgbClr val="FFFFFF"/>
                     </a:solidFill>
@@ -28964,7 +28975,7 @@
               </a:ln>
               <a:extLst>
                 <a:ext uri="{909E8E84-426E-40dd-AFC4-6F175D3DCCD1}">
-                  <a14:hiddenFill xmlns="" xmlns:a14="http://schemas.microsoft.com/office/drawing/2010/main">
+                  <a14:hiddenFill xmlns:a14="http://schemas.microsoft.com/office/drawing/2010/main" xmlns="">
                     <a:solidFill>
                       <a:srgbClr val="FFFFFF"/>
                     </a:solidFill>
@@ -29118,14 +29129,14 @@
               </a:ln>
               <a:extLst>
                 <a:ext uri="{909E8E84-426E-40dd-AFC4-6F175D3DCCD1}">
-                  <a14:hiddenFill xmlns="" xmlns:a14="http://schemas.microsoft.com/office/drawing/2010/main">
+                  <a14:hiddenFill xmlns:a14="http://schemas.microsoft.com/office/drawing/2010/main" xmlns="">
                     <a:solidFill>
                       <a:srgbClr val="FFFFFF"/>
                     </a:solidFill>
                   </a14:hiddenFill>
                 </a:ext>
                 <a:ext uri="{91240B29-F687-4f45-9708-019B960494DF}">
-                  <a14:hiddenLine xmlns="" xmlns:a14="http://schemas.microsoft.com/office/drawing/2010/main" w="12700">
+                  <a14:hiddenLine xmlns:a14="http://schemas.microsoft.com/office/drawing/2010/main" xmlns="" w="12700">
                     <a:solidFill>
                       <a:srgbClr val="000000"/>
                     </a:solidFill>
@@ -29293,14 +29304,14 @@
               </a:ln>
               <a:extLst>
                 <a:ext uri="{909E8E84-426E-40dd-AFC4-6F175D3DCCD1}">
-                  <a14:hiddenFill xmlns="" xmlns:a14="http://schemas.microsoft.com/office/drawing/2010/main">
+                  <a14:hiddenFill xmlns:a14="http://schemas.microsoft.com/office/drawing/2010/main" xmlns="">
                     <a:solidFill>
                       <a:srgbClr val="FFFFFF"/>
                     </a:solidFill>
                   </a14:hiddenFill>
                 </a:ext>
                 <a:ext uri="{91240B29-F687-4f45-9708-019B960494DF}">
-                  <a14:hiddenLine xmlns="" xmlns:a14="http://schemas.microsoft.com/office/drawing/2010/main" w="12700">
+                  <a14:hiddenLine xmlns:a14="http://schemas.microsoft.com/office/drawing/2010/main" xmlns="" w="12700">
                     <a:solidFill>
                       <a:srgbClr val="000000"/>
                     </a:solidFill>
@@ -29468,14 +29479,14 @@
               </a:ln>
               <a:extLst>
                 <a:ext uri="{909E8E84-426E-40dd-AFC4-6F175D3DCCD1}">
-                  <a14:hiddenFill xmlns="" xmlns:a14="http://schemas.microsoft.com/office/drawing/2010/main">
+                  <a14:hiddenFill xmlns:a14="http://schemas.microsoft.com/office/drawing/2010/main" xmlns="">
                     <a:solidFill>
                       <a:srgbClr val="FFFFFF"/>
                     </a:solidFill>
                   </a14:hiddenFill>
                 </a:ext>
                 <a:ext uri="{91240B29-F687-4f45-9708-019B960494DF}">
-                  <a14:hiddenLine xmlns="" xmlns:a14="http://schemas.microsoft.com/office/drawing/2010/main" w="12700">
+                  <a14:hiddenLine xmlns:a14="http://schemas.microsoft.com/office/drawing/2010/main" xmlns="" w="12700">
                     <a:solidFill>
                       <a:srgbClr val="000000"/>
                     </a:solidFill>
@@ -29648,7 +29659,7 @@
               </a:ln>
               <a:extLst>
                 <a:ext uri="{909E8E84-426E-40dd-AFC4-6F175D3DCCD1}">
-                  <a14:hiddenFill xmlns="" xmlns:a14="http://schemas.microsoft.com/office/drawing/2010/main">
+                  <a14:hiddenFill xmlns:a14="http://schemas.microsoft.com/office/drawing/2010/main" xmlns="">
                     <a:noFill/>
                   </a14:hiddenFill>
                 </a:ext>
@@ -29689,7 +29700,7 @@
               </a:ln>
               <a:extLst>
                 <a:ext uri="{909E8E84-426E-40dd-AFC4-6F175D3DCCD1}">
-                  <a14:hiddenFill xmlns="" xmlns:a14="http://schemas.microsoft.com/office/drawing/2010/main">
+                  <a14:hiddenFill xmlns:a14="http://schemas.microsoft.com/office/drawing/2010/main" xmlns="">
                     <a:noFill/>
                   </a14:hiddenFill>
                 </a:ext>
@@ -29730,7 +29741,7 @@
               </a:ln>
               <a:extLst>
                 <a:ext uri="{909E8E84-426E-40dd-AFC4-6F175D3DCCD1}">
-                  <a14:hiddenFill xmlns="" xmlns:a14="http://schemas.microsoft.com/office/drawing/2010/main">
+                  <a14:hiddenFill xmlns:a14="http://schemas.microsoft.com/office/drawing/2010/main" xmlns="">
                     <a:solidFill>
                       <a:srgbClr val="FFFFFF"/>
                     </a:solidFill>
@@ -29889,7 +29900,7 @@
               </a:ln>
               <a:extLst>
                 <a:ext uri="{909E8E84-426E-40dd-AFC4-6F175D3DCCD1}">
-                  <a14:hiddenFill xmlns="" xmlns:a14="http://schemas.microsoft.com/office/drawing/2010/main">
+                  <a14:hiddenFill xmlns:a14="http://schemas.microsoft.com/office/drawing/2010/main" xmlns="">
                     <a:solidFill>
                       <a:srgbClr val="FFFFFF"/>
                     </a:solidFill>
@@ -30048,7 +30059,7 @@
               </a:ln>
               <a:extLst>
                 <a:ext uri="{909E8E84-426E-40dd-AFC4-6F175D3DCCD1}">
-                  <a14:hiddenFill xmlns="" xmlns:a14="http://schemas.microsoft.com/office/drawing/2010/main">
+                  <a14:hiddenFill xmlns:a14="http://schemas.microsoft.com/office/drawing/2010/main" xmlns="">
                     <a:solidFill>
                       <a:srgbClr val="FFFFFF"/>
                     </a:solidFill>
@@ -30202,14 +30213,14 @@
               </a:ln>
               <a:extLst>
                 <a:ext uri="{909E8E84-426E-40dd-AFC4-6F175D3DCCD1}">
-                  <a14:hiddenFill xmlns="" xmlns:a14="http://schemas.microsoft.com/office/drawing/2010/main">
+                  <a14:hiddenFill xmlns:a14="http://schemas.microsoft.com/office/drawing/2010/main" xmlns="">
                     <a:solidFill>
                       <a:srgbClr val="FFFFFF"/>
                     </a:solidFill>
                   </a14:hiddenFill>
                 </a:ext>
                 <a:ext uri="{91240B29-F687-4f45-9708-019B960494DF}">
-                  <a14:hiddenLine xmlns="" xmlns:a14="http://schemas.microsoft.com/office/drawing/2010/main" w="12700">
+                  <a14:hiddenLine xmlns:a14="http://schemas.microsoft.com/office/drawing/2010/main" xmlns="" w="12700">
                     <a:solidFill>
                       <a:srgbClr val="000000"/>
                     </a:solidFill>
@@ -30377,14 +30388,14 @@
               </a:ln>
               <a:extLst>
                 <a:ext uri="{909E8E84-426E-40dd-AFC4-6F175D3DCCD1}">
-                  <a14:hiddenFill xmlns="" xmlns:a14="http://schemas.microsoft.com/office/drawing/2010/main">
+                  <a14:hiddenFill xmlns:a14="http://schemas.microsoft.com/office/drawing/2010/main" xmlns="">
                     <a:solidFill>
                       <a:srgbClr val="FFFFFF"/>
                     </a:solidFill>
                   </a14:hiddenFill>
                 </a:ext>
                 <a:ext uri="{91240B29-F687-4f45-9708-019B960494DF}">
-                  <a14:hiddenLine xmlns="" xmlns:a14="http://schemas.microsoft.com/office/drawing/2010/main" w="12700">
+                  <a14:hiddenLine xmlns:a14="http://schemas.microsoft.com/office/drawing/2010/main" xmlns="" w="12700">
                     <a:solidFill>
                       <a:srgbClr val="000000"/>
                     </a:solidFill>
@@ -30557,7 +30568,7 @@
               </a:ln>
               <a:extLst>
                 <a:ext uri="{909E8E84-426E-40dd-AFC4-6F175D3DCCD1}">
-                  <a14:hiddenFill xmlns="" xmlns:a14="http://schemas.microsoft.com/office/drawing/2010/main">
+                  <a14:hiddenFill xmlns:a14="http://schemas.microsoft.com/office/drawing/2010/main" xmlns="">
                     <a:noFill/>
                   </a14:hiddenFill>
                 </a:ext>
@@ -30598,7 +30609,7 @@
               </a:ln>
               <a:extLst>
                 <a:ext uri="{909E8E84-426E-40dd-AFC4-6F175D3DCCD1}">
-                  <a14:hiddenFill xmlns="" xmlns:a14="http://schemas.microsoft.com/office/drawing/2010/main">
+                  <a14:hiddenFill xmlns:a14="http://schemas.microsoft.com/office/drawing/2010/main" xmlns="">
                     <a:noFill/>
                   </a14:hiddenFill>
                 </a:ext>
@@ -30639,7 +30650,7 @@
               </a:ln>
               <a:extLst>
                 <a:ext uri="{909E8E84-426E-40dd-AFC4-6F175D3DCCD1}">
-                  <a14:hiddenFill xmlns="" xmlns:a14="http://schemas.microsoft.com/office/drawing/2010/main">
+                  <a14:hiddenFill xmlns:a14="http://schemas.microsoft.com/office/drawing/2010/main" xmlns="">
                     <a:solidFill>
                       <a:srgbClr val="FFFFFF"/>
                     </a:solidFill>
@@ -30798,7 +30809,7 @@
               </a:ln>
               <a:extLst>
                 <a:ext uri="{909E8E84-426E-40dd-AFC4-6F175D3DCCD1}">
-                  <a14:hiddenFill xmlns="" xmlns:a14="http://schemas.microsoft.com/office/drawing/2010/main">
+                  <a14:hiddenFill xmlns:a14="http://schemas.microsoft.com/office/drawing/2010/main" xmlns="">
                     <a:noFill/>
                   </a14:hiddenFill>
                 </a:ext>
@@ -30839,7 +30850,7 @@
               </a:ln>
               <a:extLst>
                 <a:ext uri="{909E8E84-426E-40dd-AFC4-6F175D3DCCD1}">
-                  <a14:hiddenFill xmlns="" xmlns:a14="http://schemas.microsoft.com/office/drawing/2010/main">
+                  <a14:hiddenFill xmlns:a14="http://schemas.microsoft.com/office/drawing/2010/main" xmlns="">
                     <a:noFill/>
                   </a14:hiddenFill>
                 </a:ext>
@@ -30875,14 +30886,14 @@
               </a:ln>
               <a:extLst>
                 <a:ext uri="{909E8E84-426E-40dd-AFC4-6F175D3DCCD1}">
-                  <a14:hiddenFill xmlns="" xmlns:a14="http://schemas.microsoft.com/office/drawing/2010/main">
+                  <a14:hiddenFill xmlns:a14="http://schemas.microsoft.com/office/drawing/2010/main" xmlns="">
                     <a:solidFill>
                       <a:srgbClr val="FFFFFF"/>
                     </a:solidFill>
                   </a14:hiddenFill>
                 </a:ext>
                 <a:ext uri="{91240B29-F687-4f45-9708-019B960494DF}">
-                  <a14:hiddenLine xmlns="" xmlns:a14="http://schemas.microsoft.com/office/drawing/2010/main" w="12700">
+                  <a14:hiddenLine xmlns:a14="http://schemas.microsoft.com/office/drawing/2010/main" xmlns="" w="12700">
                     <a:solidFill>
                       <a:srgbClr val="000000"/>
                     </a:solidFill>
@@ -31050,14 +31061,14 @@
               </a:ln>
               <a:extLst>
                 <a:ext uri="{909E8E84-426E-40dd-AFC4-6F175D3DCCD1}">
-                  <a14:hiddenFill xmlns="" xmlns:a14="http://schemas.microsoft.com/office/drawing/2010/main">
+                  <a14:hiddenFill xmlns:a14="http://schemas.microsoft.com/office/drawing/2010/main" xmlns="">
                     <a:solidFill>
                       <a:srgbClr val="FFFFFF"/>
                     </a:solidFill>
                   </a14:hiddenFill>
                 </a:ext>
                 <a:ext uri="{91240B29-F687-4f45-9708-019B960494DF}">
-                  <a14:hiddenLine xmlns="" xmlns:a14="http://schemas.microsoft.com/office/drawing/2010/main" w="12700">
+                  <a14:hiddenLine xmlns:a14="http://schemas.microsoft.com/office/drawing/2010/main" xmlns="" w="12700">
                     <a:solidFill>
                       <a:srgbClr val="000000"/>
                     </a:solidFill>

--- a/u08a_bTrees/notes/_a - Classifying binary trees and Tree Traversal.pptx
+++ b/u08a_bTrees/notes/_a - Classifying binary trees and Tree Traversal.pptx
@@ -2786,10 +2786,10 @@
           </a:ln>
           <a:extLst>
             <a:ext uri="{FAA26D3D-D897-4be2-8F04-BA451C77F1D7}">
-              <ma14:placeholderFlag xmlns:ma14="http://schemas.microsoft.com/office/mac/drawingml/2011/main" xmlns="" val="1"/>
+              <ma14:placeholderFlag xmlns="" xmlns:ma14="http://schemas.microsoft.com/office/mac/drawingml/2011/main" val="1"/>
             </a:ext>
             <a:ext uri="{909E8E84-426E-40dd-AFC4-6F175D3DCCD1}">
-              <a14:hiddenFill xmlns="" xmlns:a14="http://schemas.microsoft.com/office/drawing/2010/main">
+              <a14:hiddenFill xmlns:a14="http://schemas.microsoft.com/office/drawing/2010/main" xmlns="">
                 <a:solidFill>
                   <a:srgbClr val="FFFFFF"/>
                 </a:solidFill>
@@ -2812,17 +2812,17 @@
           <a:noFill/>
           <a:extLst>
             <a:ext uri="{FAA26D3D-D897-4be2-8F04-BA451C77F1D7}">
-              <ma14:placeholderFlag xmlns:ma14="http://schemas.microsoft.com/office/mac/drawingml/2011/main" xmlns="" val="1"/>
+              <ma14:placeholderFlag xmlns="" xmlns:ma14="http://schemas.microsoft.com/office/mac/drawingml/2011/main" val="1"/>
             </a:ext>
             <a:ext uri="{909E8E84-426E-40dd-AFC4-6F175D3DCCD1}">
-              <a14:hiddenFill xmlns="" xmlns:a14="http://schemas.microsoft.com/office/drawing/2010/main">
+              <a14:hiddenFill xmlns:a14="http://schemas.microsoft.com/office/drawing/2010/main" xmlns="">
                 <a:solidFill>
                   <a:srgbClr val="FFFFFF"/>
                 </a:solidFill>
               </a14:hiddenFill>
             </a:ext>
             <a:ext uri="{91240B29-F687-4f45-9708-019B960494DF}">
-              <a14:hiddenLine xmlns="" xmlns:a14="http://schemas.microsoft.com/office/drawing/2010/main" w="9525">
+              <a14:hiddenLine xmlns:a14="http://schemas.microsoft.com/office/drawing/2010/main" xmlns="" w="9525">
                 <a:solidFill>
                   <a:srgbClr val="000000"/>
                 </a:solidFill>
@@ -2861,14 +2861,14 @@
           <a:noFill/>
           <a:extLst>
             <a:ext uri="{909E8E84-426E-40dd-AFC4-6F175D3DCCD1}">
-              <a14:hiddenFill xmlns="" xmlns:a14="http://schemas.microsoft.com/office/drawing/2010/main">
+              <a14:hiddenFill xmlns:a14="http://schemas.microsoft.com/office/drawing/2010/main" xmlns="">
                 <a:solidFill>
                   <a:srgbClr val="FFFFFF"/>
                 </a:solidFill>
               </a14:hiddenFill>
             </a:ext>
             <a:ext uri="{91240B29-F687-4f45-9708-019B960494DF}">
-              <a14:hiddenLine xmlns="" xmlns:a14="http://schemas.microsoft.com/office/drawing/2010/main" w="9525">
+              <a14:hiddenLine xmlns:a14="http://schemas.microsoft.com/office/drawing/2010/main" xmlns="" w="9525">
                 <a:solidFill>
                   <a:srgbClr val="000000"/>
                 </a:solidFill>
@@ -3059,10 +3059,10 @@
           </a:ln>
           <a:extLst>
             <a:ext uri="{FAA26D3D-D897-4be2-8F04-BA451C77F1D7}">
-              <ma14:placeholderFlag xmlns:ma14="http://schemas.microsoft.com/office/mac/drawingml/2011/main" xmlns="" val="1"/>
+              <ma14:placeholderFlag xmlns="" xmlns:ma14="http://schemas.microsoft.com/office/mac/drawingml/2011/main" val="1"/>
             </a:ext>
             <a:ext uri="{909E8E84-426E-40dd-AFC4-6F175D3DCCD1}">
-              <a14:hiddenFill xmlns="" xmlns:a14="http://schemas.microsoft.com/office/drawing/2010/main">
+              <a14:hiddenFill xmlns:a14="http://schemas.microsoft.com/office/drawing/2010/main" xmlns="">
                 <a:solidFill>
                   <a:srgbClr val="FFFFFF"/>
                 </a:solidFill>
@@ -3085,17 +3085,17 @@
           <a:noFill/>
           <a:extLst>
             <a:ext uri="{FAA26D3D-D897-4be2-8F04-BA451C77F1D7}">
-              <ma14:placeholderFlag xmlns:ma14="http://schemas.microsoft.com/office/mac/drawingml/2011/main" xmlns="" val="1"/>
+              <ma14:placeholderFlag xmlns="" xmlns:ma14="http://schemas.microsoft.com/office/mac/drawingml/2011/main" val="1"/>
             </a:ext>
             <a:ext uri="{909E8E84-426E-40dd-AFC4-6F175D3DCCD1}">
-              <a14:hiddenFill xmlns="" xmlns:a14="http://schemas.microsoft.com/office/drawing/2010/main">
+              <a14:hiddenFill xmlns:a14="http://schemas.microsoft.com/office/drawing/2010/main" xmlns="">
                 <a:solidFill>
                   <a:srgbClr val="FFFFFF"/>
                 </a:solidFill>
               </a14:hiddenFill>
             </a:ext>
             <a:ext uri="{91240B29-F687-4f45-9708-019B960494DF}">
-              <a14:hiddenLine xmlns="" xmlns:a14="http://schemas.microsoft.com/office/drawing/2010/main" w="9525">
+              <a14:hiddenLine xmlns:a14="http://schemas.microsoft.com/office/drawing/2010/main" xmlns="" w="9525">
                 <a:solidFill>
                   <a:srgbClr val="000000"/>
                 </a:solidFill>
@@ -3134,14 +3134,14 @@
           <a:noFill/>
           <a:extLst>
             <a:ext uri="{909E8E84-426E-40dd-AFC4-6F175D3DCCD1}">
-              <a14:hiddenFill xmlns="" xmlns:a14="http://schemas.microsoft.com/office/drawing/2010/main">
+              <a14:hiddenFill xmlns:a14="http://schemas.microsoft.com/office/drawing/2010/main" xmlns="">
                 <a:solidFill>
                   <a:srgbClr val="FFFFFF"/>
                 </a:solidFill>
               </a14:hiddenFill>
             </a:ext>
             <a:ext uri="{91240B29-F687-4f45-9708-019B960494DF}">
-              <a14:hiddenLine xmlns="" xmlns:a14="http://schemas.microsoft.com/office/drawing/2010/main" w="9525">
+              <a14:hiddenLine xmlns:a14="http://schemas.microsoft.com/office/drawing/2010/main" xmlns="" w="9525">
                 <a:solidFill>
                   <a:srgbClr val="000000"/>
                 </a:solidFill>
@@ -3332,10 +3332,10 @@
           </a:ln>
           <a:extLst>
             <a:ext uri="{FAA26D3D-D897-4be2-8F04-BA451C77F1D7}">
-              <ma14:placeholderFlag xmlns:ma14="http://schemas.microsoft.com/office/mac/drawingml/2011/main" xmlns="" val="1"/>
+              <ma14:placeholderFlag xmlns="" xmlns:ma14="http://schemas.microsoft.com/office/mac/drawingml/2011/main" val="1"/>
             </a:ext>
             <a:ext uri="{909E8E84-426E-40dd-AFC4-6F175D3DCCD1}">
-              <a14:hiddenFill xmlns="" xmlns:a14="http://schemas.microsoft.com/office/drawing/2010/main">
+              <a14:hiddenFill xmlns:a14="http://schemas.microsoft.com/office/drawing/2010/main" xmlns="">
                 <a:solidFill>
                   <a:srgbClr val="FFFFFF"/>
                 </a:solidFill>
@@ -3358,17 +3358,17 @@
           <a:noFill/>
           <a:extLst>
             <a:ext uri="{FAA26D3D-D897-4be2-8F04-BA451C77F1D7}">
-              <ma14:placeholderFlag xmlns:ma14="http://schemas.microsoft.com/office/mac/drawingml/2011/main" xmlns="" val="1"/>
+              <ma14:placeholderFlag xmlns="" xmlns:ma14="http://schemas.microsoft.com/office/mac/drawingml/2011/main" val="1"/>
             </a:ext>
             <a:ext uri="{909E8E84-426E-40dd-AFC4-6F175D3DCCD1}">
-              <a14:hiddenFill xmlns="" xmlns:a14="http://schemas.microsoft.com/office/drawing/2010/main">
+              <a14:hiddenFill xmlns:a14="http://schemas.microsoft.com/office/drawing/2010/main" xmlns="">
                 <a:solidFill>
                   <a:srgbClr val="FFFFFF"/>
                 </a:solidFill>
               </a14:hiddenFill>
             </a:ext>
             <a:ext uri="{91240B29-F687-4f45-9708-019B960494DF}">
-              <a14:hiddenLine xmlns="" xmlns:a14="http://schemas.microsoft.com/office/drawing/2010/main" w="9525">
+              <a14:hiddenLine xmlns:a14="http://schemas.microsoft.com/office/drawing/2010/main" xmlns="" w="9525">
                 <a:solidFill>
                   <a:srgbClr val="000000"/>
                 </a:solidFill>
@@ -3407,14 +3407,14 @@
           <a:noFill/>
           <a:extLst>
             <a:ext uri="{909E8E84-426E-40dd-AFC4-6F175D3DCCD1}">
-              <a14:hiddenFill xmlns="" xmlns:a14="http://schemas.microsoft.com/office/drawing/2010/main">
+              <a14:hiddenFill xmlns:a14="http://schemas.microsoft.com/office/drawing/2010/main" xmlns="">
                 <a:solidFill>
                   <a:srgbClr val="FFFFFF"/>
                 </a:solidFill>
               </a14:hiddenFill>
             </a:ext>
             <a:ext uri="{91240B29-F687-4f45-9708-019B960494DF}">
-              <a14:hiddenLine xmlns="" xmlns:a14="http://schemas.microsoft.com/office/drawing/2010/main" w="9525">
+              <a14:hiddenLine xmlns:a14="http://schemas.microsoft.com/office/drawing/2010/main" xmlns="" w="9525">
                 <a:solidFill>
                   <a:srgbClr val="000000"/>
                 </a:solidFill>
@@ -3605,10 +3605,10 @@
           </a:ln>
           <a:extLst>
             <a:ext uri="{FAA26D3D-D897-4be2-8F04-BA451C77F1D7}">
-              <ma14:placeholderFlag xmlns:ma14="http://schemas.microsoft.com/office/mac/drawingml/2011/main" xmlns="" val="1"/>
+              <ma14:placeholderFlag xmlns="" xmlns:ma14="http://schemas.microsoft.com/office/mac/drawingml/2011/main" val="1"/>
             </a:ext>
             <a:ext uri="{909E8E84-426E-40dd-AFC4-6F175D3DCCD1}">
-              <a14:hiddenFill xmlns="" xmlns:a14="http://schemas.microsoft.com/office/drawing/2010/main">
+              <a14:hiddenFill xmlns:a14="http://schemas.microsoft.com/office/drawing/2010/main" xmlns="">
                 <a:solidFill>
                   <a:srgbClr val="FFFFFF"/>
                 </a:solidFill>
@@ -3631,17 +3631,17 @@
           <a:noFill/>
           <a:extLst>
             <a:ext uri="{FAA26D3D-D897-4be2-8F04-BA451C77F1D7}">
-              <ma14:placeholderFlag xmlns:ma14="http://schemas.microsoft.com/office/mac/drawingml/2011/main" xmlns="" val="1"/>
+              <ma14:placeholderFlag xmlns="" xmlns:ma14="http://schemas.microsoft.com/office/mac/drawingml/2011/main" val="1"/>
             </a:ext>
             <a:ext uri="{909E8E84-426E-40dd-AFC4-6F175D3DCCD1}">
-              <a14:hiddenFill xmlns="" xmlns:a14="http://schemas.microsoft.com/office/drawing/2010/main">
+              <a14:hiddenFill xmlns:a14="http://schemas.microsoft.com/office/drawing/2010/main" xmlns="">
                 <a:solidFill>
                   <a:srgbClr val="FFFFFF"/>
                 </a:solidFill>
               </a14:hiddenFill>
             </a:ext>
             <a:ext uri="{91240B29-F687-4f45-9708-019B960494DF}">
-              <a14:hiddenLine xmlns="" xmlns:a14="http://schemas.microsoft.com/office/drawing/2010/main" w="9525">
+              <a14:hiddenLine xmlns:a14="http://schemas.microsoft.com/office/drawing/2010/main" xmlns="" w="9525">
                 <a:solidFill>
                   <a:srgbClr val="000000"/>
                 </a:solidFill>
@@ -3680,14 +3680,14 @@
           <a:noFill/>
           <a:extLst>
             <a:ext uri="{909E8E84-426E-40dd-AFC4-6F175D3DCCD1}">
-              <a14:hiddenFill xmlns="" xmlns:a14="http://schemas.microsoft.com/office/drawing/2010/main">
+              <a14:hiddenFill xmlns:a14="http://schemas.microsoft.com/office/drawing/2010/main" xmlns="">
                 <a:solidFill>
                   <a:srgbClr val="FFFFFF"/>
                 </a:solidFill>
               </a14:hiddenFill>
             </a:ext>
             <a:ext uri="{91240B29-F687-4f45-9708-019B960494DF}">
-              <a14:hiddenLine xmlns="" xmlns:a14="http://schemas.microsoft.com/office/drawing/2010/main" w="9525">
+              <a14:hiddenLine xmlns:a14="http://schemas.microsoft.com/office/drawing/2010/main" xmlns="" w="9525">
                 <a:solidFill>
                   <a:srgbClr val="000000"/>
                 </a:solidFill>
@@ -3878,10 +3878,10 @@
           </a:ln>
           <a:extLst>
             <a:ext uri="{FAA26D3D-D897-4be2-8F04-BA451C77F1D7}">
-              <ma14:placeholderFlag xmlns:ma14="http://schemas.microsoft.com/office/mac/drawingml/2011/main" xmlns="" val="1"/>
+              <ma14:placeholderFlag xmlns="" xmlns:ma14="http://schemas.microsoft.com/office/mac/drawingml/2011/main" val="1"/>
             </a:ext>
             <a:ext uri="{909E8E84-426E-40dd-AFC4-6F175D3DCCD1}">
-              <a14:hiddenFill xmlns="" xmlns:a14="http://schemas.microsoft.com/office/drawing/2010/main">
+              <a14:hiddenFill xmlns:a14="http://schemas.microsoft.com/office/drawing/2010/main" xmlns="">
                 <a:solidFill>
                   <a:srgbClr val="FFFFFF"/>
                 </a:solidFill>
@@ -3904,17 +3904,17 @@
           <a:noFill/>
           <a:extLst>
             <a:ext uri="{FAA26D3D-D897-4be2-8F04-BA451C77F1D7}">
-              <ma14:placeholderFlag xmlns:ma14="http://schemas.microsoft.com/office/mac/drawingml/2011/main" xmlns="" val="1"/>
+              <ma14:placeholderFlag xmlns="" xmlns:ma14="http://schemas.microsoft.com/office/mac/drawingml/2011/main" val="1"/>
             </a:ext>
             <a:ext uri="{909E8E84-426E-40dd-AFC4-6F175D3DCCD1}">
-              <a14:hiddenFill xmlns="" xmlns:a14="http://schemas.microsoft.com/office/drawing/2010/main">
+              <a14:hiddenFill xmlns:a14="http://schemas.microsoft.com/office/drawing/2010/main" xmlns="">
                 <a:solidFill>
                   <a:srgbClr val="FFFFFF"/>
                 </a:solidFill>
               </a14:hiddenFill>
             </a:ext>
             <a:ext uri="{91240B29-F687-4f45-9708-019B960494DF}">
-              <a14:hiddenLine xmlns="" xmlns:a14="http://schemas.microsoft.com/office/drawing/2010/main" w="9525">
+              <a14:hiddenLine xmlns:a14="http://schemas.microsoft.com/office/drawing/2010/main" xmlns="" w="9525">
                 <a:solidFill>
                   <a:srgbClr val="000000"/>
                 </a:solidFill>
@@ -3953,14 +3953,14 @@
           <a:noFill/>
           <a:extLst>
             <a:ext uri="{909E8E84-426E-40dd-AFC4-6F175D3DCCD1}">
-              <a14:hiddenFill xmlns="" xmlns:a14="http://schemas.microsoft.com/office/drawing/2010/main">
+              <a14:hiddenFill xmlns:a14="http://schemas.microsoft.com/office/drawing/2010/main" xmlns="">
                 <a:solidFill>
                   <a:srgbClr val="FFFFFF"/>
                 </a:solidFill>
               </a14:hiddenFill>
             </a:ext>
             <a:ext uri="{91240B29-F687-4f45-9708-019B960494DF}">
-              <a14:hiddenLine xmlns="" xmlns:a14="http://schemas.microsoft.com/office/drawing/2010/main" w="9525">
+              <a14:hiddenLine xmlns:a14="http://schemas.microsoft.com/office/drawing/2010/main" xmlns="" w="9525">
                 <a:solidFill>
                   <a:srgbClr val="000000"/>
                 </a:solidFill>
@@ -4151,10 +4151,10 @@
           </a:ln>
           <a:extLst>
             <a:ext uri="{FAA26D3D-D897-4be2-8F04-BA451C77F1D7}">
-              <ma14:placeholderFlag xmlns:ma14="http://schemas.microsoft.com/office/mac/drawingml/2011/main" xmlns="" val="1"/>
+              <ma14:placeholderFlag xmlns="" xmlns:ma14="http://schemas.microsoft.com/office/mac/drawingml/2011/main" val="1"/>
             </a:ext>
             <a:ext uri="{909E8E84-426E-40dd-AFC4-6F175D3DCCD1}">
-              <a14:hiddenFill xmlns="" xmlns:a14="http://schemas.microsoft.com/office/drawing/2010/main">
+              <a14:hiddenFill xmlns:a14="http://schemas.microsoft.com/office/drawing/2010/main" xmlns="">
                 <a:solidFill>
                   <a:srgbClr val="FFFFFF"/>
                 </a:solidFill>
@@ -4177,17 +4177,17 @@
           <a:noFill/>
           <a:extLst>
             <a:ext uri="{FAA26D3D-D897-4be2-8F04-BA451C77F1D7}">
-              <ma14:placeholderFlag xmlns:ma14="http://schemas.microsoft.com/office/mac/drawingml/2011/main" xmlns="" val="1"/>
+              <ma14:placeholderFlag xmlns="" xmlns:ma14="http://schemas.microsoft.com/office/mac/drawingml/2011/main" val="1"/>
             </a:ext>
             <a:ext uri="{909E8E84-426E-40dd-AFC4-6F175D3DCCD1}">
-              <a14:hiddenFill xmlns="" xmlns:a14="http://schemas.microsoft.com/office/drawing/2010/main">
+              <a14:hiddenFill xmlns:a14="http://schemas.microsoft.com/office/drawing/2010/main" xmlns="">
                 <a:solidFill>
                   <a:srgbClr val="FFFFFF"/>
                 </a:solidFill>
               </a14:hiddenFill>
             </a:ext>
             <a:ext uri="{91240B29-F687-4f45-9708-019B960494DF}">
-              <a14:hiddenLine xmlns="" xmlns:a14="http://schemas.microsoft.com/office/drawing/2010/main" w="9525">
+              <a14:hiddenLine xmlns:a14="http://schemas.microsoft.com/office/drawing/2010/main" xmlns="" w="9525">
                 <a:solidFill>
                   <a:srgbClr val="000000"/>
                 </a:solidFill>
@@ -4226,14 +4226,14 @@
           <a:noFill/>
           <a:extLst>
             <a:ext uri="{909E8E84-426E-40dd-AFC4-6F175D3DCCD1}">
-              <a14:hiddenFill xmlns="" xmlns:a14="http://schemas.microsoft.com/office/drawing/2010/main">
+              <a14:hiddenFill xmlns:a14="http://schemas.microsoft.com/office/drawing/2010/main" xmlns="">
                 <a:solidFill>
                   <a:srgbClr val="FFFFFF"/>
                 </a:solidFill>
               </a14:hiddenFill>
             </a:ext>
             <a:ext uri="{91240B29-F687-4f45-9708-019B960494DF}">
-              <a14:hiddenLine xmlns="" xmlns:a14="http://schemas.microsoft.com/office/drawing/2010/main" w="9525">
+              <a14:hiddenLine xmlns:a14="http://schemas.microsoft.com/office/drawing/2010/main" xmlns="" w="9525">
                 <a:solidFill>
                   <a:srgbClr val="000000"/>
                 </a:solidFill>
@@ -4424,10 +4424,10 @@
           </a:ln>
           <a:extLst>
             <a:ext uri="{FAA26D3D-D897-4be2-8F04-BA451C77F1D7}">
-              <ma14:placeholderFlag xmlns:ma14="http://schemas.microsoft.com/office/mac/drawingml/2011/main" xmlns="" val="1"/>
+              <ma14:placeholderFlag xmlns="" xmlns:ma14="http://schemas.microsoft.com/office/mac/drawingml/2011/main" val="1"/>
             </a:ext>
             <a:ext uri="{909E8E84-426E-40dd-AFC4-6F175D3DCCD1}">
-              <a14:hiddenFill xmlns="" xmlns:a14="http://schemas.microsoft.com/office/drawing/2010/main">
+              <a14:hiddenFill xmlns:a14="http://schemas.microsoft.com/office/drawing/2010/main" xmlns="">
                 <a:solidFill>
                   <a:srgbClr val="FFFFFF"/>
                 </a:solidFill>
@@ -4450,17 +4450,17 @@
           <a:noFill/>
           <a:extLst>
             <a:ext uri="{FAA26D3D-D897-4be2-8F04-BA451C77F1D7}">
-              <ma14:placeholderFlag xmlns:ma14="http://schemas.microsoft.com/office/mac/drawingml/2011/main" xmlns="" val="1"/>
+              <ma14:placeholderFlag xmlns="" xmlns:ma14="http://schemas.microsoft.com/office/mac/drawingml/2011/main" val="1"/>
             </a:ext>
             <a:ext uri="{909E8E84-426E-40dd-AFC4-6F175D3DCCD1}">
-              <a14:hiddenFill xmlns="" xmlns:a14="http://schemas.microsoft.com/office/drawing/2010/main">
+              <a14:hiddenFill xmlns:a14="http://schemas.microsoft.com/office/drawing/2010/main" xmlns="">
                 <a:solidFill>
                   <a:srgbClr val="FFFFFF"/>
                 </a:solidFill>
               </a14:hiddenFill>
             </a:ext>
             <a:ext uri="{91240B29-F687-4f45-9708-019B960494DF}">
-              <a14:hiddenLine xmlns="" xmlns:a14="http://schemas.microsoft.com/office/drawing/2010/main" w="9525">
+              <a14:hiddenLine xmlns:a14="http://schemas.microsoft.com/office/drawing/2010/main" xmlns="" w="9525">
                 <a:solidFill>
                   <a:srgbClr val="000000"/>
                 </a:solidFill>
@@ -4499,14 +4499,14 @@
           <a:noFill/>
           <a:extLst>
             <a:ext uri="{909E8E84-426E-40dd-AFC4-6F175D3DCCD1}">
-              <a14:hiddenFill xmlns="" xmlns:a14="http://schemas.microsoft.com/office/drawing/2010/main">
+              <a14:hiddenFill xmlns:a14="http://schemas.microsoft.com/office/drawing/2010/main" xmlns="">
                 <a:solidFill>
                   <a:srgbClr val="FFFFFF"/>
                 </a:solidFill>
               </a14:hiddenFill>
             </a:ext>
             <a:ext uri="{91240B29-F687-4f45-9708-019B960494DF}">
-              <a14:hiddenLine xmlns="" xmlns:a14="http://schemas.microsoft.com/office/drawing/2010/main" w="9525">
+              <a14:hiddenLine xmlns:a14="http://schemas.microsoft.com/office/drawing/2010/main" xmlns="" w="9525">
                 <a:solidFill>
                   <a:srgbClr val="000000"/>
                 </a:solidFill>
@@ -4834,10 +4834,10 @@
           </a:ln>
           <a:extLst>
             <a:ext uri="{FAA26D3D-D897-4be2-8F04-BA451C77F1D7}">
-              <ma14:placeholderFlag xmlns:ma14="http://schemas.microsoft.com/office/mac/drawingml/2011/main" xmlns="" val="1"/>
+              <ma14:placeholderFlag xmlns="" xmlns:ma14="http://schemas.microsoft.com/office/mac/drawingml/2011/main" val="1"/>
             </a:ext>
             <a:ext uri="{909E8E84-426E-40dd-AFC4-6F175D3DCCD1}">
-              <a14:hiddenFill xmlns="" xmlns:a14="http://schemas.microsoft.com/office/drawing/2010/main">
+              <a14:hiddenFill xmlns:a14="http://schemas.microsoft.com/office/drawing/2010/main" xmlns="">
                 <a:solidFill>
                   <a:srgbClr val="FFFFFF"/>
                 </a:solidFill>
@@ -4860,17 +4860,17 @@
           <a:noFill/>
           <a:extLst>
             <a:ext uri="{FAA26D3D-D897-4be2-8F04-BA451C77F1D7}">
-              <ma14:placeholderFlag xmlns:ma14="http://schemas.microsoft.com/office/mac/drawingml/2011/main" xmlns="" val="1"/>
+              <ma14:placeholderFlag xmlns="" xmlns:ma14="http://schemas.microsoft.com/office/mac/drawingml/2011/main" val="1"/>
             </a:ext>
             <a:ext uri="{909E8E84-426E-40dd-AFC4-6F175D3DCCD1}">
-              <a14:hiddenFill xmlns="" xmlns:a14="http://schemas.microsoft.com/office/drawing/2010/main">
+              <a14:hiddenFill xmlns:a14="http://schemas.microsoft.com/office/drawing/2010/main" xmlns="">
                 <a:solidFill>
                   <a:srgbClr val="FFFFFF"/>
                 </a:solidFill>
               </a14:hiddenFill>
             </a:ext>
             <a:ext uri="{91240B29-F687-4f45-9708-019B960494DF}">
-              <a14:hiddenLine xmlns="" xmlns:a14="http://schemas.microsoft.com/office/drawing/2010/main" w="9525">
+              <a14:hiddenLine xmlns:a14="http://schemas.microsoft.com/office/drawing/2010/main" xmlns="" w="9525">
                 <a:solidFill>
                   <a:srgbClr val="000000"/>
                 </a:solidFill>
@@ -4909,14 +4909,14 @@
           <a:noFill/>
           <a:extLst>
             <a:ext uri="{909E8E84-426E-40dd-AFC4-6F175D3DCCD1}">
-              <a14:hiddenFill xmlns="" xmlns:a14="http://schemas.microsoft.com/office/drawing/2010/main">
+              <a14:hiddenFill xmlns:a14="http://schemas.microsoft.com/office/drawing/2010/main" xmlns="">
                 <a:solidFill>
                   <a:srgbClr val="FFFFFF"/>
                 </a:solidFill>
               </a14:hiddenFill>
             </a:ext>
             <a:ext uri="{91240B29-F687-4f45-9708-019B960494DF}">
-              <a14:hiddenLine xmlns="" xmlns:a14="http://schemas.microsoft.com/office/drawing/2010/main" w="9525">
+              <a14:hiddenLine xmlns:a14="http://schemas.microsoft.com/office/drawing/2010/main" xmlns="" w="9525">
                 <a:solidFill>
                   <a:srgbClr val="000000"/>
                 </a:solidFill>
@@ -5107,10 +5107,10 @@
           </a:ln>
           <a:extLst>
             <a:ext uri="{FAA26D3D-D897-4be2-8F04-BA451C77F1D7}">
-              <ma14:placeholderFlag xmlns:ma14="http://schemas.microsoft.com/office/mac/drawingml/2011/main" xmlns="" val="1"/>
+              <ma14:placeholderFlag xmlns="" xmlns:ma14="http://schemas.microsoft.com/office/mac/drawingml/2011/main" val="1"/>
             </a:ext>
             <a:ext uri="{909E8E84-426E-40dd-AFC4-6F175D3DCCD1}">
-              <a14:hiddenFill xmlns="" xmlns:a14="http://schemas.microsoft.com/office/drawing/2010/main">
+              <a14:hiddenFill xmlns:a14="http://schemas.microsoft.com/office/drawing/2010/main" xmlns="">
                 <a:solidFill>
                   <a:srgbClr val="FFFFFF"/>
                 </a:solidFill>
@@ -5133,17 +5133,17 @@
           <a:noFill/>
           <a:extLst>
             <a:ext uri="{FAA26D3D-D897-4be2-8F04-BA451C77F1D7}">
-              <ma14:placeholderFlag xmlns:ma14="http://schemas.microsoft.com/office/mac/drawingml/2011/main" xmlns="" val="1"/>
+              <ma14:placeholderFlag xmlns="" xmlns:ma14="http://schemas.microsoft.com/office/mac/drawingml/2011/main" val="1"/>
             </a:ext>
             <a:ext uri="{909E8E84-426E-40dd-AFC4-6F175D3DCCD1}">
-              <a14:hiddenFill xmlns="" xmlns:a14="http://schemas.microsoft.com/office/drawing/2010/main">
+              <a14:hiddenFill xmlns:a14="http://schemas.microsoft.com/office/drawing/2010/main" xmlns="">
                 <a:solidFill>
                   <a:srgbClr val="FFFFFF"/>
                 </a:solidFill>
               </a14:hiddenFill>
             </a:ext>
             <a:ext uri="{91240B29-F687-4f45-9708-019B960494DF}">
-              <a14:hiddenLine xmlns="" xmlns:a14="http://schemas.microsoft.com/office/drawing/2010/main" w="9525">
+              <a14:hiddenLine xmlns:a14="http://schemas.microsoft.com/office/drawing/2010/main" xmlns="" w="9525">
                 <a:solidFill>
                   <a:srgbClr val="000000"/>
                 </a:solidFill>
@@ -5182,14 +5182,14 @@
           <a:noFill/>
           <a:extLst>
             <a:ext uri="{909E8E84-426E-40dd-AFC4-6F175D3DCCD1}">
-              <a14:hiddenFill xmlns="" xmlns:a14="http://schemas.microsoft.com/office/drawing/2010/main">
+              <a14:hiddenFill xmlns:a14="http://schemas.microsoft.com/office/drawing/2010/main" xmlns="">
                 <a:solidFill>
                   <a:srgbClr val="FFFFFF"/>
                 </a:solidFill>
               </a14:hiddenFill>
             </a:ext>
             <a:ext uri="{91240B29-F687-4f45-9708-019B960494DF}">
-              <a14:hiddenLine xmlns="" xmlns:a14="http://schemas.microsoft.com/office/drawing/2010/main" w="9525">
+              <a14:hiddenLine xmlns:a14="http://schemas.microsoft.com/office/drawing/2010/main" xmlns="" w="9525">
                 <a:solidFill>
                   <a:srgbClr val="000000"/>
                 </a:solidFill>
@@ -5380,10 +5380,10 @@
           </a:ln>
           <a:extLst>
             <a:ext uri="{FAA26D3D-D897-4be2-8F04-BA451C77F1D7}">
-              <ma14:placeholderFlag xmlns:ma14="http://schemas.microsoft.com/office/mac/drawingml/2011/main" xmlns="" val="1"/>
+              <ma14:placeholderFlag xmlns="" xmlns:ma14="http://schemas.microsoft.com/office/mac/drawingml/2011/main" val="1"/>
             </a:ext>
             <a:ext uri="{909E8E84-426E-40dd-AFC4-6F175D3DCCD1}">
-              <a14:hiddenFill xmlns="" xmlns:a14="http://schemas.microsoft.com/office/drawing/2010/main">
+              <a14:hiddenFill xmlns:a14="http://schemas.microsoft.com/office/drawing/2010/main" xmlns="">
                 <a:solidFill>
                   <a:srgbClr val="FFFFFF"/>
                 </a:solidFill>
@@ -5406,17 +5406,17 @@
           <a:noFill/>
           <a:extLst>
             <a:ext uri="{FAA26D3D-D897-4be2-8F04-BA451C77F1D7}">
-              <ma14:placeholderFlag xmlns:ma14="http://schemas.microsoft.com/office/mac/drawingml/2011/main" xmlns="" val="1"/>
+              <ma14:placeholderFlag xmlns="" xmlns:ma14="http://schemas.microsoft.com/office/mac/drawingml/2011/main" val="1"/>
             </a:ext>
             <a:ext uri="{909E8E84-426E-40dd-AFC4-6F175D3DCCD1}">
-              <a14:hiddenFill xmlns="" xmlns:a14="http://schemas.microsoft.com/office/drawing/2010/main">
+              <a14:hiddenFill xmlns:a14="http://schemas.microsoft.com/office/drawing/2010/main" xmlns="">
                 <a:solidFill>
                   <a:srgbClr val="FFFFFF"/>
                 </a:solidFill>
               </a14:hiddenFill>
             </a:ext>
             <a:ext uri="{91240B29-F687-4f45-9708-019B960494DF}">
-              <a14:hiddenLine xmlns="" xmlns:a14="http://schemas.microsoft.com/office/drawing/2010/main" w="9525">
+              <a14:hiddenLine xmlns:a14="http://schemas.microsoft.com/office/drawing/2010/main" xmlns="" w="9525">
                 <a:solidFill>
                   <a:srgbClr val="000000"/>
                 </a:solidFill>
@@ -5455,14 +5455,14 @@
           <a:noFill/>
           <a:extLst>
             <a:ext uri="{909E8E84-426E-40dd-AFC4-6F175D3DCCD1}">
-              <a14:hiddenFill xmlns="" xmlns:a14="http://schemas.microsoft.com/office/drawing/2010/main">
+              <a14:hiddenFill xmlns:a14="http://schemas.microsoft.com/office/drawing/2010/main" xmlns="">
                 <a:solidFill>
                   <a:srgbClr val="FFFFFF"/>
                 </a:solidFill>
               </a14:hiddenFill>
             </a:ext>
             <a:ext uri="{91240B29-F687-4f45-9708-019B960494DF}">
-              <a14:hiddenLine xmlns="" xmlns:a14="http://schemas.microsoft.com/office/drawing/2010/main" w="9525">
+              <a14:hiddenLine xmlns:a14="http://schemas.microsoft.com/office/drawing/2010/main" xmlns="" w="9525">
                 <a:solidFill>
                   <a:srgbClr val="000000"/>
                 </a:solidFill>
@@ -5653,10 +5653,10 @@
           </a:ln>
           <a:extLst>
             <a:ext uri="{FAA26D3D-D897-4be2-8F04-BA451C77F1D7}">
-              <ma14:placeholderFlag xmlns:ma14="http://schemas.microsoft.com/office/mac/drawingml/2011/main" xmlns="" val="1"/>
+              <ma14:placeholderFlag xmlns="" xmlns:ma14="http://schemas.microsoft.com/office/mac/drawingml/2011/main" val="1"/>
             </a:ext>
             <a:ext uri="{909E8E84-426E-40dd-AFC4-6F175D3DCCD1}">
-              <a14:hiddenFill xmlns="" xmlns:a14="http://schemas.microsoft.com/office/drawing/2010/main">
+              <a14:hiddenFill xmlns:a14="http://schemas.microsoft.com/office/drawing/2010/main" xmlns="">
                 <a:solidFill>
                   <a:srgbClr val="FFFFFF"/>
                 </a:solidFill>
@@ -5679,17 +5679,17 @@
           <a:noFill/>
           <a:extLst>
             <a:ext uri="{FAA26D3D-D897-4be2-8F04-BA451C77F1D7}">
-              <ma14:placeholderFlag xmlns:ma14="http://schemas.microsoft.com/office/mac/drawingml/2011/main" xmlns="" val="1"/>
+              <ma14:placeholderFlag xmlns="" xmlns:ma14="http://schemas.microsoft.com/office/mac/drawingml/2011/main" val="1"/>
             </a:ext>
             <a:ext uri="{909E8E84-426E-40dd-AFC4-6F175D3DCCD1}">
-              <a14:hiddenFill xmlns="" xmlns:a14="http://schemas.microsoft.com/office/drawing/2010/main">
+              <a14:hiddenFill xmlns:a14="http://schemas.microsoft.com/office/drawing/2010/main" xmlns="">
                 <a:solidFill>
                   <a:srgbClr val="FFFFFF"/>
                 </a:solidFill>
               </a14:hiddenFill>
             </a:ext>
             <a:ext uri="{91240B29-F687-4f45-9708-019B960494DF}">
-              <a14:hiddenLine xmlns="" xmlns:a14="http://schemas.microsoft.com/office/drawing/2010/main" w="9525">
+              <a14:hiddenLine xmlns:a14="http://schemas.microsoft.com/office/drawing/2010/main" xmlns="" w="9525">
                 <a:solidFill>
                   <a:srgbClr val="000000"/>
                 </a:solidFill>
@@ -5728,14 +5728,14 @@
           <a:noFill/>
           <a:extLst>
             <a:ext uri="{909E8E84-426E-40dd-AFC4-6F175D3DCCD1}">
-              <a14:hiddenFill xmlns="" xmlns:a14="http://schemas.microsoft.com/office/drawing/2010/main">
+              <a14:hiddenFill xmlns:a14="http://schemas.microsoft.com/office/drawing/2010/main" xmlns="">
                 <a:solidFill>
                   <a:srgbClr val="FFFFFF"/>
                 </a:solidFill>
               </a14:hiddenFill>
             </a:ext>
             <a:ext uri="{91240B29-F687-4f45-9708-019B960494DF}">
-              <a14:hiddenLine xmlns="" xmlns:a14="http://schemas.microsoft.com/office/drawing/2010/main" w="9525">
+              <a14:hiddenLine xmlns:a14="http://schemas.microsoft.com/office/drawing/2010/main" xmlns="" w="9525">
                 <a:solidFill>
                   <a:srgbClr val="000000"/>
                 </a:solidFill>
@@ -5926,10 +5926,10 @@
           </a:ln>
           <a:extLst>
             <a:ext uri="{FAA26D3D-D897-4be2-8F04-BA451C77F1D7}">
-              <ma14:placeholderFlag xmlns:ma14="http://schemas.microsoft.com/office/mac/drawingml/2011/main" xmlns="" val="1"/>
+              <ma14:placeholderFlag xmlns="" xmlns:ma14="http://schemas.microsoft.com/office/mac/drawingml/2011/main" val="1"/>
             </a:ext>
             <a:ext uri="{909E8E84-426E-40dd-AFC4-6F175D3DCCD1}">
-              <a14:hiddenFill xmlns="" xmlns:a14="http://schemas.microsoft.com/office/drawing/2010/main">
+              <a14:hiddenFill xmlns:a14="http://schemas.microsoft.com/office/drawing/2010/main" xmlns="">
                 <a:solidFill>
                   <a:srgbClr val="FFFFFF"/>
                 </a:solidFill>
@@ -5952,17 +5952,17 @@
           <a:noFill/>
           <a:extLst>
             <a:ext uri="{FAA26D3D-D897-4be2-8F04-BA451C77F1D7}">
-              <ma14:placeholderFlag xmlns:ma14="http://schemas.microsoft.com/office/mac/drawingml/2011/main" xmlns="" val="1"/>
+              <ma14:placeholderFlag xmlns="" xmlns:ma14="http://schemas.microsoft.com/office/mac/drawingml/2011/main" val="1"/>
             </a:ext>
             <a:ext uri="{909E8E84-426E-40dd-AFC4-6F175D3DCCD1}">
-              <a14:hiddenFill xmlns="" xmlns:a14="http://schemas.microsoft.com/office/drawing/2010/main">
+              <a14:hiddenFill xmlns:a14="http://schemas.microsoft.com/office/drawing/2010/main" xmlns="">
                 <a:solidFill>
                   <a:srgbClr val="FFFFFF"/>
                 </a:solidFill>
               </a14:hiddenFill>
             </a:ext>
             <a:ext uri="{91240B29-F687-4f45-9708-019B960494DF}">
-              <a14:hiddenLine xmlns="" xmlns:a14="http://schemas.microsoft.com/office/drawing/2010/main" w="9525">
+              <a14:hiddenLine xmlns:a14="http://schemas.microsoft.com/office/drawing/2010/main" xmlns="" w="9525">
                 <a:solidFill>
                   <a:srgbClr val="000000"/>
                 </a:solidFill>
@@ -6001,14 +6001,14 @@
           <a:noFill/>
           <a:extLst>
             <a:ext uri="{909E8E84-426E-40dd-AFC4-6F175D3DCCD1}">
-              <a14:hiddenFill xmlns="" xmlns:a14="http://schemas.microsoft.com/office/drawing/2010/main">
+              <a14:hiddenFill xmlns:a14="http://schemas.microsoft.com/office/drawing/2010/main" xmlns="">
                 <a:solidFill>
                   <a:srgbClr val="FFFFFF"/>
                 </a:solidFill>
               </a14:hiddenFill>
             </a:ext>
             <a:ext uri="{91240B29-F687-4f45-9708-019B960494DF}">
-              <a14:hiddenLine xmlns="" xmlns:a14="http://schemas.microsoft.com/office/drawing/2010/main" w="9525">
+              <a14:hiddenLine xmlns:a14="http://schemas.microsoft.com/office/drawing/2010/main" xmlns="" w="9525">
                 <a:solidFill>
                   <a:srgbClr val="000000"/>
                 </a:solidFill>
@@ -6199,10 +6199,10 @@
           </a:ln>
           <a:extLst>
             <a:ext uri="{FAA26D3D-D897-4be2-8F04-BA451C77F1D7}">
-              <ma14:placeholderFlag xmlns:ma14="http://schemas.microsoft.com/office/mac/drawingml/2011/main" xmlns="" val="1"/>
+              <ma14:placeholderFlag xmlns="" xmlns:ma14="http://schemas.microsoft.com/office/mac/drawingml/2011/main" val="1"/>
             </a:ext>
             <a:ext uri="{909E8E84-426E-40dd-AFC4-6F175D3DCCD1}">
-              <a14:hiddenFill xmlns="" xmlns:a14="http://schemas.microsoft.com/office/drawing/2010/main">
+              <a14:hiddenFill xmlns:a14="http://schemas.microsoft.com/office/drawing/2010/main" xmlns="">
                 <a:solidFill>
                   <a:srgbClr val="FFFFFF"/>
                 </a:solidFill>
@@ -6225,17 +6225,17 @@
           <a:noFill/>
           <a:extLst>
             <a:ext uri="{FAA26D3D-D897-4be2-8F04-BA451C77F1D7}">
-              <ma14:placeholderFlag xmlns:ma14="http://schemas.microsoft.com/office/mac/drawingml/2011/main" xmlns="" val="1"/>
+              <ma14:placeholderFlag xmlns="" xmlns:ma14="http://schemas.microsoft.com/office/mac/drawingml/2011/main" val="1"/>
             </a:ext>
             <a:ext uri="{909E8E84-426E-40dd-AFC4-6F175D3DCCD1}">
-              <a14:hiddenFill xmlns="" xmlns:a14="http://schemas.microsoft.com/office/drawing/2010/main">
+              <a14:hiddenFill xmlns:a14="http://schemas.microsoft.com/office/drawing/2010/main" xmlns="">
                 <a:solidFill>
                   <a:srgbClr val="FFFFFF"/>
                 </a:solidFill>
               </a14:hiddenFill>
             </a:ext>
             <a:ext uri="{91240B29-F687-4f45-9708-019B960494DF}">
-              <a14:hiddenLine xmlns="" xmlns:a14="http://schemas.microsoft.com/office/drawing/2010/main" w="9525">
+              <a14:hiddenLine xmlns:a14="http://schemas.microsoft.com/office/drawing/2010/main" xmlns="" w="9525">
                 <a:solidFill>
                   <a:srgbClr val="000000"/>
                 </a:solidFill>
@@ -6274,14 +6274,14 @@
           <a:noFill/>
           <a:extLst>
             <a:ext uri="{909E8E84-426E-40dd-AFC4-6F175D3DCCD1}">
-              <a14:hiddenFill xmlns="" xmlns:a14="http://schemas.microsoft.com/office/drawing/2010/main">
+              <a14:hiddenFill xmlns:a14="http://schemas.microsoft.com/office/drawing/2010/main" xmlns="">
                 <a:solidFill>
                   <a:srgbClr val="FFFFFF"/>
                 </a:solidFill>
               </a14:hiddenFill>
             </a:ext>
             <a:ext uri="{91240B29-F687-4f45-9708-019B960494DF}">
-              <a14:hiddenLine xmlns="" xmlns:a14="http://schemas.microsoft.com/office/drawing/2010/main" w="9525">
+              <a14:hiddenLine xmlns:a14="http://schemas.microsoft.com/office/drawing/2010/main" xmlns="" w="9525">
                 <a:solidFill>
                   <a:srgbClr val="000000"/>
                 </a:solidFill>
@@ -21978,8 +21978,8 @@
         </p:nvSpPr>
         <p:spPr>
           <a:xfrm>
-            <a:off x="533400" y="2362200"/>
-            <a:ext cx="8382000" cy="3391698"/>
+            <a:off x="457200" y="2057400"/>
+            <a:ext cx="8382000" cy="4031873"/>
           </a:xfrm>
           <a:prstGeom prst="rect">
             <a:avLst/>
@@ -21992,39 +21992,17 @@
           <a:lstStyle/>
           <a:p>
             <a:pPr>
-              <a:lnSpc>
-                <a:spcPct val="90000"/>
-              </a:lnSpc>
               <a:spcAft>
-                <a:spcPts val="1200"/>
+                <a:spcPts val="2400"/>
               </a:spcAft>
             </a:pPr>
             <a:r>
-              <a:rPr lang="en-US" sz="3600" dirty="0">
-                <a:solidFill>
-                  <a:srgbClr val="C00000"/>
-                </a:solidFill>
-              </a:rPr>
-              <a:t>A Binary Search Tree </a:t>
-            </a:r>
-            <a:r>
               <a:rPr lang="en-US" sz="3600" dirty="0"/>
-              <a:t>is binary tree with </a:t>
-            </a:r>
-            <a:r>
-              <a:rPr lang="en-US" sz="3600" b="1" dirty="0"/>
-              <a:t>no duplicate </a:t>
-            </a:r>
-            <a:r>
-              <a:rPr lang="en-US" sz="3600" dirty="0"/>
-              <a:t>values in which:</a:t>
+              <a:t>a binary tree in which:</a:t>
             </a:r>
           </a:p>
           <a:p>
-            <a:pPr marL="457200" indent="-457200">
-              <a:lnSpc>
-                <a:spcPct val="90000"/>
-              </a:lnSpc>
+            <a:pPr marL="461963" indent="-461963">
               <a:spcAft>
                 <a:spcPts val="1200"/>
               </a:spcAft>
@@ -22033,38 +22011,19 @@
             </a:pPr>
             <a:r>
               <a:rPr lang="en-US" sz="3600" dirty="0"/>
-              <a:t>the data in every</a:t>
+              <a:t>there are </a:t>
             </a:r>
             <a:r>
-              <a:rPr lang="en-US" sz="3600" dirty="0">
-                <a:solidFill>
-                  <a:srgbClr val="C00000"/>
-                </a:solidFill>
-              </a:rPr>
-              <a:t> left </a:t>
+              <a:rPr lang="en-US" sz="3600" b="1" dirty="0"/>
+              <a:t>no duplicate </a:t>
             </a:r>
             <a:r>
               <a:rPr lang="en-US" sz="3600" dirty="0"/>
-              <a:t>node is </a:t>
-            </a:r>
-            <a:r>
-              <a:rPr lang="en-US" sz="3600" dirty="0">
-                <a:solidFill>
-                  <a:srgbClr val="C00000"/>
-                </a:solidFill>
-              </a:rPr>
-              <a:t>less</a:t>
-            </a:r>
-            <a:r>
-              <a:rPr lang="en-US" sz="3600" dirty="0"/>
-              <a:t> than the data in its parent</a:t>
+              <a:t>values</a:t>
             </a:r>
           </a:p>
           <a:p>
             <a:pPr marL="457200" indent="-457200">
-              <a:lnSpc>
-                <a:spcPct val="90000"/>
-              </a:lnSpc>
               <a:spcAft>
                 <a:spcPts val="1200"/>
               </a:spcAft>
@@ -22073,7 +22032,7 @@
             </a:pPr>
             <a:r>
               <a:rPr lang="en-US" sz="3600" dirty="0"/>
-              <a:t>the data in the</a:t>
+              <a:t>every</a:t>
             </a:r>
             <a:r>
               <a:rPr lang="en-US" sz="3600" dirty="0">
@@ -22081,11 +22040,55 @@
                   <a:srgbClr val="C00000"/>
                 </a:solidFill>
               </a:rPr>
-              <a:t> right </a:t>
+              <a:t> left</a:t>
             </a:r>
             <a:r>
               <a:rPr lang="en-US" sz="3600" dirty="0"/>
-              <a:t>node is </a:t>
+              <a:t> child’s data is </a:t>
+            </a:r>
+            <a:r>
+              <a:rPr lang="en-US" sz="3600" dirty="0">
+                <a:solidFill>
+                  <a:srgbClr val="C00000"/>
+                </a:solidFill>
+              </a:rPr>
+              <a:t>less</a:t>
+            </a:r>
+            <a:r>
+              <a:rPr lang="en-US" sz="3600" dirty="0"/>
+              <a:t> than </a:t>
+            </a:r>
+            <a:br>
+              <a:rPr lang="en-US" sz="3600" dirty="0"/>
+            </a:br>
+            <a:r>
+              <a:rPr lang="en-US" sz="3600" dirty="0"/>
+              <a:t>the data in its parent</a:t>
+            </a:r>
+          </a:p>
+          <a:p>
+            <a:pPr marL="457200" indent="-457200">
+              <a:spcAft>
+                <a:spcPts val="1200"/>
+              </a:spcAft>
+              <a:buFont typeface="Arial" panose="020B0604020202020204" pitchFamily="34" charset="0"/>
+              <a:buChar char="•"/>
+            </a:pPr>
+            <a:r>
+              <a:rPr lang="en-US" sz="3600" dirty="0"/>
+              <a:t>every</a:t>
+            </a:r>
+            <a:r>
+              <a:rPr lang="en-US" sz="3600" dirty="0">
+                <a:solidFill>
+                  <a:srgbClr val="C00000"/>
+                </a:solidFill>
+              </a:rPr>
+              <a:t> right</a:t>
+            </a:r>
+            <a:r>
+              <a:rPr lang="en-US" sz="3600" dirty="0"/>
+              <a:t> child’s data is </a:t>
             </a:r>
             <a:r>
               <a:rPr lang="en-US" sz="3600" dirty="0">
@@ -22097,7 +22100,7 @@
             </a:r>
             <a:r>
               <a:rPr lang="en-US" sz="3600" dirty="0"/>
-              <a:t> than the data in its parent.  </a:t>
+              <a:t> than the data in its parent</a:t>
             </a:r>
           </a:p>
         </p:txBody>
@@ -24249,14 +24252,14 @@
           <a:noFill/>
           <a:extLst>
             <a:ext uri="{909E8E84-426E-40dd-AFC4-6F175D3DCCD1}">
-              <a14:hiddenFill xmlns:a14="http://schemas.microsoft.com/office/drawing/2010/main" xmlns="">
+              <a14:hiddenFill xmlns="" xmlns:a14="http://schemas.microsoft.com/office/drawing/2010/main">
                 <a:solidFill>
                   <a:srgbClr val="FFFFFF"/>
                 </a:solidFill>
               </a14:hiddenFill>
             </a:ext>
             <a:ext uri="{91240B29-F687-4f45-9708-019B960494DF}">
-              <a14:hiddenLine xmlns:a14="http://schemas.microsoft.com/office/drawing/2010/main" xmlns="" w="9525">
+              <a14:hiddenLine xmlns="" xmlns:a14="http://schemas.microsoft.com/office/drawing/2010/main" w="9525">
                 <a:solidFill>
                   <a:srgbClr val="000000"/>
                 </a:solidFill>
@@ -24679,14 +24682,14 @@
               </a:ln>
               <a:extLst>
                 <a:ext uri="{909E8E84-426E-40dd-AFC4-6F175D3DCCD1}">
-                  <a14:hiddenFill xmlns:a14="http://schemas.microsoft.com/office/drawing/2010/main" xmlns="">
+                  <a14:hiddenFill xmlns="" xmlns:a14="http://schemas.microsoft.com/office/drawing/2010/main">
                     <a:solidFill>
                       <a:srgbClr val="FFFFFF"/>
                     </a:solidFill>
                   </a14:hiddenFill>
                 </a:ext>
                 <a:ext uri="{91240B29-F687-4f45-9708-019B960494DF}">
-                  <a14:hiddenLine xmlns:a14="http://schemas.microsoft.com/office/drawing/2010/main" xmlns="" w="9525">
+                  <a14:hiddenLine xmlns="" xmlns:a14="http://schemas.microsoft.com/office/drawing/2010/main" w="9525">
                     <a:solidFill>
                       <a:srgbClr val="000000"/>
                     </a:solidFill>
@@ -24914,14 +24917,14 @@
               </a:ln>
               <a:extLst>
                 <a:ext uri="{909E8E84-426E-40dd-AFC4-6F175D3DCCD1}">
-                  <a14:hiddenFill xmlns:a14="http://schemas.microsoft.com/office/drawing/2010/main" xmlns="">
+                  <a14:hiddenFill xmlns="" xmlns:a14="http://schemas.microsoft.com/office/drawing/2010/main">
                     <a:solidFill>
                       <a:srgbClr val="FFFFFF"/>
                     </a:solidFill>
                   </a14:hiddenFill>
                 </a:ext>
                 <a:ext uri="{91240B29-F687-4f45-9708-019B960494DF}">
-                  <a14:hiddenLine xmlns:a14="http://schemas.microsoft.com/office/drawing/2010/main" xmlns="" w="9525">
+                  <a14:hiddenLine xmlns="" xmlns:a14="http://schemas.microsoft.com/office/drawing/2010/main" w="9525">
                     <a:solidFill>
                       <a:srgbClr val="000000"/>
                     </a:solidFill>
@@ -25108,7 +25111,7 @@
               </a:ln>
               <a:extLst>
                 <a:ext uri="{909E8E84-426E-40dd-AFC4-6F175D3DCCD1}">
-                  <a14:hiddenFill xmlns:a14="http://schemas.microsoft.com/office/drawing/2010/main" xmlns="">
+                  <a14:hiddenFill xmlns="" xmlns:a14="http://schemas.microsoft.com/office/drawing/2010/main">
                     <a:solidFill>
                       <a:srgbClr val="FFFFFF"/>
                     </a:solidFill>
@@ -25267,7 +25270,7 @@
               </a:ln>
               <a:extLst>
                 <a:ext uri="{909E8E84-426E-40dd-AFC4-6F175D3DCCD1}">
-                  <a14:hiddenFill xmlns:a14="http://schemas.microsoft.com/office/drawing/2010/main" xmlns="">
+                  <a14:hiddenFill xmlns="" xmlns:a14="http://schemas.microsoft.com/office/drawing/2010/main">
                     <a:solidFill>
                       <a:srgbClr val="FFFFFF"/>
                     </a:solidFill>
@@ -25426,7 +25429,7 @@
               </a:ln>
               <a:extLst>
                 <a:ext uri="{909E8E84-426E-40dd-AFC4-6F175D3DCCD1}">
-                  <a14:hiddenFill xmlns:a14="http://schemas.microsoft.com/office/drawing/2010/main" xmlns="">
+                  <a14:hiddenFill xmlns="" xmlns:a14="http://schemas.microsoft.com/office/drawing/2010/main">
                     <a:solidFill>
                       <a:srgbClr val="FFFFFF"/>
                     </a:solidFill>
@@ -25580,14 +25583,14 @@
               </a:ln>
               <a:extLst>
                 <a:ext uri="{909E8E84-426E-40dd-AFC4-6F175D3DCCD1}">
-                  <a14:hiddenFill xmlns:a14="http://schemas.microsoft.com/office/drawing/2010/main" xmlns="">
+                  <a14:hiddenFill xmlns="" xmlns:a14="http://schemas.microsoft.com/office/drawing/2010/main">
                     <a:solidFill>
                       <a:srgbClr val="FFFFFF"/>
                     </a:solidFill>
                   </a14:hiddenFill>
                 </a:ext>
                 <a:ext uri="{91240B29-F687-4f45-9708-019B960494DF}">
-                  <a14:hiddenLine xmlns:a14="http://schemas.microsoft.com/office/drawing/2010/main" xmlns="" w="12700">
+                  <a14:hiddenLine xmlns="" xmlns:a14="http://schemas.microsoft.com/office/drawing/2010/main" w="12700">
                     <a:solidFill>
                       <a:srgbClr val="000000"/>
                     </a:solidFill>
@@ -25755,14 +25758,14 @@
               </a:ln>
               <a:extLst>
                 <a:ext uri="{909E8E84-426E-40dd-AFC4-6F175D3DCCD1}">
-                  <a14:hiddenFill xmlns:a14="http://schemas.microsoft.com/office/drawing/2010/main" xmlns="">
+                  <a14:hiddenFill xmlns="" xmlns:a14="http://schemas.microsoft.com/office/drawing/2010/main">
                     <a:solidFill>
                       <a:srgbClr val="FFFFFF"/>
                     </a:solidFill>
                   </a14:hiddenFill>
                 </a:ext>
                 <a:ext uri="{91240B29-F687-4f45-9708-019B960494DF}">
-                  <a14:hiddenLine xmlns:a14="http://schemas.microsoft.com/office/drawing/2010/main" xmlns="" w="12700">
+                  <a14:hiddenLine xmlns="" xmlns:a14="http://schemas.microsoft.com/office/drawing/2010/main" w="12700">
                     <a:solidFill>
                       <a:srgbClr val="000000"/>
                     </a:solidFill>
@@ -25930,14 +25933,14 @@
               </a:ln>
               <a:extLst>
                 <a:ext uri="{909E8E84-426E-40dd-AFC4-6F175D3DCCD1}">
-                  <a14:hiddenFill xmlns:a14="http://schemas.microsoft.com/office/drawing/2010/main" xmlns="">
+                  <a14:hiddenFill xmlns="" xmlns:a14="http://schemas.microsoft.com/office/drawing/2010/main">
                     <a:solidFill>
                       <a:srgbClr val="FFFFFF"/>
                     </a:solidFill>
                   </a14:hiddenFill>
                 </a:ext>
                 <a:ext uri="{91240B29-F687-4f45-9708-019B960494DF}">
-                  <a14:hiddenLine xmlns:a14="http://schemas.microsoft.com/office/drawing/2010/main" xmlns="" w="12700">
+                  <a14:hiddenLine xmlns="" xmlns:a14="http://schemas.microsoft.com/office/drawing/2010/main" w="12700">
                     <a:solidFill>
                       <a:srgbClr val="000000"/>
                     </a:solidFill>
@@ -26110,7 +26113,7 @@
               </a:ln>
               <a:extLst>
                 <a:ext uri="{909E8E84-426E-40dd-AFC4-6F175D3DCCD1}">
-                  <a14:hiddenFill xmlns:a14="http://schemas.microsoft.com/office/drawing/2010/main" xmlns="">
+                  <a14:hiddenFill xmlns="" xmlns:a14="http://schemas.microsoft.com/office/drawing/2010/main">
                     <a:noFill/>
                   </a14:hiddenFill>
                 </a:ext>
@@ -26151,7 +26154,7 @@
               </a:ln>
               <a:extLst>
                 <a:ext uri="{909E8E84-426E-40dd-AFC4-6F175D3DCCD1}">
-                  <a14:hiddenFill xmlns:a14="http://schemas.microsoft.com/office/drawing/2010/main" xmlns="">
+                  <a14:hiddenFill xmlns="" xmlns:a14="http://schemas.microsoft.com/office/drawing/2010/main">
                     <a:noFill/>
                   </a14:hiddenFill>
                 </a:ext>
@@ -26192,7 +26195,7 @@
               </a:ln>
               <a:extLst>
                 <a:ext uri="{909E8E84-426E-40dd-AFC4-6F175D3DCCD1}">
-                  <a14:hiddenFill xmlns:a14="http://schemas.microsoft.com/office/drawing/2010/main" xmlns="">
+                  <a14:hiddenFill xmlns="" xmlns:a14="http://schemas.microsoft.com/office/drawing/2010/main">
                     <a:solidFill>
                       <a:srgbClr val="FFFFFF"/>
                     </a:solidFill>
@@ -26351,7 +26354,7 @@
               </a:ln>
               <a:extLst>
                 <a:ext uri="{909E8E84-426E-40dd-AFC4-6F175D3DCCD1}">
-                  <a14:hiddenFill xmlns:a14="http://schemas.microsoft.com/office/drawing/2010/main" xmlns="">
+                  <a14:hiddenFill xmlns="" xmlns:a14="http://schemas.microsoft.com/office/drawing/2010/main">
                     <a:solidFill>
                       <a:srgbClr val="FFFFFF"/>
                     </a:solidFill>
@@ -26510,7 +26513,7 @@
               </a:ln>
               <a:extLst>
                 <a:ext uri="{909E8E84-426E-40dd-AFC4-6F175D3DCCD1}">
-                  <a14:hiddenFill xmlns:a14="http://schemas.microsoft.com/office/drawing/2010/main" xmlns="">
+                  <a14:hiddenFill xmlns="" xmlns:a14="http://schemas.microsoft.com/office/drawing/2010/main">
                     <a:solidFill>
                       <a:srgbClr val="FFFFFF"/>
                     </a:solidFill>
@@ -26664,14 +26667,14 @@
               </a:ln>
               <a:extLst>
                 <a:ext uri="{909E8E84-426E-40dd-AFC4-6F175D3DCCD1}">
-                  <a14:hiddenFill xmlns:a14="http://schemas.microsoft.com/office/drawing/2010/main" xmlns="">
+                  <a14:hiddenFill xmlns="" xmlns:a14="http://schemas.microsoft.com/office/drawing/2010/main">
                     <a:solidFill>
                       <a:srgbClr val="FFFFFF"/>
                     </a:solidFill>
                   </a14:hiddenFill>
                 </a:ext>
                 <a:ext uri="{91240B29-F687-4f45-9708-019B960494DF}">
-                  <a14:hiddenLine xmlns:a14="http://schemas.microsoft.com/office/drawing/2010/main" xmlns="" w="12700">
+                  <a14:hiddenLine xmlns="" xmlns:a14="http://schemas.microsoft.com/office/drawing/2010/main" w="12700">
                     <a:solidFill>
                       <a:srgbClr val="000000"/>
                     </a:solidFill>
@@ -26839,14 +26842,14 @@
               </a:ln>
               <a:extLst>
                 <a:ext uri="{909E8E84-426E-40dd-AFC4-6F175D3DCCD1}">
-                  <a14:hiddenFill xmlns:a14="http://schemas.microsoft.com/office/drawing/2010/main" xmlns="">
+                  <a14:hiddenFill xmlns="" xmlns:a14="http://schemas.microsoft.com/office/drawing/2010/main">
                     <a:solidFill>
                       <a:srgbClr val="FFFFFF"/>
                     </a:solidFill>
                   </a14:hiddenFill>
                 </a:ext>
                 <a:ext uri="{91240B29-F687-4f45-9708-019B960494DF}">
-                  <a14:hiddenLine xmlns:a14="http://schemas.microsoft.com/office/drawing/2010/main" xmlns="" w="12700">
+                  <a14:hiddenLine xmlns="" xmlns:a14="http://schemas.microsoft.com/office/drawing/2010/main" w="12700">
                     <a:solidFill>
                       <a:srgbClr val="000000"/>
                     </a:solidFill>
@@ -27019,7 +27022,7 @@
               </a:ln>
               <a:extLst>
                 <a:ext uri="{909E8E84-426E-40dd-AFC4-6F175D3DCCD1}">
-                  <a14:hiddenFill xmlns:a14="http://schemas.microsoft.com/office/drawing/2010/main" xmlns="">
+                  <a14:hiddenFill xmlns="" xmlns:a14="http://schemas.microsoft.com/office/drawing/2010/main">
                     <a:noFill/>
                   </a14:hiddenFill>
                 </a:ext>
@@ -27060,7 +27063,7 @@
               </a:ln>
               <a:extLst>
                 <a:ext uri="{909E8E84-426E-40dd-AFC4-6F175D3DCCD1}">
-                  <a14:hiddenFill xmlns:a14="http://schemas.microsoft.com/office/drawing/2010/main" xmlns="">
+                  <a14:hiddenFill xmlns="" xmlns:a14="http://schemas.microsoft.com/office/drawing/2010/main">
                     <a:noFill/>
                   </a14:hiddenFill>
                 </a:ext>
@@ -27101,7 +27104,7 @@
               </a:ln>
               <a:extLst>
                 <a:ext uri="{909E8E84-426E-40dd-AFC4-6F175D3DCCD1}">
-                  <a14:hiddenFill xmlns:a14="http://schemas.microsoft.com/office/drawing/2010/main" xmlns="">
+                  <a14:hiddenFill xmlns="" xmlns:a14="http://schemas.microsoft.com/office/drawing/2010/main">
                     <a:solidFill>
                       <a:srgbClr val="FFFFFF"/>
                     </a:solidFill>
@@ -27260,7 +27263,7 @@
               </a:ln>
               <a:extLst>
                 <a:ext uri="{909E8E84-426E-40dd-AFC4-6F175D3DCCD1}">
-                  <a14:hiddenFill xmlns:a14="http://schemas.microsoft.com/office/drawing/2010/main" xmlns="">
+                  <a14:hiddenFill xmlns="" xmlns:a14="http://schemas.microsoft.com/office/drawing/2010/main">
                     <a:noFill/>
                   </a14:hiddenFill>
                 </a:ext>
@@ -27301,7 +27304,7 @@
               </a:ln>
               <a:extLst>
                 <a:ext uri="{909E8E84-426E-40dd-AFC4-6F175D3DCCD1}">
-                  <a14:hiddenFill xmlns:a14="http://schemas.microsoft.com/office/drawing/2010/main" xmlns="">
+                  <a14:hiddenFill xmlns="" xmlns:a14="http://schemas.microsoft.com/office/drawing/2010/main">
                     <a:noFill/>
                   </a14:hiddenFill>
                 </a:ext>
@@ -27337,14 +27340,14 @@
               </a:ln>
               <a:extLst>
                 <a:ext uri="{909E8E84-426E-40dd-AFC4-6F175D3DCCD1}">
-                  <a14:hiddenFill xmlns:a14="http://schemas.microsoft.com/office/drawing/2010/main" xmlns="">
+                  <a14:hiddenFill xmlns="" xmlns:a14="http://schemas.microsoft.com/office/drawing/2010/main">
                     <a:solidFill>
                       <a:srgbClr val="FFFFFF"/>
                     </a:solidFill>
                   </a14:hiddenFill>
                 </a:ext>
                 <a:ext uri="{91240B29-F687-4f45-9708-019B960494DF}">
-                  <a14:hiddenLine xmlns:a14="http://schemas.microsoft.com/office/drawing/2010/main" xmlns="" w="12700">
+                  <a14:hiddenLine xmlns="" xmlns:a14="http://schemas.microsoft.com/office/drawing/2010/main" w="12700">
                     <a:solidFill>
                       <a:srgbClr val="000000"/>
                     </a:solidFill>
@@ -27512,14 +27515,14 @@
               </a:ln>
               <a:extLst>
                 <a:ext uri="{909E8E84-426E-40dd-AFC4-6F175D3DCCD1}">
-                  <a14:hiddenFill xmlns:a14="http://schemas.microsoft.com/office/drawing/2010/main" xmlns="">
+                  <a14:hiddenFill xmlns="" xmlns:a14="http://schemas.microsoft.com/office/drawing/2010/main">
                     <a:solidFill>
                       <a:srgbClr val="FFFFFF"/>
                     </a:solidFill>
                   </a14:hiddenFill>
                 </a:ext>
                 <a:ext uri="{91240B29-F687-4f45-9708-019B960494DF}">
-                  <a14:hiddenLine xmlns:a14="http://schemas.microsoft.com/office/drawing/2010/main" xmlns="" w="12700">
+                  <a14:hiddenLine xmlns="" xmlns:a14="http://schemas.microsoft.com/office/drawing/2010/main" w="12700">
                     <a:solidFill>
                       <a:srgbClr val="000000"/>
                     </a:solidFill>
@@ -30777,14 +30780,14 @@
           <a:noFill/>
           <a:extLst>
             <a:ext uri="{909E8E84-426E-40dd-AFC4-6F175D3DCCD1}">
-              <a14:hiddenFill xmlns="" xmlns:a14="http://schemas.microsoft.com/office/drawing/2010/main">
+              <a14:hiddenFill xmlns:a14="http://schemas.microsoft.com/office/drawing/2010/main" xmlns="">
                 <a:solidFill>
                   <a:srgbClr val="FFFFFF"/>
                 </a:solidFill>
               </a14:hiddenFill>
             </a:ext>
             <a:ext uri="{91240B29-F687-4f45-9708-019B960494DF}">
-              <a14:hiddenLine xmlns="" xmlns:a14="http://schemas.microsoft.com/office/drawing/2010/main" w="9525">
+              <a14:hiddenLine xmlns:a14="http://schemas.microsoft.com/office/drawing/2010/main" xmlns="" w="9525">
                 <a:solidFill>
                   <a:srgbClr val="000000"/>
                 </a:solidFill>
@@ -31554,14 +31557,14 @@
           <a:noFill/>
           <a:extLst>
             <a:ext uri="{909E8E84-426E-40dd-AFC4-6F175D3DCCD1}">
-              <a14:hiddenFill xmlns="" xmlns:a14="http://schemas.microsoft.com/office/drawing/2010/main">
+              <a14:hiddenFill xmlns:a14="http://schemas.microsoft.com/office/drawing/2010/main" xmlns="">
                 <a:solidFill>
                   <a:srgbClr val="FFFFFF"/>
                 </a:solidFill>
               </a14:hiddenFill>
             </a:ext>
             <a:ext uri="{91240B29-F687-4f45-9708-019B960494DF}">
-              <a14:hiddenLine xmlns="" xmlns:a14="http://schemas.microsoft.com/office/drawing/2010/main" w="9525">
+              <a14:hiddenLine xmlns:a14="http://schemas.microsoft.com/office/drawing/2010/main" xmlns="" w="9525">
                 <a:solidFill>
                   <a:srgbClr val="000000"/>
                 </a:solidFill>
@@ -31865,14 +31868,14 @@
           <a:noFill/>
           <a:extLst>
             <a:ext uri="{909E8E84-426E-40dd-AFC4-6F175D3DCCD1}">
-              <a14:hiddenFill xmlns="" xmlns:a14="http://schemas.microsoft.com/office/drawing/2010/main">
+              <a14:hiddenFill xmlns:a14="http://schemas.microsoft.com/office/drawing/2010/main" xmlns="">
                 <a:solidFill>
                   <a:srgbClr val="FFFFFF"/>
                 </a:solidFill>
               </a14:hiddenFill>
             </a:ext>
             <a:ext uri="{91240B29-F687-4f45-9708-019B960494DF}">
-              <a14:hiddenLine xmlns="" xmlns:a14="http://schemas.microsoft.com/office/drawing/2010/main" w="9525">
+              <a14:hiddenLine xmlns:a14="http://schemas.microsoft.com/office/drawing/2010/main" xmlns="" w="9525">
                 <a:solidFill>
                   <a:srgbClr val="000000"/>
                 </a:solidFill>
@@ -32268,14 +32271,14 @@
           <a:noFill/>
           <a:extLst>
             <a:ext uri="{909E8E84-426E-40dd-AFC4-6F175D3DCCD1}">
-              <a14:hiddenFill xmlns="" xmlns:a14="http://schemas.microsoft.com/office/drawing/2010/main">
+              <a14:hiddenFill xmlns:a14="http://schemas.microsoft.com/office/drawing/2010/main" xmlns="">
                 <a:solidFill>
                   <a:srgbClr val="FFFFFF"/>
                 </a:solidFill>
               </a14:hiddenFill>
             </a:ext>
             <a:ext uri="{91240B29-F687-4f45-9708-019B960494DF}">
-              <a14:hiddenLine xmlns="" xmlns:a14="http://schemas.microsoft.com/office/drawing/2010/main" w="9525">
+              <a14:hiddenLine xmlns:a14="http://schemas.microsoft.com/office/drawing/2010/main" xmlns="" w="9525">
                 <a:solidFill>
                   <a:srgbClr val="000000"/>
                 </a:solidFill>
@@ -32704,14 +32707,14 @@
           <a:noFill/>
           <a:extLst>
             <a:ext uri="{909E8E84-426E-40dd-AFC4-6F175D3DCCD1}">
-              <a14:hiddenFill xmlns="" xmlns:a14="http://schemas.microsoft.com/office/drawing/2010/main">
+              <a14:hiddenFill xmlns:a14="http://schemas.microsoft.com/office/drawing/2010/main" xmlns="">
                 <a:solidFill>
                   <a:srgbClr val="FFFFFF"/>
                 </a:solidFill>
               </a14:hiddenFill>
             </a:ext>
             <a:ext uri="{91240B29-F687-4f45-9708-019B960494DF}">
-              <a14:hiddenLine xmlns="" xmlns:a14="http://schemas.microsoft.com/office/drawing/2010/main" w="9525">
+              <a14:hiddenLine xmlns:a14="http://schemas.microsoft.com/office/drawing/2010/main" xmlns="" w="9525">
                 <a:solidFill>
                   <a:srgbClr val="000000"/>
                 </a:solidFill>
@@ -33140,14 +33143,14 @@
           <a:noFill/>
           <a:extLst>
             <a:ext uri="{909E8E84-426E-40dd-AFC4-6F175D3DCCD1}">
-              <a14:hiddenFill xmlns="" xmlns:a14="http://schemas.microsoft.com/office/drawing/2010/main">
+              <a14:hiddenFill xmlns:a14="http://schemas.microsoft.com/office/drawing/2010/main" xmlns="">
                 <a:solidFill>
                   <a:srgbClr val="FFFFFF"/>
                 </a:solidFill>
               </a14:hiddenFill>
             </a:ext>
             <a:ext uri="{91240B29-F687-4f45-9708-019B960494DF}">
-              <a14:hiddenLine xmlns="" xmlns:a14="http://schemas.microsoft.com/office/drawing/2010/main" w="9525">
+              <a14:hiddenLine xmlns:a14="http://schemas.microsoft.com/office/drawing/2010/main" xmlns="" w="9525">
                 <a:solidFill>
                   <a:srgbClr val="000000"/>
                 </a:solidFill>
@@ -33653,14 +33656,14 @@
           <a:noFill/>
           <a:extLst>
             <a:ext uri="{909E8E84-426E-40dd-AFC4-6F175D3DCCD1}">
-              <a14:hiddenFill xmlns="" xmlns:a14="http://schemas.microsoft.com/office/drawing/2010/main">
+              <a14:hiddenFill xmlns:a14="http://schemas.microsoft.com/office/drawing/2010/main" xmlns="">
                 <a:solidFill>
                   <a:srgbClr val="FFFFFF"/>
                 </a:solidFill>
               </a14:hiddenFill>
             </a:ext>
             <a:ext uri="{91240B29-F687-4f45-9708-019B960494DF}">
-              <a14:hiddenLine xmlns="" xmlns:a14="http://schemas.microsoft.com/office/drawing/2010/main" w="9525">
+              <a14:hiddenLine xmlns:a14="http://schemas.microsoft.com/office/drawing/2010/main" xmlns="" w="9525">
                 <a:solidFill>
                   <a:srgbClr val="000000"/>
                 </a:solidFill>
@@ -34194,14 +34197,14 @@
           <a:noFill/>
           <a:extLst>
             <a:ext uri="{909E8E84-426E-40dd-AFC4-6F175D3DCCD1}">
-              <a14:hiddenFill xmlns="" xmlns:a14="http://schemas.microsoft.com/office/drawing/2010/main">
+              <a14:hiddenFill xmlns:a14="http://schemas.microsoft.com/office/drawing/2010/main" xmlns="">
                 <a:solidFill>
                   <a:srgbClr val="FFFFFF"/>
                 </a:solidFill>
               </a14:hiddenFill>
             </a:ext>
             <a:ext uri="{91240B29-F687-4f45-9708-019B960494DF}">
-              <a14:hiddenLine xmlns="" xmlns:a14="http://schemas.microsoft.com/office/drawing/2010/main" w="9525">
+              <a14:hiddenLine xmlns:a14="http://schemas.microsoft.com/office/drawing/2010/main" xmlns="" w="9525">
                 <a:solidFill>
                   <a:srgbClr val="000000"/>
                 </a:solidFill>
@@ -34735,14 +34738,14 @@
           <a:noFill/>
           <a:extLst>
             <a:ext uri="{909E8E84-426E-40dd-AFC4-6F175D3DCCD1}">
-              <a14:hiddenFill xmlns="" xmlns:a14="http://schemas.microsoft.com/office/drawing/2010/main">
+              <a14:hiddenFill xmlns:a14="http://schemas.microsoft.com/office/drawing/2010/main" xmlns="">
                 <a:solidFill>
                   <a:srgbClr val="FFFFFF"/>
                 </a:solidFill>
               </a14:hiddenFill>
             </a:ext>
             <a:ext uri="{91240B29-F687-4f45-9708-019B960494DF}">
-              <a14:hiddenLine xmlns="" xmlns:a14="http://schemas.microsoft.com/office/drawing/2010/main" w="9525">
+              <a14:hiddenLine xmlns:a14="http://schemas.microsoft.com/office/drawing/2010/main" xmlns="" w="9525">
                 <a:solidFill>
                   <a:srgbClr val="000000"/>
                 </a:solidFill>
@@ -35390,14 +35393,14 @@
           <a:noFill/>
           <a:extLst>
             <a:ext uri="{909E8E84-426E-40dd-AFC4-6F175D3DCCD1}">
-              <a14:hiddenFill xmlns="" xmlns:a14="http://schemas.microsoft.com/office/drawing/2010/main">
+              <a14:hiddenFill xmlns:a14="http://schemas.microsoft.com/office/drawing/2010/main" xmlns="">
                 <a:solidFill>
                   <a:srgbClr val="FFFFFF"/>
                 </a:solidFill>
               </a14:hiddenFill>
             </a:ext>
             <a:ext uri="{91240B29-F687-4f45-9708-019B960494DF}">
-              <a14:hiddenLine xmlns="" xmlns:a14="http://schemas.microsoft.com/office/drawing/2010/main" w="9525">
+              <a14:hiddenLine xmlns:a14="http://schemas.microsoft.com/office/drawing/2010/main" xmlns="" w="9525">
                 <a:solidFill>
                   <a:srgbClr val="000000"/>
                 </a:solidFill>
@@ -36045,14 +36048,14 @@
           <a:noFill/>
           <a:extLst>
             <a:ext uri="{909E8E84-426E-40dd-AFC4-6F175D3DCCD1}">
-              <a14:hiddenFill xmlns="" xmlns:a14="http://schemas.microsoft.com/office/drawing/2010/main">
+              <a14:hiddenFill xmlns:a14="http://schemas.microsoft.com/office/drawing/2010/main" xmlns="">
                 <a:solidFill>
                   <a:srgbClr val="FFFFFF"/>
                 </a:solidFill>
               </a14:hiddenFill>
             </a:ext>
             <a:ext uri="{91240B29-F687-4f45-9708-019B960494DF}">
-              <a14:hiddenLine xmlns="" xmlns:a14="http://schemas.microsoft.com/office/drawing/2010/main" w="9525">
+              <a14:hiddenLine xmlns:a14="http://schemas.microsoft.com/office/drawing/2010/main" xmlns="" w="9525">
                 <a:solidFill>
                   <a:srgbClr val="000000"/>
                 </a:solidFill>
@@ -36990,14 +36993,14 @@
           <a:noFill/>
           <a:extLst>
             <a:ext uri="{909E8E84-426E-40dd-AFC4-6F175D3DCCD1}">
-              <a14:hiddenFill xmlns="" xmlns:a14="http://schemas.microsoft.com/office/drawing/2010/main">
+              <a14:hiddenFill xmlns:a14="http://schemas.microsoft.com/office/drawing/2010/main" xmlns="">
                 <a:solidFill>
                   <a:srgbClr val="FFFFFF"/>
                 </a:solidFill>
               </a14:hiddenFill>
             </a:ext>
             <a:ext uri="{91240B29-F687-4f45-9708-019B960494DF}">
-              <a14:hiddenLine xmlns="" xmlns:a14="http://schemas.microsoft.com/office/drawing/2010/main" w="9525">
+              <a14:hiddenLine xmlns:a14="http://schemas.microsoft.com/office/drawing/2010/main" xmlns="" w="9525">
                 <a:solidFill>
                   <a:srgbClr val="000000"/>
                 </a:solidFill>

--- a/u08a_bTrees/notes/_a - Classifying binary trees and Tree Traversal.pptx
+++ b/u08a_bTrees/notes/_a - Classifying binary trees and Tree Traversal.pptx
@@ -5,10 +5,10 @@
     <p:sldMasterId id="2147483648" r:id="rId1"/>
   </p:sldMasterIdLst>
   <p:notesMasterIdLst>
-    <p:notesMasterId r:id="rId45"/>
+    <p:notesMasterId r:id="rId46"/>
   </p:notesMasterIdLst>
   <p:handoutMasterIdLst>
-    <p:handoutMasterId r:id="rId46"/>
+    <p:handoutMasterId r:id="rId47"/>
   </p:handoutMasterIdLst>
   <p:sldIdLst>
     <p:sldId id="364" r:id="rId2"/>
@@ -20,45 +20,46 @@
     <p:sldId id="387" r:id="rId8"/>
     <p:sldId id="351" r:id="rId9"/>
     <p:sldId id="352" r:id="rId10"/>
-    <p:sldId id="397" r:id="rId11"/>
-    <p:sldId id="396" r:id="rId12"/>
-    <p:sldId id="390" r:id="rId13"/>
-    <p:sldId id="395" r:id="rId14"/>
-    <p:sldId id="316" r:id="rId15"/>
-    <p:sldId id="279" r:id="rId16"/>
-    <p:sldId id="378" r:id="rId17"/>
-    <p:sldId id="382" r:id="rId18"/>
-    <p:sldId id="391" r:id="rId19"/>
-    <p:sldId id="392" r:id="rId20"/>
-    <p:sldId id="385" r:id="rId21"/>
-    <p:sldId id="403" r:id="rId22"/>
-    <p:sldId id="404" r:id="rId23"/>
-    <p:sldId id="333" r:id="rId24"/>
-    <p:sldId id="389" r:id="rId25"/>
-    <p:sldId id="257" r:id="rId26"/>
-    <p:sldId id="324" r:id="rId27"/>
-    <p:sldId id="258" r:id="rId28"/>
-    <p:sldId id="409" r:id="rId29"/>
-    <p:sldId id="393" r:id="rId30"/>
-    <p:sldId id="394" r:id="rId31"/>
-    <p:sldId id="340" r:id="rId32"/>
-    <p:sldId id="341" r:id="rId33"/>
-    <p:sldId id="342" r:id="rId34"/>
-    <p:sldId id="343" r:id="rId35"/>
-    <p:sldId id="344" r:id="rId36"/>
-    <p:sldId id="345" r:id="rId37"/>
-    <p:sldId id="346" r:id="rId38"/>
-    <p:sldId id="347" r:id="rId39"/>
-    <p:sldId id="348" r:id="rId40"/>
-    <p:sldId id="349" r:id="rId41"/>
-    <p:sldId id="350" r:id="rId42"/>
-    <p:sldId id="410" r:id="rId43"/>
-    <p:sldId id="411" r:id="rId44"/>
+    <p:sldId id="366" r:id="rId11"/>
+    <p:sldId id="397" r:id="rId12"/>
+    <p:sldId id="396" r:id="rId13"/>
+    <p:sldId id="390" r:id="rId14"/>
+    <p:sldId id="395" r:id="rId15"/>
+    <p:sldId id="316" r:id="rId16"/>
+    <p:sldId id="279" r:id="rId17"/>
+    <p:sldId id="378" r:id="rId18"/>
+    <p:sldId id="382" r:id="rId19"/>
+    <p:sldId id="391" r:id="rId20"/>
+    <p:sldId id="392" r:id="rId21"/>
+    <p:sldId id="385" r:id="rId22"/>
+    <p:sldId id="403" r:id="rId23"/>
+    <p:sldId id="404" r:id="rId24"/>
+    <p:sldId id="333" r:id="rId25"/>
+    <p:sldId id="389" r:id="rId26"/>
+    <p:sldId id="257" r:id="rId27"/>
+    <p:sldId id="324" r:id="rId28"/>
+    <p:sldId id="258" r:id="rId29"/>
+    <p:sldId id="409" r:id="rId30"/>
+    <p:sldId id="393" r:id="rId31"/>
+    <p:sldId id="394" r:id="rId32"/>
+    <p:sldId id="340" r:id="rId33"/>
+    <p:sldId id="341" r:id="rId34"/>
+    <p:sldId id="342" r:id="rId35"/>
+    <p:sldId id="343" r:id="rId36"/>
+    <p:sldId id="344" r:id="rId37"/>
+    <p:sldId id="345" r:id="rId38"/>
+    <p:sldId id="346" r:id="rId39"/>
+    <p:sldId id="347" r:id="rId40"/>
+    <p:sldId id="348" r:id="rId41"/>
+    <p:sldId id="349" r:id="rId42"/>
+    <p:sldId id="350" r:id="rId43"/>
+    <p:sldId id="410" r:id="rId44"/>
+    <p:sldId id="411" r:id="rId45"/>
   </p:sldIdLst>
   <p:sldSz cx="9144000" cy="6858000" type="screen4x3"/>
   <p:notesSz cx="6858000" cy="9144000"/>
   <p:custDataLst>
-    <p:tags r:id="rId47"/>
+    <p:tags r:id="rId48"/>
   </p:custDataLst>
   <p:defaultTextStyle>
     <a:defPPr>
@@ -967,7 +968,7 @@
     </p:spTree>
     <p:extLst>
       <p:ext uri="{BB962C8B-B14F-4D97-AF65-F5344CB8AC3E}">
-        <p14:creationId xmlns:p14="http://schemas.microsoft.com/office/powerpoint/2010/main" val="672428488"/>
+        <p14:creationId xmlns:p14="http://schemas.microsoft.com/office/powerpoint/2010/main" val="3961625332"/>
       </p:ext>
     </p:extLst>
   </p:cSld>
@@ -1097,6 +1098,143 @@
           <a:bodyPr/>
           <a:lstStyle/>
           <a:p>
+            <a:endParaRPr lang="en-US"/>
+          </a:p>
+        </p:txBody>
+      </p:sp>
+    </p:spTree>
+    <p:extLst>
+      <p:ext uri="{BB962C8B-B14F-4D97-AF65-F5344CB8AC3E}">
+        <p14:creationId xmlns:p14="http://schemas.microsoft.com/office/powerpoint/2010/main" val="672428488"/>
+      </p:ext>
+    </p:extLst>
+  </p:cSld>
+  <p:clrMapOvr>
+    <a:masterClrMapping/>
+  </p:clrMapOvr>
+</p:notes>
+</file>
+
+<file path=ppt/notesSlides/notesSlide12.xml><?xml version="1.0" encoding="utf-8"?>
+<p:notes xmlns:a="http://schemas.openxmlformats.org/drawingml/2006/main" xmlns:r="http://schemas.openxmlformats.org/officeDocument/2006/relationships" xmlns:p="http://schemas.openxmlformats.org/presentationml/2006/main">
+  <p:cSld>
+    <p:spTree>
+      <p:nvGrpSpPr>
+        <p:cNvPr id="1" name=""/>
+        <p:cNvGrpSpPr/>
+        <p:nvPr/>
+      </p:nvGrpSpPr>
+      <p:grpSpPr>
+        <a:xfrm>
+          <a:off x="0" y="0"/>
+          <a:ext cx="0" cy="0"/>
+          <a:chOff x="0" y="0"/>
+          <a:chExt cx="0" cy="0"/>
+        </a:xfrm>
+      </p:grpSpPr>
+      <p:sp>
+        <p:nvSpPr>
+          <p:cNvPr id="102402" name="Rectangle 2"/>
+          <p:cNvSpPr>
+            <a:spLocks noGrp="1" noRot="1" noChangeAspect="1" noChangeArrowheads="1" noTextEdit="1"/>
+          </p:cNvSpPr>
+          <p:nvPr>
+            <p:ph type="sldImg"/>
+          </p:nvPr>
+        </p:nvSpPr>
+        <p:spPr bwMode="auto">
+          <a:xfrm>
+            <a:off x="1143000" y="685800"/>
+            <a:ext cx="4572000" cy="3429000"/>
+          </a:xfrm>
+          <a:prstGeom prst="rect">
+            <a:avLst/>
+          </a:prstGeom>
+          <a:noFill/>
+          <a:ln>
+            <a:solidFill>
+              <a:srgbClr val="000000"/>
+            </a:solidFill>
+            <a:miter lim="800000"/>
+            <a:headEnd/>
+            <a:tailEnd/>
+          </a:ln>
+          <a:extLst>
+            <a:ext uri="{909E8E84-426E-40DD-AFC4-6F175D3DCCD1}">
+              <a14:hiddenFill xmlns:a14="http://schemas.microsoft.com/office/drawing/2010/main">
+                <a:solidFill>
+                  <a:srgbClr val="FFFFFF"/>
+                </a:solidFill>
+              </a14:hiddenFill>
+            </a:ext>
+            <a:ext uri="{AF507438-7753-43E0-B8FC-AC1667EBCBE1}">
+              <a14:hiddenEffects xmlns:a14="http://schemas.microsoft.com/office/drawing/2010/main">
+                <a:effectLst>
+                  <a:outerShdw dist="35921" dir="2700000" algn="ctr" rotWithShape="0">
+                    <a:srgbClr val="808080"/>
+                  </a:outerShdw>
+                </a:effectLst>
+              </a14:hiddenEffects>
+            </a:ext>
+            <a:ext uri="{53640926-AAD7-44D8-BBD7-CCE9431645EC}">
+              <a14:shadowObscured xmlns:a14="http://schemas.microsoft.com/office/drawing/2010/main" val="1"/>
+            </a:ext>
+          </a:extLst>
+        </p:spPr>
+      </p:sp>
+      <p:sp>
+        <p:nvSpPr>
+          <p:cNvPr id="102403" name="Rectangle 3"/>
+          <p:cNvSpPr>
+            <a:spLocks noGrp="1" noChangeArrowheads="1"/>
+          </p:cNvSpPr>
+          <p:nvPr>
+            <p:ph type="body" idx="1"/>
+          </p:nvPr>
+        </p:nvSpPr>
+        <p:spPr bwMode="auto">
+          <a:xfrm>
+            <a:off x="685800" y="4343400"/>
+            <a:ext cx="5486400" cy="4114800"/>
+          </a:xfrm>
+          <a:prstGeom prst="rect">
+            <a:avLst/>
+          </a:prstGeom>
+          <a:noFill/>
+          <a:ln/>
+          <a:extLst>
+            <a:ext uri="{909E8E84-426E-40DD-AFC4-6F175D3DCCD1}">
+              <a14:hiddenFill xmlns:a14="http://schemas.microsoft.com/office/drawing/2010/main">
+                <a:solidFill>
+                  <a:schemeClr val="accent1"/>
+                </a:solidFill>
+              </a14:hiddenFill>
+            </a:ext>
+            <a:ext uri="{91240B29-F687-4F45-9708-019B960494DF}">
+              <a14:hiddenLine xmlns:a14="http://schemas.microsoft.com/office/drawing/2010/main" w="9525">
+                <a:solidFill>
+                  <a:schemeClr val="tx1"/>
+                </a:solidFill>
+                <a:miter lim="800000"/>
+                <a:headEnd/>
+                <a:tailEnd/>
+              </a14:hiddenLine>
+            </a:ext>
+            <a:ext uri="{AF507438-7753-43E0-B8FC-AC1667EBCBE1}">
+              <a14:hiddenEffects xmlns:a14="http://schemas.microsoft.com/office/drawing/2010/main">
+                <a:effectLst>
+                  <a:outerShdw dist="35921" dir="2700000" algn="ctr" rotWithShape="0">
+                    <a:schemeClr val="bg2"/>
+                  </a:outerShdw>
+                </a:effectLst>
+              </a14:hiddenEffects>
+            </a:ext>
+          </a:extLst>
+        </p:spPr>
+        <p:txBody>
+          <a:bodyPr/>
+          <a:lstStyle/>
+          <a:p>
             <a:r>
               <a:rPr lang="en-US" dirty="0"/>
               <a:t>Which is the complement to the number of  parents, the number of children or the number of leaves? The number of leaves, </a:t>
@@ -1125,7 +1263,7 @@
 </p:notes>
 </file>
 
-<file path=ppt/notesSlides/notesSlide12.xml><?xml version="1.0" encoding="utf-8"?>
+<file path=ppt/notesSlides/notesSlide13.xml><?xml version="1.0" encoding="utf-8"?>
 <p:notes xmlns:a="http://schemas.openxmlformats.org/drawingml/2006/main" xmlns:r="http://schemas.openxmlformats.org/officeDocument/2006/relationships" xmlns:p="http://schemas.openxmlformats.org/presentationml/2006/main">
   <p:cSld>
     <p:spTree>
@@ -1262,7 +1400,7 @@
 </p:notes>
 </file>
 
-<file path=ppt/notesSlides/notesSlide13.xml><?xml version="1.0" encoding="utf-8"?>
+<file path=ppt/notesSlides/notesSlide14.xml><?xml version="1.0" encoding="utf-8"?>
 <p:notes xmlns:a="http://schemas.openxmlformats.org/drawingml/2006/main" xmlns:r="http://schemas.openxmlformats.org/officeDocument/2006/relationships" xmlns:p="http://schemas.openxmlformats.org/presentationml/2006/main">
   <p:cSld>
     <p:spTree>
@@ -1478,7 +1616,7 @@
 </p:notes>
 </file>
 
-<file path=ppt/notesSlides/notesSlide14.xml><?xml version="1.0" encoding="utf-8"?>
+<file path=ppt/notesSlides/notesSlide15.xml><?xml version="1.0" encoding="utf-8"?>
 <p:notes xmlns:a="http://schemas.openxmlformats.org/drawingml/2006/main" xmlns:r="http://schemas.openxmlformats.org/officeDocument/2006/relationships" xmlns:p="http://schemas.openxmlformats.org/presentationml/2006/main">
   <p:cSld>
     <p:spTree>
@@ -1594,7 +1732,7 @@
 </p:notes>
 </file>
 
-<file path=ppt/notesSlides/notesSlide15.xml><?xml version="1.0" encoding="utf-8"?>
+<file path=ppt/notesSlides/notesSlide16.xml><?xml version="1.0" encoding="utf-8"?>
 <p:notes xmlns:a="http://schemas.openxmlformats.org/drawingml/2006/main" xmlns:r="http://schemas.openxmlformats.org/officeDocument/2006/relationships" xmlns:p="http://schemas.openxmlformats.org/presentationml/2006/main">
   <p:cSld>
     <p:spTree>
@@ -1810,7 +1948,7 @@
 </p:notes>
 </file>
 
-<file path=ppt/notesSlides/notesSlide16.xml><?xml version="1.0" encoding="utf-8"?>
+<file path=ppt/notesSlides/notesSlide17.xml><?xml version="1.0" encoding="utf-8"?>
 <p:notes xmlns:a="http://schemas.openxmlformats.org/drawingml/2006/main" xmlns:r="http://schemas.openxmlformats.org/officeDocument/2006/relationships" xmlns:p="http://schemas.openxmlformats.org/presentationml/2006/main">
   <p:cSld>
     <p:spTree>
@@ -1893,7 +2031,7 @@
 </p:notes>
 </file>
 
-<file path=ppt/notesSlides/notesSlide17.xml><?xml version="1.0" encoding="utf-8"?>
+<file path=ppt/notesSlides/notesSlide18.xml><?xml version="1.0" encoding="utf-8"?>
 <p:notes xmlns:a="http://schemas.openxmlformats.org/drawingml/2006/main" xmlns:r="http://schemas.openxmlformats.org/officeDocument/2006/relationships" xmlns:p="http://schemas.openxmlformats.org/presentationml/2006/main">
   <p:cSld>
     <p:spTree>
@@ -1976,7 +2114,7 @@
 </p:notes>
 </file>
 
-<file path=ppt/notesSlides/notesSlide18.xml><?xml version="1.0" encoding="utf-8"?>
+<file path=ppt/notesSlides/notesSlide19.xml><?xml version="1.0" encoding="utf-8"?>
 <p:notes xmlns:a="http://schemas.openxmlformats.org/drawingml/2006/main" xmlns:r="http://schemas.openxmlformats.org/officeDocument/2006/relationships" xmlns:p="http://schemas.openxmlformats.org/presentationml/2006/main">
   <p:cSld>
     <p:spTree>
@@ -2062,143 +2200,6 @@
 </p:notes>
 </file>
 
-<file path=ppt/notesSlides/notesSlide19.xml><?xml version="1.0" encoding="utf-8"?>
-<p:notes xmlns:a="http://schemas.openxmlformats.org/drawingml/2006/main" xmlns:r="http://schemas.openxmlformats.org/officeDocument/2006/relationships" xmlns:p="http://schemas.openxmlformats.org/presentationml/2006/main">
-  <p:cSld>
-    <p:spTree>
-      <p:nvGrpSpPr>
-        <p:cNvPr id="1" name=""/>
-        <p:cNvGrpSpPr/>
-        <p:nvPr/>
-      </p:nvGrpSpPr>
-      <p:grpSpPr>
-        <a:xfrm>
-          <a:off x="0" y="0"/>
-          <a:ext cx="0" cy="0"/>
-          <a:chOff x="0" y="0"/>
-          <a:chExt cx="0" cy="0"/>
-        </a:xfrm>
-      </p:grpSpPr>
-      <p:sp>
-        <p:nvSpPr>
-          <p:cNvPr id="82946" name="Rectangle 2"/>
-          <p:cNvSpPr>
-            <a:spLocks noGrp="1" noRot="1" noChangeAspect="1" noChangeArrowheads="1" noTextEdit="1"/>
-          </p:cNvSpPr>
-          <p:nvPr>
-            <p:ph type="sldImg"/>
-          </p:nvPr>
-        </p:nvSpPr>
-        <p:spPr bwMode="auto">
-          <a:xfrm>
-            <a:off x="1143000" y="685800"/>
-            <a:ext cx="4572000" cy="3429000"/>
-          </a:xfrm>
-          <a:prstGeom prst="rect">
-            <a:avLst/>
-          </a:prstGeom>
-          <a:noFill/>
-          <a:ln>
-            <a:solidFill>
-              <a:srgbClr val="000000"/>
-            </a:solidFill>
-            <a:miter lim="800000"/>
-            <a:headEnd/>
-            <a:tailEnd/>
-          </a:ln>
-          <a:extLst>
-            <a:ext uri="{909E8E84-426E-40DD-AFC4-6F175D3DCCD1}">
-              <a14:hiddenFill xmlns:a14="http://schemas.microsoft.com/office/drawing/2010/main">
-                <a:solidFill>
-                  <a:srgbClr val="FFFFFF"/>
-                </a:solidFill>
-              </a14:hiddenFill>
-            </a:ext>
-            <a:ext uri="{AF507438-7753-43E0-B8FC-AC1667EBCBE1}">
-              <a14:hiddenEffects xmlns:a14="http://schemas.microsoft.com/office/drawing/2010/main">
-                <a:effectLst>
-                  <a:outerShdw dist="35921" dir="2700000" algn="ctr" rotWithShape="0">
-                    <a:srgbClr val="808080"/>
-                  </a:outerShdw>
-                </a:effectLst>
-              </a14:hiddenEffects>
-            </a:ext>
-            <a:ext uri="{53640926-AAD7-44D8-BBD7-CCE9431645EC}">
-              <a14:shadowObscured xmlns:a14="http://schemas.microsoft.com/office/drawing/2010/main" val="1"/>
-            </a:ext>
-          </a:extLst>
-        </p:spPr>
-      </p:sp>
-      <p:sp>
-        <p:nvSpPr>
-          <p:cNvPr id="82947" name="Rectangle 3"/>
-          <p:cNvSpPr>
-            <a:spLocks noGrp="1" noChangeArrowheads="1"/>
-          </p:cNvSpPr>
-          <p:nvPr>
-            <p:ph type="body" idx="1"/>
-          </p:nvPr>
-        </p:nvSpPr>
-        <p:spPr bwMode="auto">
-          <a:xfrm>
-            <a:off x="685800" y="4343400"/>
-            <a:ext cx="5486400" cy="4114800"/>
-          </a:xfrm>
-          <a:prstGeom prst="rect">
-            <a:avLst/>
-          </a:prstGeom>
-          <a:noFill/>
-          <a:ln/>
-          <a:extLst>
-            <a:ext uri="{909E8E84-426E-40DD-AFC4-6F175D3DCCD1}">
-              <a14:hiddenFill xmlns:a14="http://schemas.microsoft.com/office/drawing/2010/main">
-                <a:solidFill>
-                  <a:schemeClr val="accent1"/>
-                </a:solidFill>
-              </a14:hiddenFill>
-            </a:ext>
-            <a:ext uri="{91240B29-F687-4F45-9708-019B960494DF}">
-              <a14:hiddenLine xmlns:a14="http://schemas.microsoft.com/office/drawing/2010/main" w="9525">
-                <a:solidFill>
-                  <a:schemeClr val="tx1"/>
-                </a:solidFill>
-                <a:miter lim="800000"/>
-                <a:headEnd/>
-                <a:tailEnd/>
-              </a14:hiddenLine>
-            </a:ext>
-            <a:ext uri="{AF507438-7753-43E0-B8FC-AC1667EBCBE1}">
-              <a14:hiddenEffects xmlns:a14="http://schemas.microsoft.com/office/drawing/2010/main">
-                <a:effectLst>
-                  <a:outerShdw dist="35921" dir="2700000" algn="ctr" rotWithShape="0">
-                    <a:schemeClr val="bg2"/>
-                  </a:outerShdw>
-                </a:effectLst>
-              </a14:hiddenEffects>
-            </a:ext>
-          </a:extLst>
-        </p:spPr>
-        <p:txBody>
-          <a:bodyPr/>
-          <a:lstStyle/>
-          <a:p>
-            <a:endParaRPr lang="en-US"/>
-          </a:p>
-        </p:txBody>
-      </p:sp>
-    </p:spTree>
-    <p:extLst>
-      <p:ext uri="{BB962C8B-B14F-4D97-AF65-F5344CB8AC3E}">
-        <p14:creationId xmlns:p14="http://schemas.microsoft.com/office/powerpoint/2010/main" val="1002509990"/>
-      </p:ext>
-    </p:extLst>
-  </p:cSld>
-  <p:clrMapOvr>
-    <a:masterClrMapping/>
-  </p:clrMapOvr>
-</p:notes>
-</file>
-
 <file path=ppt/notesSlides/notesSlide2.xml><?xml version="1.0" encoding="utf-8"?>
 <p:notes xmlns:a="http://schemas.openxmlformats.org/drawingml/2006/main" xmlns:r="http://schemas.openxmlformats.org/officeDocument/2006/relationships" xmlns:p="http://schemas.openxmlformats.org/presentationml/2006/main">
   <p:cSld>
@@ -2463,6 +2464,143 @@
     </p:spTree>
     <p:extLst>
       <p:ext uri="{BB962C8B-B14F-4D97-AF65-F5344CB8AC3E}">
+        <p14:creationId xmlns:p14="http://schemas.microsoft.com/office/powerpoint/2010/main" val="1002509990"/>
+      </p:ext>
+    </p:extLst>
+  </p:cSld>
+  <p:clrMapOvr>
+    <a:masterClrMapping/>
+  </p:clrMapOvr>
+</p:notes>
+</file>
+
+<file path=ppt/notesSlides/notesSlide21.xml><?xml version="1.0" encoding="utf-8"?>
+<p:notes xmlns:a="http://schemas.openxmlformats.org/drawingml/2006/main" xmlns:r="http://schemas.openxmlformats.org/officeDocument/2006/relationships" xmlns:p="http://schemas.openxmlformats.org/presentationml/2006/main">
+  <p:cSld>
+    <p:spTree>
+      <p:nvGrpSpPr>
+        <p:cNvPr id="1" name=""/>
+        <p:cNvGrpSpPr/>
+        <p:nvPr/>
+      </p:nvGrpSpPr>
+      <p:grpSpPr>
+        <a:xfrm>
+          <a:off x="0" y="0"/>
+          <a:ext cx="0" cy="0"/>
+          <a:chOff x="0" y="0"/>
+          <a:chExt cx="0" cy="0"/>
+        </a:xfrm>
+      </p:grpSpPr>
+      <p:sp>
+        <p:nvSpPr>
+          <p:cNvPr id="82946" name="Rectangle 2"/>
+          <p:cNvSpPr>
+            <a:spLocks noGrp="1" noRot="1" noChangeAspect="1" noChangeArrowheads="1" noTextEdit="1"/>
+          </p:cNvSpPr>
+          <p:nvPr>
+            <p:ph type="sldImg"/>
+          </p:nvPr>
+        </p:nvSpPr>
+        <p:spPr bwMode="auto">
+          <a:xfrm>
+            <a:off x="1143000" y="685800"/>
+            <a:ext cx="4572000" cy="3429000"/>
+          </a:xfrm>
+          <a:prstGeom prst="rect">
+            <a:avLst/>
+          </a:prstGeom>
+          <a:noFill/>
+          <a:ln>
+            <a:solidFill>
+              <a:srgbClr val="000000"/>
+            </a:solidFill>
+            <a:miter lim="800000"/>
+            <a:headEnd/>
+            <a:tailEnd/>
+          </a:ln>
+          <a:extLst>
+            <a:ext uri="{909E8E84-426E-40DD-AFC4-6F175D3DCCD1}">
+              <a14:hiddenFill xmlns:a14="http://schemas.microsoft.com/office/drawing/2010/main">
+                <a:solidFill>
+                  <a:srgbClr val="FFFFFF"/>
+                </a:solidFill>
+              </a14:hiddenFill>
+            </a:ext>
+            <a:ext uri="{AF507438-7753-43E0-B8FC-AC1667EBCBE1}">
+              <a14:hiddenEffects xmlns:a14="http://schemas.microsoft.com/office/drawing/2010/main">
+                <a:effectLst>
+                  <a:outerShdw dist="35921" dir="2700000" algn="ctr" rotWithShape="0">
+                    <a:srgbClr val="808080"/>
+                  </a:outerShdw>
+                </a:effectLst>
+              </a14:hiddenEffects>
+            </a:ext>
+            <a:ext uri="{53640926-AAD7-44D8-BBD7-CCE9431645EC}">
+              <a14:shadowObscured xmlns:a14="http://schemas.microsoft.com/office/drawing/2010/main" val="1"/>
+            </a:ext>
+          </a:extLst>
+        </p:spPr>
+      </p:sp>
+      <p:sp>
+        <p:nvSpPr>
+          <p:cNvPr id="82947" name="Rectangle 3"/>
+          <p:cNvSpPr>
+            <a:spLocks noGrp="1" noChangeArrowheads="1"/>
+          </p:cNvSpPr>
+          <p:nvPr>
+            <p:ph type="body" idx="1"/>
+          </p:nvPr>
+        </p:nvSpPr>
+        <p:spPr bwMode="auto">
+          <a:xfrm>
+            <a:off x="685800" y="4343400"/>
+            <a:ext cx="5486400" cy="4114800"/>
+          </a:xfrm>
+          <a:prstGeom prst="rect">
+            <a:avLst/>
+          </a:prstGeom>
+          <a:noFill/>
+          <a:ln/>
+          <a:extLst>
+            <a:ext uri="{909E8E84-426E-40DD-AFC4-6F175D3DCCD1}">
+              <a14:hiddenFill xmlns:a14="http://schemas.microsoft.com/office/drawing/2010/main">
+                <a:solidFill>
+                  <a:schemeClr val="accent1"/>
+                </a:solidFill>
+              </a14:hiddenFill>
+            </a:ext>
+            <a:ext uri="{91240B29-F687-4F45-9708-019B960494DF}">
+              <a14:hiddenLine xmlns:a14="http://schemas.microsoft.com/office/drawing/2010/main" w="9525">
+                <a:solidFill>
+                  <a:schemeClr val="tx1"/>
+                </a:solidFill>
+                <a:miter lim="800000"/>
+                <a:headEnd/>
+                <a:tailEnd/>
+              </a14:hiddenLine>
+            </a:ext>
+            <a:ext uri="{AF507438-7753-43E0-B8FC-AC1667EBCBE1}">
+              <a14:hiddenEffects xmlns:a14="http://schemas.microsoft.com/office/drawing/2010/main">
+                <a:effectLst>
+                  <a:outerShdw dist="35921" dir="2700000" algn="ctr" rotWithShape="0">
+                    <a:schemeClr val="bg2"/>
+                  </a:outerShdw>
+                </a:effectLst>
+              </a14:hiddenEffects>
+            </a:ext>
+          </a:extLst>
+        </p:spPr>
+        <p:txBody>
+          <a:bodyPr/>
+          <a:lstStyle/>
+          <a:p>
+            <a:endParaRPr lang="en-US"/>
+          </a:p>
+        </p:txBody>
+      </p:sp>
+    </p:spTree>
+    <p:extLst>
+      <p:ext uri="{BB962C8B-B14F-4D97-AF65-F5344CB8AC3E}">
         <p14:creationId xmlns:p14="http://schemas.microsoft.com/office/powerpoint/2010/main" val="3960483186"/>
       </p:ext>
     </p:extLst>
@@ -2473,7 +2611,7 @@
 </p:notes>
 </file>
 
-<file path=ppt/notesSlides/notesSlide21.xml><?xml version="1.0" encoding="utf-8"?>
+<file path=ppt/notesSlides/notesSlide22.xml><?xml version="1.0" encoding="utf-8"?>
 <p:notes xmlns:a="http://schemas.openxmlformats.org/drawingml/2006/main" xmlns:r="http://schemas.openxmlformats.org/officeDocument/2006/relationships" xmlns:p="http://schemas.openxmlformats.org/presentationml/2006/main">
   <p:cSld>
     <p:spTree>
@@ -2610,7 +2748,7 @@
 </p:notes>
 </file>
 
-<file path=ppt/notesSlides/notesSlide22.xml><?xml version="1.0" encoding="utf-8"?>
+<file path=ppt/notesSlides/notesSlide23.xml><?xml version="1.0" encoding="utf-8"?>
 <p:notes xmlns:a="http://schemas.openxmlformats.org/drawingml/2006/main" xmlns:r="http://schemas.openxmlformats.org/officeDocument/2006/relationships" xmlns:p="http://schemas.openxmlformats.org/presentationml/2006/main">
   <p:cSld>
     <p:spTree>
@@ -2738,279 +2876,6 @@
     <p:extLst>
       <p:ext uri="{BB962C8B-B14F-4D97-AF65-F5344CB8AC3E}">
         <p14:creationId xmlns:p14="http://schemas.microsoft.com/office/powerpoint/2010/main" val="884071873"/>
-      </p:ext>
-    </p:extLst>
-  </p:cSld>
-  <p:clrMapOvr>
-    <a:masterClrMapping/>
-  </p:clrMapOvr>
-</p:notes>
-</file>
-
-<file path=ppt/notesSlides/notesSlide23.xml><?xml version="1.0" encoding="utf-8"?>
-<p:notes xmlns:a="http://schemas.openxmlformats.org/drawingml/2006/main" xmlns:r="http://schemas.openxmlformats.org/officeDocument/2006/relationships" xmlns:p="http://schemas.openxmlformats.org/presentationml/2006/main">
-  <p:cSld>
-    <p:spTree>
-      <p:nvGrpSpPr>
-        <p:cNvPr id="1" name=""/>
-        <p:cNvGrpSpPr/>
-        <p:nvPr/>
-      </p:nvGrpSpPr>
-      <p:grpSpPr>
-        <a:xfrm>
-          <a:off x="0" y="0"/>
-          <a:ext cx="0" cy="0"/>
-          <a:chOff x="0" y="0"/>
-          <a:chExt cx="0" cy="0"/>
-        </a:xfrm>
-      </p:grpSpPr>
-      <p:sp>
-        <p:nvSpPr>
-          <p:cNvPr id="65537" name="Slide Image Placeholder 1"/>
-          <p:cNvSpPr>
-            <a:spLocks noGrp="1" noRot="1" noChangeAspect="1" noTextEdit="1"/>
-          </p:cNvSpPr>
-          <p:nvPr>
-            <p:ph type="sldImg"/>
-          </p:nvPr>
-        </p:nvSpPr>
-        <p:spPr bwMode="auto">
-          <a:noFill/>
-          <a:ln>
-            <a:solidFill>
-              <a:srgbClr val="000000"/>
-            </a:solidFill>
-            <a:miter lim="800000"/>
-            <a:headEnd/>
-            <a:tailEnd/>
-          </a:ln>
-          <a:extLst>
-            <a:ext uri="{FAA26D3D-D897-4be2-8F04-BA451C77F1D7}">
-              <ma14:placeholderFlag xmlns="" xmlns:ma14="http://schemas.microsoft.com/office/mac/drawingml/2011/main" val="1"/>
-            </a:ext>
-            <a:ext uri="{909E8E84-426E-40dd-AFC4-6F175D3DCCD1}">
-              <a14:hiddenFill xmlns:a14="http://schemas.microsoft.com/office/drawing/2010/main" xmlns="">
-                <a:solidFill>
-                  <a:srgbClr val="FFFFFF"/>
-                </a:solidFill>
-              </a14:hiddenFill>
-            </a:ext>
-          </a:extLst>
-        </p:spPr>
-      </p:sp>
-      <p:sp>
-        <p:nvSpPr>
-          <p:cNvPr id="65538" name="Notes Placeholder 2"/>
-          <p:cNvSpPr>
-            <a:spLocks noGrp="1"/>
-          </p:cNvSpPr>
-          <p:nvPr>
-            <p:ph type="body" idx="1"/>
-          </p:nvPr>
-        </p:nvSpPr>
-        <p:spPr bwMode="auto">
-          <a:noFill/>
-          <a:extLst>
-            <a:ext uri="{FAA26D3D-D897-4be2-8F04-BA451C77F1D7}">
-              <ma14:placeholderFlag xmlns="" xmlns:ma14="http://schemas.microsoft.com/office/mac/drawingml/2011/main" val="1"/>
-            </a:ext>
-            <a:ext uri="{909E8E84-426E-40dd-AFC4-6F175D3DCCD1}">
-              <a14:hiddenFill xmlns:a14="http://schemas.microsoft.com/office/drawing/2010/main" xmlns="">
-                <a:solidFill>
-                  <a:srgbClr val="FFFFFF"/>
-                </a:solidFill>
-              </a14:hiddenFill>
-            </a:ext>
-            <a:ext uri="{91240B29-F687-4f45-9708-019B960494DF}">
-              <a14:hiddenLine xmlns:a14="http://schemas.microsoft.com/office/drawing/2010/main" xmlns="" w="9525">
-                <a:solidFill>
-                  <a:srgbClr val="000000"/>
-                </a:solidFill>
-                <a:miter lim="800000"/>
-                <a:headEnd/>
-                <a:tailEnd/>
-              </a14:hiddenLine>
-            </a:ext>
-          </a:extLst>
-        </p:spPr>
-        <p:txBody>
-          <a:bodyPr wrap="square" numCol="1" anchor="t" anchorCtr="0" compatLnSpc="1">
-            <a:prstTxWarp prst="textNoShape">
-              <a:avLst/>
-            </a:prstTxWarp>
-          </a:bodyPr>
-          <a:lstStyle/>
-          <a:p>
-            <a:endParaRPr lang="en-US" altLang="en-US">
-              <a:ea typeface="MS PGothic" charset="-128"/>
-            </a:endParaRPr>
-          </a:p>
-        </p:txBody>
-      </p:sp>
-      <p:sp>
-        <p:nvSpPr>
-          <p:cNvPr id="65539" name="Slide Number Placeholder 3"/>
-          <p:cNvSpPr>
-            <a:spLocks noGrp="1"/>
-          </p:cNvSpPr>
-          <p:nvPr>
-            <p:ph type="sldNum" sz="quarter" idx="5"/>
-          </p:nvPr>
-        </p:nvSpPr>
-        <p:spPr bwMode="auto">
-          <a:noFill/>
-          <a:extLst>
-            <a:ext uri="{909E8E84-426E-40dd-AFC4-6F175D3DCCD1}">
-              <a14:hiddenFill xmlns:a14="http://schemas.microsoft.com/office/drawing/2010/main" xmlns="">
-                <a:solidFill>
-                  <a:srgbClr val="FFFFFF"/>
-                </a:solidFill>
-              </a14:hiddenFill>
-            </a:ext>
-            <a:ext uri="{91240B29-F687-4f45-9708-019B960494DF}">
-              <a14:hiddenLine xmlns:a14="http://schemas.microsoft.com/office/drawing/2010/main" xmlns="" w="9525">
-                <a:solidFill>
-                  <a:srgbClr val="000000"/>
-                </a:solidFill>
-                <a:miter lim="800000"/>
-                <a:headEnd/>
-                <a:tailEnd/>
-              </a14:hiddenLine>
-            </a:ext>
-          </a:extLst>
-        </p:spPr>
-        <p:txBody>
-          <a:bodyPr/>
-          <a:lstStyle>
-            <a:lvl1pPr>
-              <a:defRPr sz="2400">
-                <a:solidFill>
-                  <a:srgbClr val="000000"/>
-                </a:solidFill>
-                <a:latin typeface="Times New Roman" charset="0"/>
-                <a:ea typeface="ヒラギノ明朝 ProN W3" charset="-128"/>
-                <a:sym typeface="Times New Roman" charset="0"/>
-              </a:defRPr>
-            </a:lvl1pPr>
-            <a:lvl2pPr marL="742950" indent="-285750">
-              <a:defRPr sz="2400">
-                <a:solidFill>
-                  <a:srgbClr val="000000"/>
-                </a:solidFill>
-                <a:latin typeface="Times New Roman" charset="0"/>
-                <a:ea typeface="ヒラギノ明朝 ProN W3" charset="-128"/>
-                <a:sym typeface="Times New Roman" charset="0"/>
-              </a:defRPr>
-            </a:lvl2pPr>
-            <a:lvl3pPr marL="1143000" indent="-228600">
-              <a:defRPr sz="2400">
-                <a:solidFill>
-                  <a:srgbClr val="000000"/>
-                </a:solidFill>
-                <a:latin typeface="Times New Roman" charset="0"/>
-                <a:ea typeface="ヒラギノ明朝 ProN W3" charset="-128"/>
-                <a:sym typeface="Times New Roman" charset="0"/>
-              </a:defRPr>
-            </a:lvl3pPr>
-            <a:lvl4pPr marL="1600200" indent="-228600">
-              <a:defRPr sz="2400">
-                <a:solidFill>
-                  <a:srgbClr val="000000"/>
-                </a:solidFill>
-                <a:latin typeface="Times New Roman" charset="0"/>
-                <a:ea typeface="ヒラギノ明朝 ProN W3" charset="-128"/>
-                <a:sym typeface="Times New Roman" charset="0"/>
-              </a:defRPr>
-            </a:lvl4pPr>
-            <a:lvl5pPr marL="2057400" indent="-228600">
-              <a:defRPr sz="2400">
-                <a:solidFill>
-                  <a:srgbClr val="000000"/>
-                </a:solidFill>
-                <a:latin typeface="Times New Roman" charset="0"/>
-                <a:ea typeface="ヒラギノ明朝 ProN W3" charset="-128"/>
-                <a:sym typeface="Times New Roman" charset="0"/>
-              </a:defRPr>
-            </a:lvl5pPr>
-            <a:lvl6pPr marL="2514600" indent="-228600" eaLnBrk="0" fontAlgn="base" hangingPunct="0">
-              <a:spcBef>
-                <a:spcPct val="0"/>
-              </a:spcBef>
-              <a:spcAft>
-                <a:spcPct val="0"/>
-              </a:spcAft>
-              <a:defRPr sz="2400">
-                <a:solidFill>
-                  <a:srgbClr val="000000"/>
-                </a:solidFill>
-                <a:latin typeface="Times New Roman" charset="0"/>
-                <a:ea typeface="ヒラギノ明朝 ProN W3" charset="-128"/>
-                <a:sym typeface="Times New Roman" charset="0"/>
-              </a:defRPr>
-            </a:lvl6pPr>
-            <a:lvl7pPr marL="2971800" indent="-228600" eaLnBrk="0" fontAlgn="base" hangingPunct="0">
-              <a:spcBef>
-                <a:spcPct val="0"/>
-              </a:spcBef>
-              <a:spcAft>
-                <a:spcPct val="0"/>
-              </a:spcAft>
-              <a:defRPr sz="2400">
-                <a:solidFill>
-                  <a:srgbClr val="000000"/>
-                </a:solidFill>
-                <a:latin typeface="Times New Roman" charset="0"/>
-                <a:ea typeface="ヒラギノ明朝 ProN W3" charset="-128"/>
-                <a:sym typeface="Times New Roman" charset="0"/>
-              </a:defRPr>
-            </a:lvl7pPr>
-            <a:lvl8pPr marL="3429000" indent="-228600" eaLnBrk="0" fontAlgn="base" hangingPunct="0">
-              <a:spcBef>
-                <a:spcPct val="0"/>
-              </a:spcBef>
-              <a:spcAft>
-                <a:spcPct val="0"/>
-              </a:spcAft>
-              <a:defRPr sz="2400">
-                <a:solidFill>
-                  <a:srgbClr val="000000"/>
-                </a:solidFill>
-                <a:latin typeface="Times New Roman" charset="0"/>
-                <a:ea typeface="ヒラギノ明朝 ProN W3" charset="-128"/>
-                <a:sym typeface="Times New Roman" charset="0"/>
-              </a:defRPr>
-            </a:lvl8pPr>
-            <a:lvl9pPr marL="3886200" indent="-228600" eaLnBrk="0" fontAlgn="base" hangingPunct="0">
-              <a:spcBef>
-                <a:spcPct val="0"/>
-              </a:spcBef>
-              <a:spcAft>
-                <a:spcPct val="0"/>
-              </a:spcAft>
-              <a:defRPr sz="2400">
-                <a:solidFill>
-                  <a:srgbClr val="000000"/>
-                </a:solidFill>
-                <a:latin typeface="Times New Roman" charset="0"/>
-                <a:ea typeface="ヒラギノ明朝 ProN W3" charset="-128"/>
-                <a:sym typeface="Times New Roman" charset="0"/>
-              </a:defRPr>
-            </a:lvl9pPr>
-          </a:lstStyle>
-          <a:p>
-            <a:fld id="{9EE1BB6F-A407-EE47-9A85-F4E09E4700A5}" type="slidenum">
-              <a:rPr lang="en-US" altLang="en-US" sz="1200"/>
-              <a:pPr/>
-              <a:t>29</a:t>
-            </a:fld>
-            <a:endParaRPr lang="en-US" altLang="en-US" sz="1200"/>
-          </a:p>
-        </p:txBody>
-      </p:sp>
-    </p:spTree>
-    <p:extLst>
-      <p:ext uri="{BB962C8B-B14F-4D97-AF65-F5344CB8AC3E}">
-        <p14:creationId xmlns:p14="http://schemas.microsoft.com/office/powerpoint/2010/main" val="1371126327"/>
       </p:ext>
     </p:extLst>
   </p:cSld>
@@ -3059,10 +2924,10 @@
           </a:ln>
           <a:extLst>
             <a:ext uri="{FAA26D3D-D897-4be2-8F04-BA451C77F1D7}">
-              <ma14:placeholderFlag xmlns="" xmlns:ma14="http://schemas.microsoft.com/office/mac/drawingml/2011/main" val="1"/>
+              <ma14:placeholderFlag xmlns:ma14="http://schemas.microsoft.com/office/mac/drawingml/2011/main" xmlns="" val="1"/>
             </a:ext>
             <a:ext uri="{909E8E84-426E-40dd-AFC4-6F175D3DCCD1}">
-              <a14:hiddenFill xmlns:a14="http://schemas.microsoft.com/office/drawing/2010/main" xmlns="">
+              <a14:hiddenFill xmlns="" xmlns:a14="http://schemas.microsoft.com/office/drawing/2010/main">
                 <a:solidFill>
                   <a:srgbClr val="FFFFFF"/>
                 </a:solidFill>
@@ -3085,17 +2950,17 @@
           <a:noFill/>
           <a:extLst>
             <a:ext uri="{FAA26D3D-D897-4be2-8F04-BA451C77F1D7}">
-              <ma14:placeholderFlag xmlns="" xmlns:ma14="http://schemas.microsoft.com/office/mac/drawingml/2011/main" val="1"/>
+              <ma14:placeholderFlag xmlns:ma14="http://schemas.microsoft.com/office/mac/drawingml/2011/main" xmlns="" val="1"/>
             </a:ext>
             <a:ext uri="{909E8E84-426E-40dd-AFC4-6F175D3DCCD1}">
-              <a14:hiddenFill xmlns:a14="http://schemas.microsoft.com/office/drawing/2010/main" xmlns="">
+              <a14:hiddenFill xmlns="" xmlns:a14="http://schemas.microsoft.com/office/drawing/2010/main">
                 <a:solidFill>
                   <a:srgbClr val="FFFFFF"/>
                 </a:solidFill>
               </a14:hiddenFill>
             </a:ext>
             <a:ext uri="{91240B29-F687-4f45-9708-019B960494DF}">
-              <a14:hiddenLine xmlns:a14="http://schemas.microsoft.com/office/drawing/2010/main" xmlns="" w="9525">
+              <a14:hiddenLine xmlns="" xmlns:a14="http://schemas.microsoft.com/office/drawing/2010/main" w="9525">
                 <a:solidFill>
                   <a:srgbClr val="000000"/>
                 </a:solidFill>
@@ -3134,14 +2999,14 @@
           <a:noFill/>
           <a:extLst>
             <a:ext uri="{909E8E84-426E-40dd-AFC4-6F175D3DCCD1}">
-              <a14:hiddenFill xmlns:a14="http://schemas.microsoft.com/office/drawing/2010/main" xmlns="">
+              <a14:hiddenFill xmlns="" xmlns:a14="http://schemas.microsoft.com/office/drawing/2010/main">
                 <a:solidFill>
                   <a:srgbClr val="FFFFFF"/>
                 </a:solidFill>
               </a14:hiddenFill>
             </a:ext>
             <a:ext uri="{91240B29-F687-4f45-9708-019B960494DF}">
-              <a14:hiddenLine xmlns:a14="http://schemas.microsoft.com/office/drawing/2010/main" xmlns="" w="9525">
+              <a14:hiddenLine xmlns="" xmlns:a14="http://schemas.microsoft.com/office/drawing/2010/main" w="9525">
                 <a:solidFill>
                   <a:srgbClr val="000000"/>
                 </a:solidFill>
@@ -3283,7 +3148,7 @@
     </p:spTree>
     <p:extLst>
       <p:ext uri="{BB962C8B-B14F-4D97-AF65-F5344CB8AC3E}">
-        <p14:creationId xmlns:p14="http://schemas.microsoft.com/office/powerpoint/2010/main" val="19488336"/>
+        <p14:creationId xmlns:p14="http://schemas.microsoft.com/office/powerpoint/2010/main" val="1371126327"/>
       </p:ext>
     </p:extLst>
   </p:cSld>
@@ -3332,10 +3197,10 @@
           </a:ln>
           <a:extLst>
             <a:ext uri="{FAA26D3D-D897-4be2-8F04-BA451C77F1D7}">
-              <ma14:placeholderFlag xmlns="" xmlns:ma14="http://schemas.microsoft.com/office/mac/drawingml/2011/main" val="1"/>
+              <ma14:placeholderFlag xmlns:ma14="http://schemas.microsoft.com/office/mac/drawingml/2011/main" xmlns="" val="1"/>
             </a:ext>
             <a:ext uri="{909E8E84-426E-40dd-AFC4-6F175D3DCCD1}">
-              <a14:hiddenFill xmlns:a14="http://schemas.microsoft.com/office/drawing/2010/main" xmlns="">
+              <a14:hiddenFill xmlns="" xmlns:a14="http://schemas.microsoft.com/office/drawing/2010/main">
                 <a:solidFill>
                   <a:srgbClr val="FFFFFF"/>
                 </a:solidFill>
@@ -3358,17 +3223,17 @@
           <a:noFill/>
           <a:extLst>
             <a:ext uri="{FAA26D3D-D897-4be2-8F04-BA451C77F1D7}">
-              <ma14:placeholderFlag xmlns="" xmlns:ma14="http://schemas.microsoft.com/office/mac/drawingml/2011/main" val="1"/>
+              <ma14:placeholderFlag xmlns:ma14="http://schemas.microsoft.com/office/mac/drawingml/2011/main" xmlns="" val="1"/>
             </a:ext>
             <a:ext uri="{909E8E84-426E-40dd-AFC4-6F175D3DCCD1}">
-              <a14:hiddenFill xmlns:a14="http://schemas.microsoft.com/office/drawing/2010/main" xmlns="">
+              <a14:hiddenFill xmlns="" xmlns:a14="http://schemas.microsoft.com/office/drawing/2010/main">
                 <a:solidFill>
                   <a:srgbClr val="FFFFFF"/>
                 </a:solidFill>
               </a14:hiddenFill>
             </a:ext>
             <a:ext uri="{91240B29-F687-4f45-9708-019B960494DF}">
-              <a14:hiddenLine xmlns:a14="http://schemas.microsoft.com/office/drawing/2010/main" xmlns="" w="9525">
+              <a14:hiddenLine xmlns="" xmlns:a14="http://schemas.microsoft.com/office/drawing/2010/main" w="9525">
                 <a:solidFill>
                   <a:srgbClr val="000000"/>
                 </a:solidFill>
@@ -3407,14 +3272,14 @@
           <a:noFill/>
           <a:extLst>
             <a:ext uri="{909E8E84-426E-40dd-AFC4-6F175D3DCCD1}">
-              <a14:hiddenFill xmlns:a14="http://schemas.microsoft.com/office/drawing/2010/main" xmlns="">
+              <a14:hiddenFill xmlns="" xmlns:a14="http://schemas.microsoft.com/office/drawing/2010/main">
                 <a:solidFill>
                   <a:srgbClr val="FFFFFF"/>
                 </a:solidFill>
               </a14:hiddenFill>
             </a:ext>
             <a:ext uri="{91240B29-F687-4f45-9708-019B960494DF}">
-              <a14:hiddenLine xmlns:a14="http://schemas.microsoft.com/office/drawing/2010/main" xmlns="" w="9525">
+              <a14:hiddenLine xmlns="" xmlns:a14="http://schemas.microsoft.com/office/drawing/2010/main" w="9525">
                 <a:solidFill>
                   <a:srgbClr val="000000"/>
                 </a:solidFill>
@@ -3556,7 +3421,7 @@
     </p:spTree>
     <p:extLst>
       <p:ext uri="{BB962C8B-B14F-4D97-AF65-F5344CB8AC3E}">
-        <p14:creationId xmlns:p14="http://schemas.microsoft.com/office/powerpoint/2010/main" val="1289641796"/>
+        <p14:creationId xmlns:p14="http://schemas.microsoft.com/office/powerpoint/2010/main" val="19488336"/>
       </p:ext>
     </p:extLst>
   </p:cSld>
@@ -3605,10 +3470,10 @@
           </a:ln>
           <a:extLst>
             <a:ext uri="{FAA26D3D-D897-4be2-8F04-BA451C77F1D7}">
-              <ma14:placeholderFlag xmlns="" xmlns:ma14="http://schemas.microsoft.com/office/mac/drawingml/2011/main" val="1"/>
+              <ma14:placeholderFlag xmlns:ma14="http://schemas.microsoft.com/office/mac/drawingml/2011/main" xmlns="" val="1"/>
             </a:ext>
             <a:ext uri="{909E8E84-426E-40dd-AFC4-6F175D3DCCD1}">
-              <a14:hiddenFill xmlns:a14="http://schemas.microsoft.com/office/drawing/2010/main" xmlns="">
+              <a14:hiddenFill xmlns="" xmlns:a14="http://schemas.microsoft.com/office/drawing/2010/main">
                 <a:solidFill>
                   <a:srgbClr val="FFFFFF"/>
                 </a:solidFill>
@@ -3631,17 +3496,17 @@
           <a:noFill/>
           <a:extLst>
             <a:ext uri="{FAA26D3D-D897-4be2-8F04-BA451C77F1D7}">
-              <ma14:placeholderFlag xmlns="" xmlns:ma14="http://schemas.microsoft.com/office/mac/drawingml/2011/main" val="1"/>
+              <ma14:placeholderFlag xmlns:ma14="http://schemas.microsoft.com/office/mac/drawingml/2011/main" xmlns="" val="1"/>
             </a:ext>
             <a:ext uri="{909E8E84-426E-40dd-AFC4-6F175D3DCCD1}">
-              <a14:hiddenFill xmlns:a14="http://schemas.microsoft.com/office/drawing/2010/main" xmlns="">
+              <a14:hiddenFill xmlns="" xmlns:a14="http://schemas.microsoft.com/office/drawing/2010/main">
                 <a:solidFill>
                   <a:srgbClr val="FFFFFF"/>
                 </a:solidFill>
               </a14:hiddenFill>
             </a:ext>
             <a:ext uri="{91240B29-F687-4f45-9708-019B960494DF}">
-              <a14:hiddenLine xmlns:a14="http://schemas.microsoft.com/office/drawing/2010/main" xmlns="" w="9525">
+              <a14:hiddenLine xmlns="" xmlns:a14="http://schemas.microsoft.com/office/drawing/2010/main" w="9525">
                 <a:solidFill>
                   <a:srgbClr val="000000"/>
                 </a:solidFill>
@@ -3680,14 +3545,14 @@
           <a:noFill/>
           <a:extLst>
             <a:ext uri="{909E8E84-426E-40dd-AFC4-6F175D3DCCD1}">
-              <a14:hiddenFill xmlns:a14="http://schemas.microsoft.com/office/drawing/2010/main" xmlns="">
+              <a14:hiddenFill xmlns="" xmlns:a14="http://schemas.microsoft.com/office/drawing/2010/main">
                 <a:solidFill>
                   <a:srgbClr val="FFFFFF"/>
                 </a:solidFill>
               </a14:hiddenFill>
             </a:ext>
             <a:ext uri="{91240B29-F687-4f45-9708-019B960494DF}">
-              <a14:hiddenLine xmlns:a14="http://schemas.microsoft.com/office/drawing/2010/main" xmlns="" w="9525">
+              <a14:hiddenLine xmlns="" xmlns:a14="http://schemas.microsoft.com/office/drawing/2010/main" w="9525">
                 <a:solidFill>
                   <a:srgbClr val="000000"/>
                 </a:solidFill>
@@ -3829,7 +3694,7 @@
     </p:spTree>
     <p:extLst>
       <p:ext uri="{BB962C8B-B14F-4D97-AF65-F5344CB8AC3E}">
-        <p14:creationId xmlns:p14="http://schemas.microsoft.com/office/powerpoint/2010/main" val="1352385476"/>
+        <p14:creationId xmlns:p14="http://schemas.microsoft.com/office/powerpoint/2010/main" val="1289641796"/>
       </p:ext>
     </p:extLst>
   </p:cSld>
@@ -3878,10 +3743,10 @@
           </a:ln>
           <a:extLst>
             <a:ext uri="{FAA26D3D-D897-4be2-8F04-BA451C77F1D7}">
-              <ma14:placeholderFlag xmlns="" xmlns:ma14="http://schemas.microsoft.com/office/mac/drawingml/2011/main" val="1"/>
+              <ma14:placeholderFlag xmlns:ma14="http://schemas.microsoft.com/office/mac/drawingml/2011/main" xmlns="" val="1"/>
             </a:ext>
             <a:ext uri="{909E8E84-426E-40dd-AFC4-6F175D3DCCD1}">
-              <a14:hiddenFill xmlns:a14="http://schemas.microsoft.com/office/drawing/2010/main" xmlns="">
+              <a14:hiddenFill xmlns="" xmlns:a14="http://schemas.microsoft.com/office/drawing/2010/main">
                 <a:solidFill>
                   <a:srgbClr val="FFFFFF"/>
                 </a:solidFill>
@@ -3904,17 +3769,17 @@
           <a:noFill/>
           <a:extLst>
             <a:ext uri="{FAA26D3D-D897-4be2-8F04-BA451C77F1D7}">
-              <ma14:placeholderFlag xmlns="" xmlns:ma14="http://schemas.microsoft.com/office/mac/drawingml/2011/main" val="1"/>
+              <ma14:placeholderFlag xmlns:ma14="http://schemas.microsoft.com/office/mac/drawingml/2011/main" xmlns="" val="1"/>
             </a:ext>
             <a:ext uri="{909E8E84-426E-40dd-AFC4-6F175D3DCCD1}">
-              <a14:hiddenFill xmlns:a14="http://schemas.microsoft.com/office/drawing/2010/main" xmlns="">
+              <a14:hiddenFill xmlns="" xmlns:a14="http://schemas.microsoft.com/office/drawing/2010/main">
                 <a:solidFill>
                   <a:srgbClr val="FFFFFF"/>
                 </a:solidFill>
               </a14:hiddenFill>
             </a:ext>
             <a:ext uri="{91240B29-F687-4f45-9708-019B960494DF}">
-              <a14:hiddenLine xmlns:a14="http://schemas.microsoft.com/office/drawing/2010/main" xmlns="" w="9525">
+              <a14:hiddenLine xmlns="" xmlns:a14="http://schemas.microsoft.com/office/drawing/2010/main" w="9525">
                 <a:solidFill>
                   <a:srgbClr val="000000"/>
                 </a:solidFill>
@@ -3953,14 +3818,14 @@
           <a:noFill/>
           <a:extLst>
             <a:ext uri="{909E8E84-426E-40dd-AFC4-6F175D3DCCD1}">
-              <a14:hiddenFill xmlns:a14="http://schemas.microsoft.com/office/drawing/2010/main" xmlns="">
+              <a14:hiddenFill xmlns="" xmlns:a14="http://schemas.microsoft.com/office/drawing/2010/main">
                 <a:solidFill>
                   <a:srgbClr val="FFFFFF"/>
                 </a:solidFill>
               </a14:hiddenFill>
             </a:ext>
             <a:ext uri="{91240B29-F687-4f45-9708-019B960494DF}">
-              <a14:hiddenLine xmlns:a14="http://schemas.microsoft.com/office/drawing/2010/main" xmlns="" w="9525">
+              <a14:hiddenLine xmlns="" xmlns:a14="http://schemas.microsoft.com/office/drawing/2010/main" w="9525">
                 <a:solidFill>
                   <a:srgbClr val="000000"/>
                 </a:solidFill>
@@ -4102,7 +3967,7 @@
     </p:spTree>
     <p:extLst>
       <p:ext uri="{BB962C8B-B14F-4D97-AF65-F5344CB8AC3E}">
-        <p14:creationId xmlns:p14="http://schemas.microsoft.com/office/powerpoint/2010/main" val="216607772"/>
+        <p14:creationId xmlns:p14="http://schemas.microsoft.com/office/powerpoint/2010/main" val="1352385476"/>
       </p:ext>
     </p:extLst>
   </p:cSld>
@@ -4151,10 +4016,10 @@
           </a:ln>
           <a:extLst>
             <a:ext uri="{FAA26D3D-D897-4be2-8F04-BA451C77F1D7}">
-              <ma14:placeholderFlag xmlns="" xmlns:ma14="http://schemas.microsoft.com/office/mac/drawingml/2011/main" val="1"/>
+              <ma14:placeholderFlag xmlns:ma14="http://schemas.microsoft.com/office/mac/drawingml/2011/main" xmlns="" val="1"/>
             </a:ext>
             <a:ext uri="{909E8E84-426E-40dd-AFC4-6F175D3DCCD1}">
-              <a14:hiddenFill xmlns:a14="http://schemas.microsoft.com/office/drawing/2010/main" xmlns="">
+              <a14:hiddenFill xmlns="" xmlns:a14="http://schemas.microsoft.com/office/drawing/2010/main">
                 <a:solidFill>
                   <a:srgbClr val="FFFFFF"/>
                 </a:solidFill>
@@ -4177,17 +4042,17 @@
           <a:noFill/>
           <a:extLst>
             <a:ext uri="{FAA26D3D-D897-4be2-8F04-BA451C77F1D7}">
-              <ma14:placeholderFlag xmlns="" xmlns:ma14="http://schemas.microsoft.com/office/mac/drawingml/2011/main" val="1"/>
+              <ma14:placeholderFlag xmlns:ma14="http://schemas.microsoft.com/office/mac/drawingml/2011/main" xmlns="" val="1"/>
             </a:ext>
             <a:ext uri="{909E8E84-426E-40dd-AFC4-6F175D3DCCD1}">
-              <a14:hiddenFill xmlns:a14="http://schemas.microsoft.com/office/drawing/2010/main" xmlns="">
+              <a14:hiddenFill xmlns="" xmlns:a14="http://schemas.microsoft.com/office/drawing/2010/main">
                 <a:solidFill>
                   <a:srgbClr val="FFFFFF"/>
                 </a:solidFill>
               </a14:hiddenFill>
             </a:ext>
             <a:ext uri="{91240B29-F687-4f45-9708-019B960494DF}">
-              <a14:hiddenLine xmlns:a14="http://schemas.microsoft.com/office/drawing/2010/main" xmlns="" w="9525">
+              <a14:hiddenLine xmlns="" xmlns:a14="http://schemas.microsoft.com/office/drawing/2010/main" w="9525">
                 <a:solidFill>
                   <a:srgbClr val="000000"/>
                 </a:solidFill>
@@ -4206,7 +4071,7 @@
           </a:bodyPr>
           <a:lstStyle/>
           <a:p>
-            <a:endParaRPr lang="en-US" altLang="en-US" dirty="0">
+            <a:endParaRPr lang="en-US" altLang="en-US">
               <a:ea typeface="MS PGothic" charset="-128"/>
             </a:endParaRPr>
           </a:p>
@@ -4226,14 +4091,14 @@
           <a:noFill/>
           <a:extLst>
             <a:ext uri="{909E8E84-426E-40dd-AFC4-6F175D3DCCD1}">
-              <a14:hiddenFill xmlns:a14="http://schemas.microsoft.com/office/drawing/2010/main" xmlns="">
+              <a14:hiddenFill xmlns="" xmlns:a14="http://schemas.microsoft.com/office/drawing/2010/main">
                 <a:solidFill>
                   <a:srgbClr val="FFFFFF"/>
                 </a:solidFill>
               </a14:hiddenFill>
             </a:ext>
             <a:ext uri="{91240B29-F687-4f45-9708-019B960494DF}">
-              <a14:hiddenLine xmlns:a14="http://schemas.microsoft.com/office/drawing/2010/main" xmlns="" w="9525">
+              <a14:hiddenLine xmlns="" xmlns:a14="http://schemas.microsoft.com/office/drawing/2010/main" w="9525">
                 <a:solidFill>
                   <a:srgbClr val="000000"/>
                 </a:solidFill>
@@ -4375,7 +4240,7 @@
     </p:spTree>
     <p:extLst>
       <p:ext uri="{BB962C8B-B14F-4D97-AF65-F5344CB8AC3E}">
-        <p14:creationId xmlns:p14="http://schemas.microsoft.com/office/powerpoint/2010/main" val="755932061"/>
+        <p14:creationId xmlns:p14="http://schemas.microsoft.com/office/powerpoint/2010/main" val="216607772"/>
       </p:ext>
     </p:extLst>
   </p:cSld>
@@ -4424,10 +4289,10 @@
           </a:ln>
           <a:extLst>
             <a:ext uri="{FAA26D3D-D897-4be2-8F04-BA451C77F1D7}">
-              <ma14:placeholderFlag xmlns="" xmlns:ma14="http://schemas.microsoft.com/office/mac/drawingml/2011/main" val="1"/>
+              <ma14:placeholderFlag xmlns:ma14="http://schemas.microsoft.com/office/mac/drawingml/2011/main" xmlns="" val="1"/>
             </a:ext>
             <a:ext uri="{909E8E84-426E-40dd-AFC4-6F175D3DCCD1}">
-              <a14:hiddenFill xmlns:a14="http://schemas.microsoft.com/office/drawing/2010/main" xmlns="">
+              <a14:hiddenFill xmlns="" xmlns:a14="http://schemas.microsoft.com/office/drawing/2010/main">
                 <a:solidFill>
                   <a:srgbClr val="FFFFFF"/>
                 </a:solidFill>
@@ -4450,17 +4315,17 @@
           <a:noFill/>
           <a:extLst>
             <a:ext uri="{FAA26D3D-D897-4be2-8F04-BA451C77F1D7}">
-              <ma14:placeholderFlag xmlns="" xmlns:ma14="http://schemas.microsoft.com/office/mac/drawingml/2011/main" val="1"/>
+              <ma14:placeholderFlag xmlns:ma14="http://schemas.microsoft.com/office/mac/drawingml/2011/main" xmlns="" val="1"/>
             </a:ext>
             <a:ext uri="{909E8E84-426E-40dd-AFC4-6F175D3DCCD1}">
-              <a14:hiddenFill xmlns:a14="http://schemas.microsoft.com/office/drawing/2010/main" xmlns="">
+              <a14:hiddenFill xmlns="" xmlns:a14="http://schemas.microsoft.com/office/drawing/2010/main">
                 <a:solidFill>
                   <a:srgbClr val="FFFFFF"/>
                 </a:solidFill>
               </a14:hiddenFill>
             </a:ext>
             <a:ext uri="{91240B29-F687-4f45-9708-019B960494DF}">
-              <a14:hiddenLine xmlns:a14="http://schemas.microsoft.com/office/drawing/2010/main" xmlns="" w="9525">
+              <a14:hiddenLine xmlns="" xmlns:a14="http://schemas.microsoft.com/office/drawing/2010/main" w="9525">
                 <a:solidFill>
                   <a:srgbClr val="000000"/>
                 </a:solidFill>
@@ -4499,14 +4364,14 @@
           <a:noFill/>
           <a:extLst>
             <a:ext uri="{909E8E84-426E-40dd-AFC4-6F175D3DCCD1}">
-              <a14:hiddenFill xmlns:a14="http://schemas.microsoft.com/office/drawing/2010/main" xmlns="">
+              <a14:hiddenFill xmlns="" xmlns:a14="http://schemas.microsoft.com/office/drawing/2010/main">
                 <a:solidFill>
                   <a:srgbClr val="FFFFFF"/>
                 </a:solidFill>
               </a14:hiddenFill>
             </a:ext>
             <a:ext uri="{91240B29-F687-4f45-9708-019B960494DF}">
-              <a14:hiddenLine xmlns:a14="http://schemas.microsoft.com/office/drawing/2010/main" xmlns="" w="9525">
+              <a14:hiddenLine xmlns="" xmlns:a14="http://schemas.microsoft.com/office/drawing/2010/main" w="9525">
                 <a:solidFill>
                   <a:srgbClr val="000000"/>
                 </a:solidFill>
@@ -4648,7 +4513,7 @@
     </p:spTree>
     <p:extLst>
       <p:ext uri="{BB962C8B-B14F-4D97-AF65-F5344CB8AC3E}">
-        <p14:creationId xmlns:p14="http://schemas.microsoft.com/office/powerpoint/2010/main" val="1056791553"/>
+        <p14:creationId xmlns:p14="http://schemas.microsoft.com/office/powerpoint/2010/main" val="755932061"/>
       </p:ext>
     </p:extLst>
   </p:cSld>
@@ -4834,10 +4699,10 @@
           </a:ln>
           <a:extLst>
             <a:ext uri="{FAA26D3D-D897-4be2-8F04-BA451C77F1D7}">
-              <ma14:placeholderFlag xmlns="" xmlns:ma14="http://schemas.microsoft.com/office/mac/drawingml/2011/main" val="1"/>
+              <ma14:placeholderFlag xmlns:ma14="http://schemas.microsoft.com/office/mac/drawingml/2011/main" xmlns="" val="1"/>
             </a:ext>
             <a:ext uri="{909E8E84-426E-40dd-AFC4-6F175D3DCCD1}">
-              <a14:hiddenFill xmlns:a14="http://schemas.microsoft.com/office/drawing/2010/main" xmlns="">
+              <a14:hiddenFill xmlns="" xmlns:a14="http://schemas.microsoft.com/office/drawing/2010/main">
                 <a:solidFill>
                   <a:srgbClr val="FFFFFF"/>
                 </a:solidFill>
@@ -4860,17 +4725,17 @@
           <a:noFill/>
           <a:extLst>
             <a:ext uri="{FAA26D3D-D897-4be2-8F04-BA451C77F1D7}">
-              <ma14:placeholderFlag xmlns="" xmlns:ma14="http://schemas.microsoft.com/office/mac/drawingml/2011/main" val="1"/>
+              <ma14:placeholderFlag xmlns:ma14="http://schemas.microsoft.com/office/mac/drawingml/2011/main" xmlns="" val="1"/>
             </a:ext>
             <a:ext uri="{909E8E84-426E-40dd-AFC4-6F175D3DCCD1}">
-              <a14:hiddenFill xmlns:a14="http://schemas.microsoft.com/office/drawing/2010/main" xmlns="">
+              <a14:hiddenFill xmlns="" xmlns:a14="http://schemas.microsoft.com/office/drawing/2010/main">
                 <a:solidFill>
                   <a:srgbClr val="FFFFFF"/>
                 </a:solidFill>
               </a14:hiddenFill>
             </a:ext>
             <a:ext uri="{91240B29-F687-4f45-9708-019B960494DF}">
-              <a14:hiddenLine xmlns:a14="http://schemas.microsoft.com/office/drawing/2010/main" xmlns="" w="9525">
+              <a14:hiddenLine xmlns="" xmlns:a14="http://schemas.microsoft.com/office/drawing/2010/main" w="9525">
                 <a:solidFill>
                   <a:srgbClr val="000000"/>
                 </a:solidFill>
@@ -4909,14 +4774,14 @@
           <a:noFill/>
           <a:extLst>
             <a:ext uri="{909E8E84-426E-40dd-AFC4-6F175D3DCCD1}">
-              <a14:hiddenFill xmlns:a14="http://schemas.microsoft.com/office/drawing/2010/main" xmlns="">
+              <a14:hiddenFill xmlns="" xmlns:a14="http://schemas.microsoft.com/office/drawing/2010/main">
                 <a:solidFill>
                   <a:srgbClr val="FFFFFF"/>
                 </a:solidFill>
               </a14:hiddenFill>
             </a:ext>
             <a:ext uri="{91240B29-F687-4f45-9708-019B960494DF}">
-              <a14:hiddenLine xmlns:a14="http://schemas.microsoft.com/office/drawing/2010/main" xmlns="" w="9525">
+              <a14:hiddenLine xmlns="" xmlns:a14="http://schemas.microsoft.com/office/drawing/2010/main" w="9525">
                 <a:solidFill>
                   <a:srgbClr val="000000"/>
                 </a:solidFill>
@@ -5058,7 +4923,7 @@
     </p:spTree>
     <p:extLst>
       <p:ext uri="{BB962C8B-B14F-4D97-AF65-F5344CB8AC3E}">
-        <p14:creationId xmlns:p14="http://schemas.microsoft.com/office/powerpoint/2010/main" val="170455698"/>
+        <p14:creationId xmlns:p14="http://schemas.microsoft.com/office/powerpoint/2010/main" val="1056791553"/>
       </p:ext>
     </p:extLst>
   </p:cSld>
@@ -5107,10 +4972,10 @@
           </a:ln>
           <a:extLst>
             <a:ext uri="{FAA26D3D-D897-4be2-8F04-BA451C77F1D7}">
-              <ma14:placeholderFlag xmlns="" xmlns:ma14="http://schemas.microsoft.com/office/mac/drawingml/2011/main" val="1"/>
+              <ma14:placeholderFlag xmlns:ma14="http://schemas.microsoft.com/office/mac/drawingml/2011/main" xmlns="" val="1"/>
             </a:ext>
             <a:ext uri="{909E8E84-426E-40dd-AFC4-6F175D3DCCD1}">
-              <a14:hiddenFill xmlns:a14="http://schemas.microsoft.com/office/drawing/2010/main" xmlns="">
+              <a14:hiddenFill xmlns="" xmlns:a14="http://schemas.microsoft.com/office/drawing/2010/main">
                 <a:solidFill>
                   <a:srgbClr val="FFFFFF"/>
                 </a:solidFill>
@@ -5133,17 +4998,17 @@
           <a:noFill/>
           <a:extLst>
             <a:ext uri="{FAA26D3D-D897-4be2-8F04-BA451C77F1D7}">
-              <ma14:placeholderFlag xmlns="" xmlns:ma14="http://schemas.microsoft.com/office/mac/drawingml/2011/main" val="1"/>
+              <ma14:placeholderFlag xmlns:ma14="http://schemas.microsoft.com/office/mac/drawingml/2011/main" xmlns="" val="1"/>
             </a:ext>
             <a:ext uri="{909E8E84-426E-40dd-AFC4-6F175D3DCCD1}">
-              <a14:hiddenFill xmlns:a14="http://schemas.microsoft.com/office/drawing/2010/main" xmlns="">
+              <a14:hiddenFill xmlns="" xmlns:a14="http://schemas.microsoft.com/office/drawing/2010/main">
                 <a:solidFill>
                   <a:srgbClr val="FFFFFF"/>
                 </a:solidFill>
               </a14:hiddenFill>
             </a:ext>
             <a:ext uri="{91240B29-F687-4f45-9708-019B960494DF}">
-              <a14:hiddenLine xmlns:a14="http://schemas.microsoft.com/office/drawing/2010/main" xmlns="" w="9525">
+              <a14:hiddenLine xmlns="" xmlns:a14="http://schemas.microsoft.com/office/drawing/2010/main" w="9525">
                 <a:solidFill>
                   <a:srgbClr val="000000"/>
                 </a:solidFill>
@@ -5182,14 +5047,14 @@
           <a:noFill/>
           <a:extLst>
             <a:ext uri="{909E8E84-426E-40dd-AFC4-6F175D3DCCD1}">
-              <a14:hiddenFill xmlns:a14="http://schemas.microsoft.com/office/drawing/2010/main" xmlns="">
+              <a14:hiddenFill xmlns="" xmlns:a14="http://schemas.microsoft.com/office/drawing/2010/main">
                 <a:solidFill>
                   <a:srgbClr val="FFFFFF"/>
                 </a:solidFill>
               </a14:hiddenFill>
             </a:ext>
             <a:ext uri="{91240B29-F687-4f45-9708-019B960494DF}">
-              <a14:hiddenLine xmlns:a14="http://schemas.microsoft.com/office/drawing/2010/main" xmlns="" w="9525">
+              <a14:hiddenLine xmlns="" xmlns:a14="http://schemas.microsoft.com/office/drawing/2010/main" w="9525">
                 <a:solidFill>
                   <a:srgbClr val="000000"/>
                 </a:solidFill>
@@ -5331,7 +5196,7 @@
     </p:spTree>
     <p:extLst>
       <p:ext uri="{BB962C8B-B14F-4D97-AF65-F5344CB8AC3E}">
-        <p14:creationId xmlns:p14="http://schemas.microsoft.com/office/powerpoint/2010/main" val="1304100850"/>
+        <p14:creationId xmlns:p14="http://schemas.microsoft.com/office/powerpoint/2010/main" val="170455698"/>
       </p:ext>
     </p:extLst>
   </p:cSld>
@@ -5380,10 +5245,10 @@
           </a:ln>
           <a:extLst>
             <a:ext uri="{FAA26D3D-D897-4be2-8F04-BA451C77F1D7}">
-              <ma14:placeholderFlag xmlns="" xmlns:ma14="http://schemas.microsoft.com/office/mac/drawingml/2011/main" val="1"/>
+              <ma14:placeholderFlag xmlns:ma14="http://schemas.microsoft.com/office/mac/drawingml/2011/main" xmlns="" val="1"/>
             </a:ext>
             <a:ext uri="{909E8E84-426E-40dd-AFC4-6F175D3DCCD1}">
-              <a14:hiddenFill xmlns:a14="http://schemas.microsoft.com/office/drawing/2010/main" xmlns="">
+              <a14:hiddenFill xmlns="" xmlns:a14="http://schemas.microsoft.com/office/drawing/2010/main">
                 <a:solidFill>
                   <a:srgbClr val="FFFFFF"/>
                 </a:solidFill>
@@ -5406,17 +5271,17 @@
           <a:noFill/>
           <a:extLst>
             <a:ext uri="{FAA26D3D-D897-4be2-8F04-BA451C77F1D7}">
-              <ma14:placeholderFlag xmlns="" xmlns:ma14="http://schemas.microsoft.com/office/mac/drawingml/2011/main" val="1"/>
+              <ma14:placeholderFlag xmlns:ma14="http://schemas.microsoft.com/office/mac/drawingml/2011/main" xmlns="" val="1"/>
             </a:ext>
             <a:ext uri="{909E8E84-426E-40dd-AFC4-6F175D3DCCD1}">
-              <a14:hiddenFill xmlns:a14="http://schemas.microsoft.com/office/drawing/2010/main" xmlns="">
+              <a14:hiddenFill xmlns="" xmlns:a14="http://schemas.microsoft.com/office/drawing/2010/main">
                 <a:solidFill>
                   <a:srgbClr val="FFFFFF"/>
                 </a:solidFill>
               </a14:hiddenFill>
             </a:ext>
             <a:ext uri="{91240B29-F687-4f45-9708-019B960494DF}">
-              <a14:hiddenLine xmlns:a14="http://schemas.microsoft.com/office/drawing/2010/main" xmlns="" w="9525">
+              <a14:hiddenLine xmlns="" xmlns:a14="http://schemas.microsoft.com/office/drawing/2010/main" w="9525">
                 <a:solidFill>
                   <a:srgbClr val="000000"/>
                 </a:solidFill>
@@ -5455,14 +5320,14 @@
           <a:noFill/>
           <a:extLst>
             <a:ext uri="{909E8E84-426E-40dd-AFC4-6F175D3DCCD1}">
-              <a14:hiddenFill xmlns:a14="http://schemas.microsoft.com/office/drawing/2010/main" xmlns="">
+              <a14:hiddenFill xmlns="" xmlns:a14="http://schemas.microsoft.com/office/drawing/2010/main">
                 <a:solidFill>
                   <a:srgbClr val="FFFFFF"/>
                 </a:solidFill>
               </a14:hiddenFill>
             </a:ext>
             <a:ext uri="{91240B29-F687-4f45-9708-019B960494DF}">
-              <a14:hiddenLine xmlns:a14="http://schemas.microsoft.com/office/drawing/2010/main" xmlns="" w="9525">
+              <a14:hiddenLine xmlns="" xmlns:a14="http://schemas.microsoft.com/office/drawing/2010/main" w="9525">
                 <a:solidFill>
                   <a:srgbClr val="000000"/>
                 </a:solidFill>
@@ -5604,7 +5469,7 @@
     </p:spTree>
     <p:extLst>
       <p:ext uri="{BB962C8B-B14F-4D97-AF65-F5344CB8AC3E}">
-        <p14:creationId xmlns:p14="http://schemas.microsoft.com/office/powerpoint/2010/main" val="682332446"/>
+        <p14:creationId xmlns:p14="http://schemas.microsoft.com/office/powerpoint/2010/main" val="1304100850"/>
       </p:ext>
     </p:extLst>
   </p:cSld>
@@ -5653,10 +5518,10 @@
           </a:ln>
           <a:extLst>
             <a:ext uri="{FAA26D3D-D897-4be2-8F04-BA451C77F1D7}">
-              <ma14:placeholderFlag xmlns="" xmlns:ma14="http://schemas.microsoft.com/office/mac/drawingml/2011/main" val="1"/>
+              <ma14:placeholderFlag xmlns:ma14="http://schemas.microsoft.com/office/mac/drawingml/2011/main" xmlns="" val="1"/>
             </a:ext>
             <a:ext uri="{909E8E84-426E-40dd-AFC4-6F175D3DCCD1}">
-              <a14:hiddenFill xmlns:a14="http://schemas.microsoft.com/office/drawing/2010/main" xmlns="">
+              <a14:hiddenFill xmlns="" xmlns:a14="http://schemas.microsoft.com/office/drawing/2010/main">
                 <a:solidFill>
                   <a:srgbClr val="FFFFFF"/>
                 </a:solidFill>
@@ -5679,17 +5544,17 @@
           <a:noFill/>
           <a:extLst>
             <a:ext uri="{FAA26D3D-D897-4be2-8F04-BA451C77F1D7}">
-              <ma14:placeholderFlag xmlns="" xmlns:ma14="http://schemas.microsoft.com/office/mac/drawingml/2011/main" val="1"/>
+              <ma14:placeholderFlag xmlns:ma14="http://schemas.microsoft.com/office/mac/drawingml/2011/main" xmlns="" val="1"/>
             </a:ext>
             <a:ext uri="{909E8E84-426E-40dd-AFC4-6F175D3DCCD1}">
-              <a14:hiddenFill xmlns:a14="http://schemas.microsoft.com/office/drawing/2010/main" xmlns="">
+              <a14:hiddenFill xmlns="" xmlns:a14="http://schemas.microsoft.com/office/drawing/2010/main">
                 <a:solidFill>
                   <a:srgbClr val="FFFFFF"/>
                 </a:solidFill>
               </a14:hiddenFill>
             </a:ext>
             <a:ext uri="{91240B29-F687-4f45-9708-019B960494DF}">
-              <a14:hiddenLine xmlns:a14="http://schemas.microsoft.com/office/drawing/2010/main" xmlns="" w="9525">
+              <a14:hiddenLine xmlns="" xmlns:a14="http://schemas.microsoft.com/office/drawing/2010/main" w="9525">
                 <a:solidFill>
                   <a:srgbClr val="000000"/>
                 </a:solidFill>
@@ -5728,14 +5593,14 @@
           <a:noFill/>
           <a:extLst>
             <a:ext uri="{909E8E84-426E-40dd-AFC4-6F175D3DCCD1}">
-              <a14:hiddenFill xmlns:a14="http://schemas.microsoft.com/office/drawing/2010/main" xmlns="">
+              <a14:hiddenFill xmlns="" xmlns:a14="http://schemas.microsoft.com/office/drawing/2010/main">
                 <a:solidFill>
                   <a:srgbClr val="FFFFFF"/>
                 </a:solidFill>
               </a14:hiddenFill>
             </a:ext>
             <a:ext uri="{91240B29-F687-4f45-9708-019B960494DF}">
-              <a14:hiddenLine xmlns:a14="http://schemas.microsoft.com/office/drawing/2010/main" xmlns="" w="9525">
+              <a14:hiddenLine xmlns="" xmlns:a14="http://schemas.microsoft.com/office/drawing/2010/main" w="9525">
                 <a:solidFill>
                   <a:srgbClr val="000000"/>
                 </a:solidFill>
@@ -5877,7 +5742,7 @@
     </p:spTree>
     <p:extLst>
       <p:ext uri="{BB962C8B-B14F-4D97-AF65-F5344CB8AC3E}">
-        <p14:creationId xmlns:p14="http://schemas.microsoft.com/office/powerpoint/2010/main" val="541398096"/>
+        <p14:creationId xmlns:p14="http://schemas.microsoft.com/office/powerpoint/2010/main" val="682332446"/>
       </p:ext>
     </p:extLst>
   </p:cSld>
@@ -5926,10 +5791,10 @@
           </a:ln>
           <a:extLst>
             <a:ext uri="{FAA26D3D-D897-4be2-8F04-BA451C77F1D7}">
-              <ma14:placeholderFlag xmlns="" xmlns:ma14="http://schemas.microsoft.com/office/mac/drawingml/2011/main" val="1"/>
+              <ma14:placeholderFlag xmlns:ma14="http://schemas.microsoft.com/office/mac/drawingml/2011/main" xmlns="" val="1"/>
             </a:ext>
             <a:ext uri="{909E8E84-426E-40dd-AFC4-6F175D3DCCD1}">
-              <a14:hiddenFill xmlns:a14="http://schemas.microsoft.com/office/drawing/2010/main" xmlns="">
+              <a14:hiddenFill xmlns="" xmlns:a14="http://schemas.microsoft.com/office/drawing/2010/main">
                 <a:solidFill>
                   <a:srgbClr val="FFFFFF"/>
                 </a:solidFill>
@@ -5952,17 +5817,17 @@
           <a:noFill/>
           <a:extLst>
             <a:ext uri="{FAA26D3D-D897-4be2-8F04-BA451C77F1D7}">
-              <ma14:placeholderFlag xmlns="" xmlns:ma14="http://schemas.microsoft.com/office/mac/drawingml/2011/main" val="1"/>
+              <ma14:placeholderFlag xmlns:ma14="http://schemas.microsoft.com/office/mac/drawingml/2011/main" xmlns="" val="1"/>
             </a:ext>
             <a:ext uri="{909E8E84-426E-40dd-AFC4-6F175D3DCCD1}">
-              <a14:hiddenFill xmlns:a14="http://schemas.microsoft.com/office/drawing/2010/main" xmlns="">
+              <a14:hiddenFill xmlns="" xmlns:a14="http://schemas.microsoft.com/office/drawing/2010/main">
                 <a:solidFill>
                   <a:srgbClr val="FFFFFF"/>
                 </a:solidFill>
               </a14:hiddenFill>
             </a:ext>
             <a:ext uri="{91240B29-F687-4f45-9708-019B960494DF}">
-              <a14:hiddenLine xmlns:a14="http://schemas.microsoft.com/office/drawing/2010/main" xmlns="" w="9525">
+              <a14:hiddenLine xmlns="" xmlns:a14="http://schemas.microsoft.com/office/drawing/2010/main" w="9525">
                 <a:solidFill>
                   <a:srgbClr val="000000"/>
                 </a:solidFill>
@@ -6001,14 +5866,14 @@
           <a:noFill/>
           <a:extLst>
             <a:ext uri="{909E8E84-426E-40dd-AFC4-6F175D3DCCD1}">
-              <a14:hiddenFill xmlns:a14="http://schemas.microsoft.com/office/drawing/2010/main" xmlns="">
+              <a14:hiddenFill xmlns="" xmlns:a14="http://schemas.microsoft.com/office/drawing/2010/main">
                 <a:solidFill>
                   <a:srgbClr val="FFFFFF"/>
                 </a:solidFill>
               </a14:hiddenFill>
             </a:ext>
             <a:ext uri="{91240B29-F687-4f45-9708-019B960494DF}">
-              <a14:hiddenLine xmlns:a14="http://schemas.microsoft.com/office/drawing/2010/main" xmlns="" w="9525">
+              <a14:hiddenLine xmlns="" xmlns:a14="http://schemas.microsoft.com/office/drawing/2010/main" w="9525">
                 <a:solidFill>
                   <a:srgbClr val="000000"/>
                 </a:solidFill>
@@ -6150,7 +6015,7 @@
     </p:spTree>
     <p:extLst>
       <p:ext uri="{BB962C8B-B14F-4D97-AF65-F5344CB8AC3E}">
-        <p14:creationId xmlns:p14="http://schemas.microsoft.com/office/powerpoint/2010/main" val="1386358569"/>
+        <p14:creationId xmlns:p14="http://schemas.microsoft.com/office/powerpoint/2010/main" val="541398096"/>
       </p:ext>
     </p:extLst>
   </p:cSld>
@@ -6199,10 +6064,10 @@
           </a:ln>
           <a:extLst>
             <a:ext uri="{FAA26D3D-D897-4be2-8F04-BA451C77F1D7}">
-              <ma14:placeholderFlag xmlns="" xmlns:ma14="http://schemas.microsoft.com/office/mac/drawingml/2011/main" val="1"/>
+              <ma14:placeholderFlag xmlns:ma14="http://schemas.microsoft.com/office/mac/drawingml/2011/main" xmlns="" val="1"/>
             </a:ext>
             <a:ext uri="{909E8E84-426E-40dd-AFC4-6F175D3DCCD1}">
-              <a14:hiddenFill xmlns:a14="http://schemas.microsoft.com/office/drawing/2010/main" xmlns="">
+              <a14:hiddenFill xmlns="" xmlns:a14="http://schemas.microsoft.com/office/drawing/2010/main">
                 <a:solidFill>
                   <a:srgbClr val="FFFFFF"/>
                 </a:solidFill>
@@ -6225,17 +6090,17 @@
           <a:noFill/>
           <a:extLst>
             <a:ext uri="{FAA26D3D-D897-4be2-8F04-BA451C77F1D7}">
-              <ma14:placeholderFlag xmlns="" xmlns:ma14="http://schemas.microsoft.com/office/mac/drawingml/2011/main" val="1"/>
+              <ma14:placeholderFlag xmlns:ma14="http://schemas.microsoft.com/office/mac/drawingml/2011/main" xmlns="" val="1"/>
             </a:ext>
             <a:ext uri="{909E8E84-426E-40dd-AFC4-6F175D3DCCD1}">
-              <a14:hiddenFill xmlns:a14="http://schemas.microsoft.com/office/drawing/2010/main" xmlns="">
+              <a14:hiddenFill xmlns="" xmlns:a14="http://schemas.microsoft.com/office/drawing/2010/main">
                 <a:solidFill>
                   <a:srgbClr val="FFFFFF"/>
                 </a:solidFill>
               </a14:hiddenFill>
             </a:ext>
             <a:ext uri="{91240B29-F687-4f45-9708-019B960494DF}">
-              <a14:hiddenLine xmlns:a14="http://schemas.microsoft.com/office/drawing/2010/main" xmlns="" w="9525">
+              <a14:hiddenLine xmlns="" xmlns:a14="http://schemas.microsoft.com/office/drawing/2010/main" w="9525">
                 <a:solidFill>
                   <a:srgbClr val="000000"/>
                 </a:solidFill>
@@ -6274,14 +6139,14 @@
           <a:noFill/>
           <a:extLst>
             <a:ext uri="{909E8E84-426E-40dd-AFC4-6F175D3DCCD1}">
-              <a14:hiddenFill xmlns:a14="http://schemas.microsoft.com/office/drawing/2010/main" xmlns="">
+              <a14:hiddenFill xmlns="" xmlns:a14="http://schemas.microsoft.com/office/drawing/2010/main">
                 <a:solidFill>
                   <a:srgbClr val="FFFFFF"/>
                 </a:solidFill>
               </a14:hiddenFill>
             </a:ext>
             <a:ext uri="{91240B29-F687-4f45-9708-019B960494DF}">
-              <a14:hiddenLine xmlns:a14="http://schemas.microsoft.com/office/drawing/2010/main" xmlns="" w="9525">
+              <a14:hiddenLine xmlns="" xmlns:a14="http://schemas.microsoft.com/office/drawing/2010/main" w="9525">
                 <a:solidFill>
                   <a:srgbClr val="000000"/>
                 </a:solidFill>
@@ -6415,6 +6280,279 @@
               <a:rPr lang="en-US" altLang="en-US" sz="1200"/>
               <a:pPr/>
               <a:t>41</a:t>
+            </a:fld>
+            <a:endParaRPr lang="en-US" altLang="en-US" sz="1200"/>
+          </a:p>
+        </p:txBody>
+      </p:sp>
+    </p:spTree>
+    <p:extLst>
+      <p:ext uri="{BB962C8B-B14F-4D97-AF65-F5344CB8AC3E}">
+        <p14:creationId xmlns:p14="http://schemas.microsoft.com/office/powerpoint/2010/main" val="1386358569"/>
+      </p:ext>
+    </p:extLst>
+  </p:cSld>
+  <p:clrMapOvr>
+    <a:masterClrMapping/>
+  </p:clrMapOvr>
+</p:notes>
+</file>
+
+<file path=ppt/notesSlides/notesSlide36.xml><?xml version="1.0" encoding="utf-8"?>
+<p:notes xmlns:a="http://schemas.openxmlformats.org/drawingml/2006/main" xmlns:r="http://schemas.openxmlformats.org/officeDocument/2006/relationships" xmlns:p="http://schemas.openxmlformats.org/presentationml/2006/main">
+  <p:cSld>
+    <p:spTree>
+      <p:nvGrpSpPr>
+        <p:cNvPr id="1" name=""/>
+        <p:cNvGrpSpPr/>
+        <p:nvPr/>
+      </p:nvGrpSpPr>
+      <p:grpSpPr>
+        <a:xfrm>
+          <a:off x="0" y="0"/>
+          <a:ext cx="0" cy="0"/>
+          <a:chOff x="0" y="0"/>
+          <a:chExt cx="0" cy="0"/>
+        </a:xfrm>
+      </p:grpSpPr>
+      <p:sp>
+        <p:nvSpPr>
+          <p:cNvPr id="65537" name="Slide Image Placeholder 1"/>
+          <p:cNvSpPr>
+            <a:spLocks noGrp="1" noRot="1" noChangeAspect="1" noTextEdit="1"/>
+          </p:cNvSpPr>
+          <p:nvPr>
+            <p:ph type="sldImg"/>
+          </p:nvPr>
+        </p:nvSpPr>
+        <p:spPr bwMode="auto">
+          <a:noFill/>
+          <a:ln>
+            <a:solidFill>
+              <a:srgbClr val="000000"/>
+            </a:solidFill>
+            <a:miter lim="800000"/>
+            <a:headEnd/>
+            <a:tailEnd/>
+          </a:ln>
+          <a:extLst>
+            <a:ext uri="{FAA26D3D-D897-4be2-8F04-BA451C77F1D7}">
+              <ma14:placeholderFlag xmlns:ma14="http://schemas.microsoft.com/office/mac/drawingml/2011/main" xmlns="" val="1"/>
+            </a:ext>
+            <a:ext uri="{909E8E84-426E-40dd-AFC4-6F175D3DCCD1}">
+              <a14:hiddenFill xmlns="" xmlns:a14="http://schemas.microsoft.com/office/drawing/2010/main">
+                <a:solidFill>
+                  <a:srgbClr val="FFFFFF"/>
+                </a:solidFill>
+              </a14:hiddenFill>
+            </a:ext>
+          </a:extLst>
+        </p:spPr>
+      </p:sp>
+      <p:sp>
+        <p:nvSpPr>
+          <p:cNvPr id="65538" name="Notes Placeholder 2"/>
+          <p:cNvSpPr>
+            <a:spLocks noGrp="1"/>
+          </p:cNvSpPr>
+          <p:nvPr>
+            <p:ph type="body" idx="1"/>
+          </p:nvPr>
+        </p:nvSpPr>
+        <p:spPr bwMode="auto">
+          <a:noFill/>
+          <a:extLst>
+            <a:ext uri="{FAA26D3D-D897-4be2-8F04-BA451C77F1D7}">
+              <ma14:placeholderFlag xmlns:ma14="http://schemas.microsoft.com/office/mac/drawingml/2011/main" xmlns="" val="1"/>
+            </a:ext>
+            <a:ext uri="{909E8E84-426E-40dd-AFC4-6F175D3DCCD1}">
+              <a14:hiddenFill xmlns="" xmlns:a14="http://schemas.microsoft.com/office/drawing/2010/main">
+                <a:solidFill>
+                  <a:srgbClr val="FFFFFF"/>
+                </a:solidFill>
+              </a14:hiddenFill>
+            </a:ext>
+            <a:ext uri="{91240B29-F687-4f45-9708-019B960494DF}">
+              <a14:hiddenLine xmlns="" xmlns:a14="http://schemas.microsoft.com/office/drawing/2010/main" w="9525">
+                <a:solidFill>
+                  <a:srgbClr val="000000"/>
+                </a:solidFill>
+                <a:miter lim="800000"/>
+                <a:headEnd/>
+                <a:tailEnd/>
+              </a14:hiddenLine>
+            </a:ext>
+          </a:extLst>
+        </p:spPr>
+        <p:txBody>
+          <a:bodyPr wrap="square" numCol="1" anchor="t" anchorCtr="0" compatLnSpc="1">
+            <a:prstTxWarp prst="textNoShape">
+              <a:avLst/>
+            </a:prstTxWarp>
+          </a:bodyPr>
+          <a:lstStyle/>
+          <a:p>
+            <a:endParaRPr lang="en-US" altLang="en-US" dirty="0">
+              <a:ea typeface="MS PGothic" charset="-128"/>
+            </a:endParaRPr>
+          </a:p>
+        </p:txBody>
+      </p:sp>
+      <p:sp>
+        <p:nvSpPr>
+          <p:cNvPr id="65539" name="Slide Number Placeholder 3"/>
+          <p:cNvSpPr>
+            <a:spLocks noGrp="1"/>
+          </p:cNvSpPr>
+          <p:nvPr>
+            <p:ph type="sldNum" sz="quarter" idx="5"/>
+          </p:nvPr>
+        </p:nvSpPr>
+        <p:spPr bwMode="auto">
+          <a:noFill/>
+          <a:extLst>
+            <a:ext uri="{909E8E84-426E-40dd-AFC4-6F175D3DCCD1}">
+              <a14:hiddenFill xmlns="" xmlns:a14="http://schemas.microsoft.com/office/drawing/2010/main">
+                <a:solidFill>
+                  <a:srgbClr val="FFFFFF"/>
+                </a:solidFill>
+              </a14:hiddenFill>
+            </a:ext>
+            <a:ext uri="{91240B29-F687-4f45-9708-019B960494DF}">
+              <a14:hiddenLine xmlns="" xmlns:a14="http://schemas.microsoft.com/office/drawing/2010/main" w="9525">
+                <a:solidFill>
+                  <a:srgbClr val="000000"/>
+                </a:solidFill>
+                <a:miter lim="800000"/>
+                <a:headEnd/>
+                <a:tailEnd/>
+              </a14:hiddenLine>
+            </a:ext>
+          </a:extLst>
+        </p:spPr>
+        <p:txBody>
+          <a:bodyPr/>
+          <a:lstStyle>
+            <a:lvl1pPr>
+              <a:defRPr sz="2400">
+                <a:solidFill>
+                  <a:srgbClr val="000000"/>
+                </a:solidFill>
+                <a:latin typeface="Times New Roman" charset="0"/>
+                <a:ea typeface="ヒラギノ明朝 ProN W3" charset="-128"/>
+                <a:sym typeface="Times New Roman" charset="0"/>
+              </a:defRPr>
+            </a:lvl1pPr>
+            <a:lvl2pPr marL="742950" indent="-285750">
+              <a:defRPr sz="2400">
+                <a:solidFill>
+                  <a:srgbClr val="000000"/>
+                </a:solidFill>
+                <a:latin typeface="Times New Roman" charset="0"/>
+                <a:ea typeface="ヒラギノ明朝 ProN W3" charset="-128"/>
+                <a:sym typeface="Times New Roman" charset="0"/>
+              </a:defRPr>
+            </a:lvl2pPr>
+            <a:lvl3pPr marL="1143000" indent="-228600">
+              <a:defRPr sz="2400">
+                <a:solidFill>
+                  <a:srgbClr val="000000"/>
+                </a:solidFill>
+                <a:latin typeface="Times New Roman" charset="0"/>
+                <a:ea typeface="ヒラギノ明朝 ProN W3" charset="-128"/>
+                <a:sym typeface="Times New Roman" charset="0"/>
+              </a:defRPr>
+            </a:lvl3pPr>
+            <a:lvl4pPr marL="1600200" indent="-228600">
+              <a:defRPr sz="2400">
+                <a:solidFill>
+                  <a:srgbClr val="000000"/>
+                </a:solidFill>
+                <a:latin typeface="Times New Roman" charset="0"/>
+                <a:ea typeface="ヒラギノ明朝 ProN W3" charset="-128"/>
+                <a:sym typeface="Times New Roman" charset="0"/>
+              </a:defRPr>
+            </a:lvl4pPr>
+            <a:lvl5pPr marL="2057400" indent="-228600">
+              <a:defRPr sz="2400">
+                <a:solidFill>
+                  <a:srgbClr val="000000"/>
+                </a:solidFill>
+                <a:latin typeface="Times New Roman" charset="0"/>
+                <a:ea typeface="ヒラギノ明朝 ProN W3" charset="-128"/>
+                <a:sym typeface="Times New Roman" charset="0"/>
+              </a:defRPr>
+            </a:lvl5pPr>
+            <a:lvl6pPr marL="2514600" indent="-228600" eaLnBrk="0" fontAlgn="base" hangingPunct="0">
+              <a:spcBef>
+                <a:spcPct val="0"/>
+              </a:spcBef>
+              <a:spcAft>
+                <a:spcPct val="0"/>
+              </a:spcAft>
+              <a:defRPr sz="2400">
+                <a:solidFill>
+                  <a:srgbClr val="000000"/>
+                </a:solidFill>
+                <a:latin typeface="Times New Roman" charset="0"/>
+                <a:ea typeface="ヒラギノ明朝 ProN W3" charset="-128"/>
+                <a:sym typeface="Times New Roman" charset="0"/>
+              </a:defRPr>
+            </a:lvl6pPr>
+            <a:lvl7pPr marL="2971800" indent="-228600" eaLnBrk="0" fontAlgn="base" hangingPunct="0">
+              <a:spcBef>
+                <a:spcPct val="0"/>
+              </a:spcBef>
+              <a:spcAft>
+                <a:spcPct val="0"/>
+              </a:spcAft>
+              <a:defRPr sz="2400">
+                <a:solidFill>
+                  <a:srgbClr val="000000"/>
+                </a:solidFill>
+                <a:latin typeface="Times New Roman" charset="0"/>
+                <a:ea typeface="ヒラギノ明朝 ProN W3" charset="-128"/>
+                <a:sym typeface="Times New Roman" charset="0"/>
+              </a:defRPr>
+            </a:lvl7pPr>
+            <a:lvl8pPr marL="3429000" indent="-228600" eaLnBrk="0" fontAlgn="base" hangingPunct="0">
+              <a:spcBef>
+                <a:spcPct val="0"/>
+              </a:spcBef>
+              <a:spcAft>
+                <a:spcPct val="0"/>
+              </a:spcAft>
+              <a:defRPr sz="2400">
+                <a:solidFill>
+                  <a:srgbClr val="000000"/>
+                </a:solidFill>
+                <a:latin typeface="Times New Roman" charset="0"/>
+                <a:ea typeface="ヒラギノ明朝 ProN W3" charset="-128"/>
+                <a:sym typeface="Times New Roman" charset="0"/>
+              </a:defRPr>
+            </a:lvl8pPr>
+            <a:lvl9pPr marL="3886200" indent="-228600" eaLnBrk="0" fontAlgn="base" hangingPunct="0">
+              <a:spcBef>
+                <a:spcPct val="0"/>
+              </a:spcBef>
+              <a:spcAft>
+                <a:spcPct val="0"/>
+              </a:spcAft>
+              <a:defRPr sz="2400">
+                <a:solidFill>
+                  <a:srgbClr val="000000"/>
+                </a:solidFill>
+                <a:latin typeface="Times New Roman" charset="0"/>
+                <a:ea typeface="ヒラギノ明朝 ProN W3" charset="-128"/>
+                <a:sym typeface="Times New Roman" charset="0"/>
+              </a:defRPr>
+            </a:lvl9pPr>
+          </a:lstStyle>
+          <a:p>
+            <a:fld id="{9EE1BB6F-A407-EE47-9A85-F4E09E4700A5}" type="slidenum">
+              <a:rPr lang="en-US" altLang="en-US" sz="1200"/>
+              <a:pPr/>
+              <a:t>42</a:t>
             </a:fld>
             <a:endParaRPr lang="en-US" altLang="en-US" sz="1200"/>
           </a:p>
@@ -6433,7 +6571,7 @@
 </p:notes>
 </file>
 
-<file path=ppt/notesSlides/notesSlide36.xml><?xml version="1.0" encoding="utf-8"?>
+<file path=ppt/notesSlides/notesSlide37.xml><?xml version="1.0" encoding="utf-8"?>
 <p:notes xmlns:a="http://schemas.openxmlformats.org/drawingml/2006/main" xmlns:r="http://schemas.openxmlformats.org/officeDocument/2006/relationships" xmlns:p="http://schemas.openxmlformats.org/presentationml/2006/main">
   <p:cSld>
     <p:spTree>
@@ -11364,6 +11502,1123 @@
           <a:chExt cx="0" cy="0"/>
         </a:xfrm>
       </p:grpSpPr>
+      <p:sp>
+        <p:nvSpPr>
+          <p:cNvPr id="43010" name="Footer Placeholder 3"/>
+          <p:cNvSpPr>
+            <a:spLocks noGrp="1"/>
+          </p:cNvSpPr>
+          <p:nvPr>
+            <p:ph type="ftr" sz="quarter" idx="12"/>
+          </p:nvPr>
+        </p:nvSpPr>
+        <p:spPr>
+          <a:xfrm>
+            <a:off x="6248400" y="6324600"/>
+            <a:ext cx="2895600" cy="457200"/>
+          </a:xfrm>
+          <a:noFill/>
+        </p:spPr>
+        <p:txBody>
+          <a:bodyPr/>
+          <a:lstStyle>
+            <a:lvl1pPr>
+              <a:defRPr sz="2400">
+                <a:solidFill>
+                  <a:schemeClr val="tx1"/>
+                </a:solidFill>
+                <a:latin typeface="Tahoma" pitchFamily="34" charset="0"/>
+              </a:defRPr>
+            </a:lvl1pPr>
+            <a:lvl2pPr marL="742950" indent="-285750">
+              <a:defRPr sz="2400">
+                <a:solidFill>
+                  <a:schemeClr val="tx1"/>
+                </a:solidFill>
+                <a:latin typeface="Tahoma" pitchFamily="34" charset="0"/>
+              </a:defRPr>
+            </a:lvl2pPr>
+            <a:lvl3pPr marL="1143000" indent="-228600">
+              <a:defRPr sz="2400">
+                <a:solidFill>
+                  <a:schemeClr val="tx1"/>
+                </a:solidFill>
+                <a:latin typeface="Tahoma" pitchFamily="34" charset="0"/>
+              </a:defRPr>
+            </a:lvl3pPr>
+            <a:lvl4pPr marL="1600200" indent="-228600">
+              <a:defRPr sz="2400">
+                <a:solidFill>
+                  <a:schemeClr val="tx1"/>
+                </a:solidFill>
+                <a:latin typeface="Tahoma" pitchFamily="34" charset="0"/>
+              </a:defRPr>
+            </a:lvl4pPr>
+            <a:lvl5pPr marL="2057400" indent="-228600">
+              <a:defRPr sz="2400">
+                <a:solidFill>
+                  <a:schemeClr val="tx1"/>
+                </a:solidFill>
+                <a:latin typeface="Tahoma" pitchFamily="34" charset="0"/>
+              </a:defRPr>
+            </a:lvl5pPr>
+            <a:lvl6pPr marL="2514600" indent="-228600" eaLnBrk="0" fontAlgn="base" hangingPunct="0">
+              <a:spcBef>
+                <a:spcPct val="0"/>
+              </a:spcBef>
+              <a:spcAft>
+                <a:spcPct val="0"/>
+              </a:spcAft>
+              <a:defRPr sz="2400">
+                <a:solidFill>
+                  <a:schemeClr val="tx1"/>
+                </a:solidFill>
+                <a:latin typeface="Tahoma" pitchFamily="34" charset="0"/>
+              </a:defRPr>
+            </a:lvl6pPr>
+            <a:lvl7pPr marL="2971800" indent="-228600" eaLnBrk="0" fontAlgn="base" hangingPunct="0">
+              <a:spcBef>
+                <a:spcPct val="0"/>
+              </a:spcBef>
+              <a:spcAft>
+                <a:spcPct val="0"/>
+              </a:spcAft>
+              <a:defRPr sz="2400">
+                <a:solidFill>
+                  <a:schemeClr val="tx1"/>
+                </a:solidFill>
+                <a:latin typeface="Tahoma" pitchFamily="34" charset="0"/>
+              </a:defRPr>
+            </a:lvl7pPr>
+            <a:lvl8pPr marL="3429000" indent="-228600" eaLnBrk="0" fontAlgn="base" hangingPunct="0">
+              <a:spcBef>
+                <a:spcPct val="0"/>
+              </a:spcBef>
+              <a:spcAft>
+                <a:spcPct val="0"/>
+              </a:spcAft>
+              <a:defRPr sz="2400">
+                <a:solidFill>
+                  <a:schemeClr val="tx1"/>
+                </a:solidFill>
+                <a:latin typeface="Tahoma" pitchFamily="34" charset="0"/>
+              </a:defRPr>
+            </a:lvl8pPr>
+            <a:lvl9pPr marL="3886200" indent="-228600" eaLnBrk="0" fontAlgn="base" hangingPunct="0">
+              <a:spcBef>
+                <a:spcPct val="0"/>
+              </a:spcBef>
+              <a:spcAft>
+                <a:spcPct val="0"/>
+              </a:spcAft>
+              <a:defRPr sz="2400">
+                <a:solidFill>
+                  <a:schemeClr val="tx1"/>
+                </a:solidFill>
+                <a:latin typeface="Tahoma" pitchFamily="34" charset="0"/>
+              </a:defRPr>
+            </a:lvl9pPr>
+          </a:lstStyle>
+          <a:p>
+            <a:pPr algn="r"/>
+            <a:endParaRPr lang="en-US" sz="800" b="1">
+              <a:latin typeface="Times New Roman" pitchFamily="18" charset="0"/>
+            </a:endParaRPr>
+          </a:p>
+          <a:p>
+            <a:pPr algn="r"/>
+            <a:endParaRPr lang="en-US" sz="800"/>
+          </a:p>
+          <a:p>
+            <a:pPr algn="r"/>
+            <a:endParaRPr lang="en-US" sz="800" b="1"/>
+          </a:p>
+          <a:p>
+            <a:pPr algn="r"/>
+            <a:r>
+              <a:rPr lang="en-US" sz="800" b="1"/>
+              <a:t>© A+ Computer Science  -  www.apluscompsci.com</a:t>
+            </a:r>
+          </a:p>
+        </p:txBody>
+      </p:sp>
+      <p:sp>
+        <p:nvSpPr>
+          <p:cNvPr id="43028" name="WordArt 19"/>
+          <p:cNvSpPr>
+            <a:spLocks noChangeArrowheads="1" noChangeShapeType="1" noTextEdit="1"/>
+          </p:cNvSpPr>
+          <p:nvPr/>
+        </p:nvSpPr>
+        <p:spPr bwMode="auto">
+          <a:xfrm>
+            <a:off x="685800" y="1314157"/>
+            <a:ext cx="7848600" cy="724486"/>
+          </a:xfrm>
+          <a:prstGeom prst="rect">
+            <a:avLst/>
+          </a:prstGeom>
+        </p:spPr>
+        <p:txBody>
+          <a:bodyPr wrap="none" fromWordArt="1">
+            <a:prstTxWarp prst="textPlain">
+              <a:avLst>
+                <a:gd name="adj" fmla="val 50000"/>
+              </a:avLst>
+            </a:prstTxWarp>
+          </a:bodyPr>
+          <a:lstStyle/>
+          <a:p>
+            <a:pPr algn="ctr"/>
+            <a:r>
+              <a:rPr lang="en-US" sz="3600" kern="10" dirty="0">
+                <a:ln w="9525">
+                  <a:solidFill>
+                    <a:srgbClr val="FFFF99"/>
+                  </a:solidFill>
+                  <a:round/>
+                  <a:headEnd type="none" w="sm" len="sm"/>
+                  <a:tailEnd type="none" w="sm" len="sm"/>
+                </a:ln>
+                <a:solidFill>
+                  <a:srgbClr val="0000FF"/>
+                </a:solidFill>
+                <a:effectLst>
+                  <a:outerShdw dist="35921" dir="2700000" algn="ctr" rotWithShape="0">
+                    <a:srgbClr val="C0C0C0"/>
+                  </a:outerShdw>
+                </a:effectLst>
+                <a:latin typeface="Impact"/>
+              </a:rPr>
+              <a:t>Tree Attributes</a:t>
+            </a:r>
+          </a:p>
+        </p:txBody>
+      </p:sp>
+      <p:grpSp>
+        <p:nvGrpSpPr>
+          <p:cNvPr id="2" name="Group 1" descr="A binary tree with four levels and ten nodes:&#10;&#10;Row 0: 90&#10;Row 1:&#10; 90 has two children: 50 as a left child and 120 as a right child&#10;Row 2:&#10; 50 has two children: 40 as a left child and 65 as a right child&#10; 120 has two children: 100 as a left child and 150 as a right child&#10;Row 3:&#10;   40 has two children: 30 as a left child and 45 as a right child&#10;    65 only has a right child, 70&#10;">
+            <a:extLst>
+              <a:ext uri="{FF2B5EF4-FFF2-40B4-BE49-F238E27FC236}">
+                <a16:creationId xmlns:a16="http://schemas.microsoft.com/office/drawing/2014/main" id="{1267F955-D1C6-DFD7-57AC-683EDE7C5161}"/>
+              </a:ext>
+            </a:extLst>
+          </p:cNvPr>
+          <p:cNvGrpSpPr/>
+          <p:nvPr/>
+        </p:nvGrpSpPr>
+        <p:grpSpPr>
+          <a:xfrm>
+            <a:off x="1045369" y="2971800"/>
+            <a:ext cx="7129463" cy="2057400"/>
+            <a:chOff x="838200" y="1066800"/>
+            <a:chExt cx="7129463" cy="2057400"/>
+          </a:xfrm>
+        </p:grpSpPr>
+        <p:sp>
+          <p:nvSpPr>
+            <p:cNvPr id="43012" name="Oval 3"/>
+            <p:cNvSpPr>
+              <a:spLocks noChangeArrowheads="1"/>
+            </p:cNvSpPr>
+            <p:nvPr/>
+          </p:nvSpPr>
+          <p:spPr bwMode="auto">
+            <a:xfrm>
+              <a:off x="3505200" y="2667000"/>
+              <a:ext cx="804863" cy="457200"/>
+            </a:xfrm>
+            <a:prstGeom prst="ellipse">
+              <a:avLst/>
+            </a:prstGeom>
+            <a:solidFill>
+              <a:srgbClr val="CCFFCC"/>
+            </a:solidFill>
+            <a:ln w="12700">
+              <a:solidFill>
+                <a:schemeClr val="tx1"/>
+              </a:solidFill>
+              <a:round/>
+              <a:headEnd type="none" w="sm" len="sm"/>
+              <a:tailEnd type="none" w="sm" len="sm"/>
+            </a:ln>
+            <a:effectLst/>
+            <a:extLst>
+              <a:ext uri="{AF507438-7753-43E0-B8FC-AC1667EBCBE1}">
+                <a14:hiddenEffects xmlns:a14="http://schemas.microsoft.com/office/drawing/2010/main">
+                  <a:effectLst>
+                    <a:outerShdw dist="35921" dir="2700000" algn="ctr" rotWithShape="0">
+                      <a:schemeClr val="bg2"/>
+                    </a:outerShdw>
+                  </a:effectLst>
+                </a14:hiddenEffects>
+              </a:ext>
+            </a:extLst>
+          </p:spPr>
+          <p:txBody>
+            <a:bodyPr wrap="none" anchor="ctr"/>
+            <a:lstStyle/>
+            <a:p>
+              <a:pPr algn="ctr"/>
+              <a:r>
+                <a:rPr lang="en-US"/>
+                <a:t>70</a:t>
+              </a:r>
+            </a:p>
+          </p:txBody>
+        </p:sp>
+        <p:sp>
+          <p:nvSpPr>
+            <p:cNvPr id="43013" name="Oval 4"/>
+            <p:cNvSpPr>
+              <a:spLocks noChangeArrowheads="1"/>
+            </p:cNvSpPr>
+            <p:nvPr/>
+          </p:nvSpPr>
+          <p:spPr bwMode="auto">
+            <a:xfrm>
+              <a:off x="2133600" y="1600200"/>
+              <a:ext cx="804863" cy="457200"/>
+            </a:xfrm>
+            <a:prstGeom prst="ellipse">
+              <a:avLst/>
+            </a:prstGeom>
+            <a:solidFill>
+              <a:srgbClr val="CCFFCC"/>
+            </a:solidFill>
+            <a:ln w="12700">
+              <a:solidFill>
+                <a:schemeClr val="tx1"/>
+              </a:solidFill>
+              <a:round/>
+              <a:headEnd type="none" w="sm" len="sm"/>
+              <a:tailEnd type="none" w="sm" len="sm"/>
+            </a:ln>
+            <a:effectLst/>
+            <a:extLst>
+              <a:ext uri="{AF507438-7753-43E0-B8FC-AC1667EBCBE1}">
+                <a14:hiddenEffects xmlns:a14="http://schemas.microsoft.com/office/drawing/2010/main">
+                  <a:effectLst>
+                    <a:outerShdw dist="35921" dir="2700000" algn="ctr" rotWithShape="0">
+                      <a:schemeClr val="bg2"/>
+                    </a:outerShdw>
+                  </a:effectLst>
+                </a14:hiddenEffects>
+              </a:ext>
+            </a:extLst>
+          </p:spPr>
+          <p:txBody>
+            <a:bodyPr wrap="none" anchor="ctr"/>
+            <a:lstStyle/>
+            <a:p>
+              <a:pPr algn="ctr"/>
+              <a:r>
+                <a:rPr lang="en-US"/>
+                <a:t>50</a:t>
+              </a:r>
+            </a:p>
+          </p:txBody>
+        </p:sp>
+        <p:sp>
+          <p:nvSpPr>
+            <p:cNvPr id="43014" name="Oval 5"/>
+            <p:cNvSpPr>
+              <a:spLocks noChangeArrowheads="1"/>
+            </p:cNvSpPr>
+            <p:nvPr/>
+          </p:nvSpPr>
+          <p:spPr bwMode="auto">
+            <a:xfrm>
+              <a:off x="1295400" y="2133600"/>
+              <a:ext cx="804863" cy="457200"/>
+            </a:xfrm>
+            <a:prstGeom prst="ellipse">
+              <a:avLst/>
+            </a:prstGeom>
+            <a:solidFill>
+              <a:srgbClr val="CCFFCC"/>
+            </a:solidFill>
+            <a:ln w="12700">
+              <a:solidFill>
+                <a:schemeClr val="tx1"/>
+              </a:solidFill>
+              <a:round/>
+              <a:headEnd type="none" w="sm" len="sm"/>
+              <a:tailEnd type="none" w="sm" len="sm"/>
+            </a:ln>
+            <a:effectLst/>
+            <a:extLst>
+              <a:ext uri="{AF507438-7753-43E0-B8FC-AC1667EBCBE1}">
+                <a14:hiddenEffects xmlns:a14="http://schemas.microsoft.com/office/drawing/2010/main">
+                  <a:effectLst>
+                    <a:outerShdw dist="35921" dir="2700000" algn="ctr" rotWithShape="0">
+                      <a:schemeClr val="bg2"/>
+                    </a:outerShdw>
+                  </a:effectLst>
+                </a14:hiddenEffects>
+              </a:ext>
+            </a:extLst>
+          </p:spPr>
+          <p:txBody>
+            <a:bodyPr wrap="none" anchor="ctr"/>
+            <a:lstStyle/>
+            <a:p>
+              <a:pPr algn="ctr"/>
+              <a:r>
+                <a:rPr lang="en-US"/>
+                <a:t>40</a:t>
+              </a:r>
+            </a:p>
+          </p:txBody>
+        </p:sp>
+        <p:sp>
+          <p:nvSpPr>
+            <p:cNvPr id="43015" name="Oval 6"/>
+            <p:cNvSpPr>
+              <a:spLocks noChangeArrowheads="1"/>
+            </p:cNvSpPr>
+            <p:nvPr/>
+          </p:nvSpPr>
+          <p:spPr bwMode="auto">
+            <a:xfrm>
+              <a:off x="2971800" y="2133600"/>
+              <a:ext cx="804863" cy="457200"/>
+            </a:xfrm>
+            <a:prstGeom prst="ellipse">
+              <a:avLst/>
+            </a:prstGeom>
+            <a:solidFill>
+              <a:srgbClr val="CCFFCC"/>
+            </a:solidFill>
+            <a:ln w="12700">
+              <a:solidFill>
+                <a:schemeClr val="tx1"/>
+              </a:solidFill>
+              <a:round/>
+              <a:headEnd type="none" w="sm" len="sm"/>
+              <a:tailEnd type="none" w="sm" len="sm"/>
+            </a:ln>
+            <a:effectLst/>
+            <a:extLst>
+              <a:ext uri="{AF507438-7753-43E0-B8FC-AC1667EBCBE1}">
+                <a14:hiddenEffects xmlns:a14="http://schemas.microsoft.com/office/drawing/2010/main">
+                  <a:effectLst>
+                    <a:outerShdw dist="35921" dir="2700000" algn="ctr" rotWithShape="0">
+                      <a:schemeClr val="bg2"/>
+                    </a:outerShdw>
+                  </a:effectLst>
+                </a14:hiddenEffects>
+              </a:ext>
+            </a:extLst>
+          </p:spPr>
+          <p:txBody>
+            <a:bodyPr wrap="none" anchor="ctr"/>
+            <a:lstStyle/>
+            <a:p>
+              <a:pPr algn="ctr"/>
+              <a:r>
+                <a:rPr lang="en-US" dirty="0"/>
+                <a:t>65</a:t>
+              </a:r>
+            </a:p>
+          </p:txBody>
+        </p:sp>
+        <p:sp>
+          <p:nvSpPr>
+            <p:cNvPr id="43016" name="Oval 7"/>
+            <p:cNvSpPr>
+              <a:spLocks noChangeArrowheads="1"/>
+            </p:cNvSpPr>
+            <p:nvPr/>
+          </p:nvSpPr>
+          <p:spPr bwMode="auto">
+            <a:xfrm>
+              <a:off x="6324600" y="1600200"/>
+              <a:ext cx="804863" cy="457200"/>
+            </a:xfrm>
+            <a:prstGeom prst="ellipse">
+              <a:avLst/>
+            </a:prstGeom>
+            <a:solidFill>
+              <a:srgbClr val="CCFFCC"/>
+            </a:solidFill>
+            <a:ln w="12700">
+              <a:solidFill>
+                <a:schemeClr val="tx1"/>
+              </a:solidFill>
+              <a:round/>
+              <a:headEnd type="none" w="sm" len="sm"/>
+              <a:tailEnd type="none" w="sm" len="sm"/>
+            </a:ln>
+            <a:effectLst/>
+            <a:extLst>
+              <a:ext uri="{AF507438-7753-43E0-B8FC-AC1667EBCBE1}">
+                <a14:hiddenEffects xmlns:a14="http://schemas.microsoft.com/office/drawing/2010/main">
+                  <a:effectLst>
+                    <a:outerShdw dist="35921" dir="2700000" algn="ctr" rotWithShape="0">
+                      <a:schemeClr val="bg2"/>
+                    </a:outerShdw>
+                  </a:effectLst>
+                </a14:hiddenEffects>
+              </a:ext>
+            </a:extLst>
+          </p:spPr>
+          <p:txBody>
+            <a:bodyPr wrap="none" anchor="ctr"/>
+            <a:lstStyle/>
+            <a:p>
+              <a:pPr algn="ctr"/>
+              <a:r>
+                <a:rPr lang="en-US"/>
+                <a:t>120</a:t>
+              </a:r>
+            </a:p>
+          </p:txBody>
+        </p:sp>
+        <p:sp>
+          <p:nvSpPr>
+            <p:cNvPr id="43017" name="Oval 8"/>
+            <p:cNvSpPr>
+              <a:spLocks noChangeArrowheads="1"/>
+            </p:cNvSpPr>
+            <p:nvPr/>
+          </p:nvSpPr>
+          <p:spPr bwMode="auto">
+            <a:xfrm>
+              <a:off x="5486400" y="2133600"/>
+              <a:ext cx="804863" cy="457200"/>
+            </a:xfrm>
+            <a:prstGeom prst="ellipse">
+              <a:avLst/>
+            </a:prstGeom>
+            <a:solidFill>
+              <a:srgbClr val="CCFFCC"/>
+            </a:solidFill>
+            <a:ln w="12700">
+              <a:solidFill>
+                <a:schemeClr val="tx1"/>
+              </a:solidFill>
+              <a:round/>
+              <a:headEnd type="none" w="sm" len="sm"/>
+              <a:tailEnd type="none" w="sm" len="sm"/>
+            </a:ln>
+            <a:effectLst/>
+            <a:extLst>
+              <a:ext uri="{AF507438-7753-43E0-B8FC-AC1667EBCBE1}">
+                <a14:hiddenEffects xmlns:a14="http://schemas.microsoft.com/office/drawing/2010/main">
+                  <a:effectLst>
+                    <a:outerShdw dist="35921" dir="2700000" algn="ctr" rotWithShape="0">
+                      <a:schemeClr val="bg2"/>
+                    </a:outerShdw>
+                  </a:effectLst>
+                </a14:hiddenEffects>
+              </a:ext>
+            </a:extLst>
+          </p:spPr>
+          <p:txBody>
+            <a:bodyPr wrap="none" anchor="ctr"/>
+            <a:lstStyle/>
+            <a:p>
+              <a:pPr algn="ctr"/>
+              <a:r>
+                <a:rPr lang="en-US"/>
+                <a:t>100</a:t>
+              </a:r>
+            </a:p>
+          </p:txBody>
+        </p:sp>
+        <p:sp>
+          <p:nvSpPr>
+            <p:cNvPr id="43018" name="Oval 9"/>
+            <p:cNvSpPr>
+              <a:spLocks noChangeArrowheads="1"/>
+            </p:cNvSpPr>
+            <p:nvPr/>
+          </p:nvSpPr>
+          <p:spPr bwMode="auto">
+            <a:xfrm>
+              <a:off x="7162800" y="2133600"/>
+              <a:ext cx="804863" cy="457200"/>
+            </a:xfrm>
+            <a:prstGeom prst="ellipse">
+              <a:avLst/>
+            </a:prstGeom>
+            <a:solidFill>
+              <a:srgbClr val="CCFFCC"/>
+            </a:solidFill>
+            <a:ln w="12700">
+              <a:solidFill>
+                <a:schemeClr val="tx1"/>
+              </a:solidFill>
+              <a:round/>
+              <a:headEnd type="none" w="sm" len="sm"/>
+              <a:tailEnd type="none" w="sm" len="sm"/>
+            </a:ln>
+            <a:effectLst/>
+            <a:extLst>
+              <a:ext uri="{AF507438-7753-43E0-B8FC-AC1667EBCBE1}">
+                <a14:hiddenEffects xmlns:a14="http://schemas.microsoft.com/office/drawing/2010/main">
+                  <a:effectLst>
+                    <a:outerShdw dist="35921" dir="2700000" algn="ctr" rotWithShape="0">
+                      <a:schemeClr val="bg2"/>
+                    </a:outerShdw>
+                  </a:effectLst>
+                </a14:hiddenEffects>
+              </a:ext>
+            </a:extLst>
+          </p:spPr>
+          <p:txBody>
+            <a:bodyPr wrap="none" anchor="ctr"/>
+            <a:lstStyle/>
+            <a:p>
+              <a:pPr algn="ctr"/>
+              <a:r>
+                <a:rPr lang="en-US"/>
+                <a:t>150</a:t>
+              </a:r>
+            </a:p>
+          </p:txBody>
+        </p:sp>
+        <p:sp>
+          <p:nvSpPr>
+            <p:cNvPr id="43019" name="Oval 10"/>
+            <p:cNvSpPr>
+              <a:spLocks noChangeArrowheads="1"/>
+            </p:cNvSpPr>
+            <p:nvPr/>
+          </p:nvSpPr>
+          <p:spPr bwMode="auto">
+            <a:xfrm>
+              <a:off x="838200" y="2667000"/>
+              <a:ext cx="804863" cy="457200"/>
+            </a:xfrm>
+            <a:prstGeom prst="ellipse">
+              <a:avLst/>
+            </a:prstGeom>
+            <a:solidFill>
+              <a:srgbClr val="CCFFCC"/>
+            </a:solidFill>
+            <a:ln w="12700">
+              <a:solidFill>
+                <a:schemeClr val="tx1"/>
+              </a:solidFill>
+              <a:round/>
+              <a:headEnd type="none" w="sm" len="sm"/>
+              <a:tailEnd type="none" w="sm" len="sm"/>
+            </a:ln>
+            <a:effectLst/>
+            <a:extLst>
+              <a:ext uri="{AF507438-7753-43E0-B8FC-AC1667EBCBE1}">
+                <a14:hiddenEffects xmlns:a14="http://schemas.microsoft.com/office/drawing/2010/main">
+                  <a:effectLst>
+                    <a:outerShdw dist="35921" dir="2700000" algn="ctr" rotWithShape="0">
+                      <a:schemeClr val="bg2"/>
+                    </a:outerShdw>
+                  </a:effectLst>
+                </a14:hiddenEffects>
+              </a:ext>
+            </a:extLst>
+          </p:spPr>
+          <p:txBody>
+            <a:bodyPr wrap="none" anchor="ctr"/>
+            <a:lstStyle/>
+            <a:p>
+              <a:pPr algn="ctr"/>
+              <a:r>
+                <a:rPr lang="en-US"/>
+                <a:t>30</a:t>
+              </a:r>
+            </a:p>
+          </p:txBody>
+        </p:sp>
+        <p:sp>
+          <p:nvSpPr>
+            <p:cNvPr id="43020" name="Oval 11"/>
+            <p:cNvSpPr>
+              <a:spLocks noChangeArrowheads="1"/>
+            </p:cNvSpPr>
+            <p:nvPr/>
+          </p:nvSpPr>
+          <p:spPr bwMode="auto">
+            <a:xfrm>
+              <a:off x="1828800" y="2667000"/>
+              <a:ext cx="804863" cy="457200"/>
+            </a:xfrm>
+            <a:prstGeom prst="ellipse">
+              <a:avLst/>
+            </a:prstGeom>
+            <a:solidFill>
+              <a:srgbClr val="CCFFCC"/>
+            </a:solidFill>
+            <a:ln w="12700">
+              <a:solidFill>
+                <a:schemeClr val="tx1"/>
+              </a:solidFill>
+              <a:round/>
+              <a:headEnd type="none" w="sm" len="sm"/>
+              <a:tailEnd type="none" w="sm" len="sm"/>
+            </a:ln>
+            <a:effectLst/>
+            <a:extLst>
+              <a:ext uri="{AF507438-7753-43E0-B8FC-AC1667EBCBE1}">
+                <a14:hiddenEffects xmlns:a14="http://schemas.microsoft.com/office/drawing/2010/main">
+                  <a:effectLst>
+                    <a:outerShdw dist="35921" dir="2700000" algn="ctr" rotWithShape="0">
+                      <a:schemeClr val="bg2"/>
+                    </a:outerShdw>
+                  </a:effectLst>
+                </a14:hiddenEffects>
+              </a:ext>
+            </a:extLst>
+          </p:spPr>
+          <p:txBody>
+            <a:bodyPr wrap="none" anchor="ctr"/>
+            <a:lstStyle/>
+            <a:p>
+              <a:pPr algn="ctr"/>
+              <a:r>
+                <a:rPr lang="en-US"/>
+                <a:t>45</a:t>
+              </a:r>
+            </a:p>
+          </p:txBody>
+        </p:sp>
+        <p:sp>
+          <p:nvSpPr>
+            <p:cNvPr id="43021" name="Oval 12"/>
+            <p:cNvSpPr>
+              <a:spLocks noChangeArrowheads="1"/>
+            </p:cNvSpPr>
+            <p:nvPr/>
+          </p:nvSpPr>
+          <p:spPr bwMode="auto">
+            <a:xfrm>
+              <a:off x="4267200" y="1066800"/>
+              <a:ext cx="804863" cy="457200"/>
+            </a:xfrm>
+            <a:prstGeom prst="ellipse">
+              <a:avLst/>
+            </a:prstGeom>
+            <a:solidFill>
+              <a:srgbClr val="CCFFCC"/>
+            </a:solidFill>
+            <a:ln w="12700">
+              <a:solidFill>
+                <a:schemeClr val="tx1"/>
+              </a:solidFill>
+              <a:round/>
+              <a:headEnd type="none" w="sm" len="sm"/>
+              <a:tailEnd type="none" w="sm" len="sm"/>
+            </a:ln>
+            <a:effectLst/>
+            <a:extLst>
+              <a:ext uri="{AF507438-7753-43E0-B8FC-AC1667EBCBE1}">
+                <a14:hiddenEffects xmlns:a14="http://schemas.microsoft.com/office/drawing/2010/main">
+                  <a:effectLst>
+                    <a:outerShdw dist="35921" dir="2700000" algn="ctr" rotWithShape="0">
+                      <a:schemeClr val="bg2"/>
+                    </a:outerShdw>
+                  </a:effectLst>
+                </a14:hiddenEffects>
+              </a:ext>
+            </a:extLst>
+          </p:spPr>
+          <p:txBody>
+            <a:bodyPr wrap="none" anchor="ctr"/>
+            <a:lstStyle/>
+            <a:p>
+              <a:pPr algn="ctr"/>
+              <a:r>
+                <a:rPr lang="en-US"/>
+                <a:t>90</a:t>
+              </a:r>
+            </a:p>
+          </p:txBody>
+        </p:sp>
+        <p:sp>
+          <p:nvSpPr>
+            <p:cNvPr id="43022" name="Line 13"/>
+            <p:cNvSpPr>
+              <a:spLocks noChangeShapeType="1"/>
+            </p:cNvSpPr>
+            <p:nvPr/>
+          </p:nvSpPr>
+          <p:spPr bwMode="auto">
+            <a:xfrm flipH="1">
+              <a:off x="2895600" y="1371600"/>
+              <a:ext cx="1371600" cy="304800"/>
+            </a:xfrm>
+            <a:prstGeom prst="line">
+              <a:avLst/>
+            </a:prstGeom>
+            <a:noFill/>
+            <a:ln w="25400">
+              <a:solidFill>
+                <a:srgbClr val="FF0000"/>
+              </a:solidFill>
+              <a:round/>
+              <a:headEnd type="none" w="sm" len="sm"/>
+              <a:tailEnd type="triangle" w="sm" len="sm"/>
+            </a:ln>
+            <a:effectLst/>
+            <a:extLst>
+              <a:ext uri="{909E8E84-426E-40DD-AFC4-6F175D3DCCD1}">
+                <a14:hiddenFill xmlns:a14="http://schemas.microsoft.com/office/drawing/2010/main">
+                  <a:noFill/>
+                </a14:hiddenFill>
+              </a:ext>
+              <a:ext uri="{AF507438-7753-43E0-B8FC-AC1667EBCBE1}">
+                <a14:hiddenEffects xmlns:a14="http://schemas.microsoft.com/office/drawing/2010/main">
+                  <a:effectLst>
+                    <a:outerShdw dist="35921" dir="2700000" algn="ctr" rotWithShape="0">
+                      <a:schemeClr val="bg2"/>
+                    </a:outerShdw>
+                  </a:effectLst>
+                </a14:hiddenEffects>
+              </a:ext>
+            </a:extLst>
+          </p:spPr>
+          <p:txBody>
+            <a:bodyPr/>
+            <a:lstStyle/>
+            <a:p>
+              <a:endParaRPr lang="en-US"/>
+            </a:p>
+          </p:txBody>
+        </p:sp>
+        <p:sp>
+          <p:nvSpPr>
+            <p:cNvPr id="43023" name="Line 14"/>
+            <p:cNvSpPr>
+              <a:spLocks noChangeShapeType="1"/>
+            </p:cNvSpPr>
+            <p:nvPr/>
+          </p:nvSpPr>
+          <p:spPr bwMode="auto">
+            <a:xfrm>
+              <a:off x="5105400" y="1371600"/>
+              <a:ext cx="1219200" cy="304800"/>
+            </a:xfrm>
+            <a:prstGeom prst="line">
+              <a:avLst/>
+            </a:prstGeom>
+            <a:noFill/>
+            <a:ln w="25400">
+              <a:solidFill>
+                <a:srgbClr val="FF0000"/>
+              </a:solidFill>
+              <a:round/>
+              <a:headEnd type="none" w="sm" len="sm"/>
+              <a:tailEnd type="triangle" w="sm" len="sm"/>
+            </a:ln>
+            <a:effectLst/>
+            <a:extLst>
+              <a:ext uri="{909E8E84-426E-40DD-AFC4-6F175D3DCCD1}">
+                <a14:hiddenFill xmlns:a14="http://schemas.microsoft.com/office/drawing/2010/main">
+                  <a:noFill/>
+                </a14:hiddenFill>
+              </a:ext>
+              <a:ext uri="{AF507438-7753-43E0-B8FC-AC1667EBCBE1}">
+                <a14:hiddenEffects xmlns:a14="http://schemas.microsoft.com/office/drawing/2010/main">
+                  <a:effectLst>
+                    <a:outerShdw dist="35921" dir="2700000" algn="ctr" rotWithShape="0">
+                      <a:schemeClr val="bg2"/>
+                    </a:outerShdw>
+                  </a:effectLst>
+                </a14:hiddenEffects>
+              </a:ext>
+            </a:extLst>
+          </p:spPr>
+          <p:txBody>
+            <a:bodyPr/>
+            <a:lstStyle/>
+            <a:p>
+              <a:endParaRPr lang="en-US"/>
+            </a:p>
+          </p:txBody>
+        </p:sp>
+        <p:sp>
+          <p:nvSpPr>
+            <p:cNvPr id="43024" name="Line 15"/>
+            <p:cNvSpPr>
+              <a:spLocks noChangeShapeType="1"/>
+            </p:cNvSpPr>
+            <p:nvPr/>
+          </p:nvSpPr>
+          <p:spPr bwMode="auto">
+            <a:xfrm flipH="1">
+              <a:off x="1981200" y="1981200"/>
+              <a:ext cx="228600" cy="152400"/>
+            </a:xfrm>
+            <a:prstGeom prst="line">
+              <a:avLst/>
+            </a:prstGeom>
+            <a:noFill/>
+            <a:ln w="25400">
+              <a:solidFill>
+                <a:srgbClr val="FF0000"/>
+              </a:solidFill>
+              <a:round/>
+              <a:headEnd type="none" w="sm" len="sm"/>
+              <a:tailEnd type="triangle" w="sm" len="sm"/>
+            </a:ln>
+            <a:effectLst/>
+            <a:extLst>
+              <a:ext uri="{909E8E84-426E-40DD-AFC4-6F175D3DCCD1}">
+                <a14:hiddenFill xmlns:a14="http://schemas.microsoft.com/office/drawing/2010/main">
+                  <a:noFill/>
+                </a14:hiddenFill>
+              </a:ext>
+              <a:ext uri="{AF507438-7753-43E0-B8FC-AC1667EBCBE1}">
+                <a14:hiddenEffects xmlns:a14="http://schemas.microsoft.com/office/drawing/2010/main">
+                  <a:effectLst>
+                    <a:outerShdw dist="35921" dir="2700000" algn="ctr" rotWithShape="0">
+                      <a:schemeClr val="bg2"/>
+                    </a:outerShdw>
+                  </a:effectLst>
+                </a14:hiddenEffects>
+              </a:ext>
+            </a:extLst>
+          </p:spPr>
+          <p:txBody>
+            <a:bodyPr/>
+            <a:lstStyle/>
+            <a:p>
+              <a:endParaRPr lang="en-US"/>
+            </a:p>
+          </p:txBody>
+        </p:sp>
+        <p:sp>
+          <p:nvSpPr>
+            <p:cNvPr id="43025" name="Line 16"/>
+            <p:cNvSpPr>
+              <a:spLocks noChangeShapeType="1"/>
+            </p:cNvSpPr>
+            <p:nvPr/>
+          </p:nvSpPr>
+          <p:spPr bwMode="auto">
+            <a:xfrm flipH="1">
+              <a:off x="6172200" y="1981200"/>
+              <a:ext cx="228600" cy="152400"/>
+            </a:xfrm>
+            <a:prstGeom prst="line">
+              <a:avLst/>
+            </a:prstGeom>
+            <a:noFill/>
+            <a:ln w="25400">
+              <a:solidFill>
+                <a:srgbClr val="FF0000"/>
+              </a:solidFill>
+              <a:round/>
+              <a:headEnd type="none" w="sm" len="sm"/>
+              <a:tailEnd type="triangle" w="sm" len="sm"/>
+            </a:ln>
+            <a:effectLst/>
+            <a:extLst>
+              <a:ext uri="{909E8E84-426E-40DD-AFC4-6F175D3DCCD1}">
+                <a14:hiddenFill xmlns:a14="http://schemas.microsoft.com/office/drawing/2010/main">
+                  <a:noFill/>
+                </a14:hiddenFill>
+              </a:ext>
+              <a:ext uri="{AF507438-7753-43E0-B8FC-AC1667EBCBE1}">
+                <a14:hiddenEffects xmlns:a14="http://schemas.microsoft.com/office/drawing/2010/main">
+                  <a:effectLst>
+                    <a:outerShdw dist="35921" dir="2700000" algn="ctr" rotWithShape="0">
+                      <a:schemeClr val="bg2"/>
+                    </a:outerShdw>
+                  </a:effectLst>
+                </a14:hiddenEffects>
+              </a:ext>
+            </a:extLst>
+          </p:spPr>
+          <p:txBody>
+            <a:bodyPr/>
+            <a:lstStyle/>
+            <a:p>
+              <a:endParaRPr lang="en-US"/>
+            </a:p>
+          </p:txBody>
+        </p:sp>
+        <p:sp>
+          <p:nvSpPr>
+            <p:cNvPr id="43026" name="Line 17"/>
+            <p:cNvSpPr>
+              <a:spLocks noChangeShapeType="1"/>
+            </p:cNvSpPr>
+            <p:nvPr/>
+          </p:nvSpPr>
+          <p:spPr bwMode="auto">
+            <a:xfrm>
+              <a:off x="2819400" y="1981200"/>
+              <a:ext cx="304800" cy="152400"/>
+            </a:xfrm>
+            <a:prstGeom prst="line">
+              <a:avLst/>
+            </a:prstGeom>
+            <a:noFill/>
+            <a:ln w="25400">
+              <a:solidFill>
+                <a:srgbClr val="FF0000"/>
+              </a:solidFill>
+              <a:round/>
+              <a:headEnd type="none" w="sm" len="sm"/>
+              <a:tailEnd type="triangle" w="sm" len="sm"/>
+            </a:ln>
+            <a:effectLst/>
+            <a:extLst>
+              <a:ext uri="{909E8E84-426E-40DD-AFC4-6F175D3DCCD1}">
+                <a14:hiddenFill xmlns:a14="http://schemas.microsoft.com/office/drawing/2010/main">
+                  <a:noFill/>
+                </a14:hiddenFill>
+              </a:ext>
+              <a:ext uri="{AF507438-7753-43E0-B8FC-AC1667EBCBE1}">
+                <a14:hiddenEffects xmlns:a14="http://schemas.microsoft.com/office/drawing/2010/main">
+                  <a:effectLst>
+                    <a:outerShdw dist="35921" dir="2700000" algn="ctr" rotWithShape="0">
+                      <a:schemeClr val="bg2"/>
+                    </a:outerShdw>
+                  </a:effectLst>
+                </a14:hiddenEffects>
+              </a:ext>
+            </a:extLst>
+          </p:spPr>
+          <p:txBody>
+            <a:bodyPr/>
+            <a:lstStyle/>
+            <a:p>
+              <a:endParaRPr lang="en-US"/>
+            </a:p>
+          </p:txBody>
+        </p:sp>
+        <p:sp>
+          <p:nvSpPr>
+            <p:cNvPr id="43027" name="Line 18"/>
+            <p:cNvSpPr>
+              <a:spLocks noChangeShapeType="1"/>
+            </p:cNvSpPr>
+            <p:nvPr/>
+          </p:nvSpPr>
+          <p:spPr bwMode="auto">
+            <a:xfrm>
+              <a:off x="7086600" y="1981200"/>
+              <a:ext cx="304800" cy="152400"/>
+            </a:xfrm>
+            <a:prstGeom prst="line">
+              <a:avLst/>
+            </a:prstGeom>
+            <a:noFill/>
+            <a:ln w="25400">
+              <a:solidFill>
+                <a:srgbClr val="FF0000"/>
+              </a:solidFill>
+              <a:round/>
+              <a:headEnd type="none" w="sm" len="sm"/>
+              <a:tailEnd type="triangle" w="sm" len="sm"/>
+            </a:ln>
+            <a:effectLst/>
+            <a:extLst>
+              <a:ext uri="{909E8E84-426E-40DD-AFC4-6F175D3DCCD1}">
+                <a14:hiddenFill xmlns:a14="http://schemas.microsoft.com/office/drawing/2010/main">
+                  <a:noFill/>
+                </a14:hiddenFill>
+              </a:ext>
+              <a:ext uri="{AF507438-7753-43E0-B8FC-AC1667EBCBE1}">
+                <a14:hiddenEffects xmlns:a14="http://schemas.microsoft.com/office/drawing/2010/main">
+                  <a:effectLst>
+                    <a:outerShdw dist="35921" dir="2700000" algn="ctr" rotWithShape="0">
+                      <a:schemeClr val="bg2"/>
+                    </a:outerShdw>
+                  </a:effectLst>
+                </a14:hiddenEffects>
+              </a:ext>
+            </a:extLst>
+          </p:spPr>
+          <p:txBody>
+            <a:bodyPr/>
+            <a:lstStyle/>
+            <a:p>
+              <a:endParaRPr lang="en-US"/>
+            </a:p>
+          </p:txBody>
+        </p:sp>
+        <p:sp>
+          <p:nvSpPr>
+            <p:cNvPr id="43029" name="Oval 20"/>
+            <p:cNvSpPr>
+              <a:spLocks noChangeArrowheads="1"/>
+            </p:cNvSpPr>
+            <p:nvPr/>
+          </p:nvSpPr>
+          <p:spPr bwMode="auto">
+            <a:xfrm>
+              <a:off x="4800600" y="2667000"/>
+              <a:ext cx="804863" cy="457200"/>
+            </a:xfrm>
+            <a:prstGeom prst="ellipse">
+              <a:avLst/>
+            </a:prstGeom>
+            <a:solidFill>
+              <a:srgbClr val="CCFFCC"/>
+            </a:solidFill>
+            <a:ln w="12700">
+              <a:solidFill>
+                <a:schemeClr val="tx1"/>
+              </a:solidFill>
+              <a:round/>
+              <a:headEnd type="none" w="sm" len="sm"/>
+              <a:tailEnd type="none" w="sm" len="sm"/>
+            </a:ln>
+            <a:effectLst/>
+            <a:extLst>
+              <a:ext uri="{AF507438-7753-43E0-B8FC-AC1667EBCBE1}">
+                <a14:hiddenEffects xmlns:a14="http://schemas.microsoft.com/office/drawing/2010/main">
+                  <a:effectLst>
+                    <a:outerShdw dist="35921" dir="2700000" algn="ctr" rotWithShape="0">
+                      <a:schemeClr val="bg2"/>
+                    </a:outerShdw>
+                  </a:effectLst>
+                </a14:hiddenEffects>
+              </a:ext>
+            </a:extLst>
+          </p:spPr>
+          <p:txBody>
+            <a:bodyPr wrap="none" anchor="ctr"/>
+            <a:lstStyle/>
+            <a:p>
+              <a:pPr algn="ctr"/>
+              <a:r>
+                <a:rPr lang="en-US"/>
+                <a:t>95</a:t>
+              </a:r>
+            </a:p>
+          </p:txBody>
+        </p:sp>
+      </p:grpSp>
+    </p:spTree>
+  </p:cSld>
+  <p:clrMapOvr>
+    <a:masterClrMapping/>
+  </p:clrMapOvr>
+</p:sld>
+</file>
+
+<file path=ppt/slides/slide11.xml><?xml version="1.0" encoding="utf-8"?>
+<p:sld xmlns:a="http://schemas.openxmlformats.org/drawingml/2006/main" xmlns:r="http://schemas.openxmlformats.org/officeDocument/2006/relationships" xmlns:p="http://schemas.openxmlformats.org/presentationml/2006/main">
+  <p:cSld>
+    <p:spTree>
+      <p:nvGrpSpPr>
+        <p:cNvPr id="1" name=""/>
+        <p:cNvGrpSpPr/>
+        <p:nvPr/>
+      </p:nvGrpSpPr>
+      <p:grpSpPr>
+        <a:xfrm>
+          <a:off x="0" y="0"/>
+          <a:ext cx="0" cy="0"/>
+          <a:chOff x="0" y="0"/>
+          <a:chExt cx="0" cy="0"/>
+        </a:xfrm>
+      </p:grpSpPr>
       <p:pic>
         <p:nvPicPr>
           <p:cNvPr id="2" name="Picture 1" descr="Binary tree with nine nodes in four levels and the levels labeled 0 thru 3:&#10;&#10;- Level 0 contains the root node, which stores 8.&#10;- Level 1 (the 2nd level) has two child nodes connected to the 8 node: the 3 node on the left and 10 node on the right.&#10;- Level 2 (i.e. the 3rd level) has three nodes:&#10;  - The 3 node connects to the 1 node (left) and 6 node (right). The 1 node is a leaf.&#10;  - The 10 node only has a right child, the 14 node.&#10;- Level 3 (i.e. the fourth level) has three nodes:&#10;   - The 6 node has two children: the 4 node on the left and the 7 node on the right. Both are leaves.&#10;   - The 14 node only has a left child, the 13 node, which is a leaf.">
@@ -11741,7 +12996,11 @@
           <a:p>
             <a:pPr algn="ctr"/>
             <a:r>
-              <a:rPr lang="en-US" sz="2800" b="1" dirty="0"/>
+              <a:rPr lang="en-US" sz="2800" b="1" dirty="0">
+                <a:solidFill>
+                  <a:srgbClr val="3333CC"/>
+                </a:solidFill>
+              </a:rPr>
               <a:t>LEVEL = ROW = nodes with same height</a:t>
             </a:r>
           </a:p>
@@ -12025,7 +13284,7 @@
 </p:sld>
 </file>
 
-<file path=ppt/slides/slide11.xml><?xml version="1.0" encoding="utf-8"?>
+<file path=ppt/slides/slide12.xml><?xml version="1.0" encoding="utf-8"?>
 <p:sld xmlns:a="http://schemas.openxmlformats.org/drawingml/2006/main" xmlns:r="http://schemas.openxmlformats.org/officeDocument/2006/relationships" xmlns:p="http://schemas.openxmlformats.org/presentationml/2006/main">
   <p:cSld>
     <p:spTree>
@@ -14107,7 +15366,7 @@
 </p:sld>
 </file>
 
-<file path=ppt/slides/slide12.xml><?xml version="1.0" encoding="utf-8"?>
+<file path=ppt/slides/slide13.xml><?xml version="1.0" encoding="utf-8"?>
 <p:sld xmlns:a="http://schemas.openxmlformats.org/drawingml/2006/main" xmlns:r="http://schemas.openxmlformats.org/officeDocument/2006/relationships" xmlns:p="http://schemas.openxmlformats.org/presentationml/2006/main">
   <p:cSld>
     <p:spTree>
@@ -14347,7 +15606,7 @@
 </p:sld>
 </file>
 
-<file path=ppt/slides/slide13.xml><?xml version="1.0" encoding="utf-8"?>
+<file path=ppt/slides/slide14.xml><?xml version="1.0" encoding="utf-8"?>
 <p:sld xmlns:a="http://schemas.openxmlformats.org/drawingml/2006/main" xmlns:r="http://schemas.openxmlformats.org/officeDocument/2006/relationships" xmlns:p="http://schemas.openxmlformats.org/presentationml/2006/main">
   <p:cSld>
     <p:spTree>
@@ -15112,7 +16371,7 @@
 </p:sld>
 </file>
 
-<file path=ppt/slides/slide14.xml><?xml version="1.0" encoding="utf-8"?>
+<file path=ppt/slides/slide15.xml><?xml version="1.0" encoding="utf-8"?>
 <p:sld xmlns:a="http://schemas.openxmlformats.org/drawingml/2006/main" xmlns:r="http://schemas.openxmlformats.org/officeDocument/2006/relationships" xmlns:p="http://schemas.openxmlformats.org/presentationml/2006/main">
   <p:cSld>
     <p:spTree>
@@ -16031,7 +17290,7 @@
 </p:sld>
 </file>
 
-<file path=ppt/slides/slide15.xml><?xml version="1.0" encoding="utf-8"?>
+<file path=ppt/slides/slide16.xml><?xml version="1.0" encoding="utf-8"?>
 <p:sld xmlns:a="http://schemas.openxmlformats.org/drawingml/2006/main" xmlns:r="http://schemas.openxmlformats.org/officeDocument/2006/relationships" xmlns:p="http://schemas.openxmlformats.org/presentationml/2006/main">
   <p:cSld>
     <p:spTree>
@@ -17181,7 +18440,7 @@
 </p:sld>
 </file>
 
-<file path=ppt/slides/slide16.xml><?xml version="1.0" encoding="utf-8"?>
+<file path=ppt/slides/slide17.xml><?xml version="1.0" encoding="utf-8"?>
 <p:sld xmlns:a="http://schemas.openxmlformats.org/drawingml/2006/main" xmlns:r="http://schemas.openxmlformats.org/officeDocument/2006/relationships" xmlns:p="http://schemas.openxmlformats.org/presentationml/2006/main">
   <p:cSld>
     <p:spTree>
@@ -17636,7 +18895,7 @@
 </p:sld>
 </file>
 
-<file path=ppt/slides/slide17.xml><?xml version="1.0" encoding="utf-8"?>
+<file path=ppt/slides/slide18.xml><?xml version="1.0" encoding="utf-8"?>
 <p:sld xmlns:a="http://schemas.openxmlformats.org/drawingml/2006/main" xmlns:r="http://schemas.openxmlformats.org/officeDocument/2006/relationships" xmlns:p="http://schemas.openxmlformats.org/presentationml/2006/main">
   <p:cSld>
     <p:spTree>
@@ -18541,7 +19800,7 @@
 </p:sld>
 </file>
 
-<file path=ppt/slides/slide18.xml><?xml version="1.0" encoding="utf-8"?>
+<file path=ppt/slides/slide19.xml><?xml version="1.0" encoding="utf-8"?>
 <p:sld xmlns:a="http://schemas.openxmlformats.org/drawingml/2006/main" xmlns:r="http://schemas.openxmlformats.org/officeDocument/2006/relationships" xmlns:p="http://schemas.openxmlformats.org/presentationml/2006/main">
   <p:cSld>
     <p:spTree>
@@ -19822,7 +21081,433 @@
 </p:sld>
 </file>
 
-<file path=ppt/slides/slide19.xml><?xml version="1.0" encoding="utf-8"?>
+<file path=ppt/slides/slide2.xml><?xml version="1.0" encoding="utf-8"?>
+<p:sld xmlns:a="http://schemas.openxmlformats.org/drawingml/2006/main" xmlns:r="http://schemas.openxmlformats.org/officeDocument/2006/relationships" xmlns:p="http://schemas.openxmlformats.org/presentationml/2006/main">
+  <p:cSld>
+    <p:spTree>
+      <p:nvGrpSpPr>
+        <p:cNvPr id="1" name=""/>
+        <p:cNvGrpSpPr/>
+        <p:nvPr/>
+      </p:nvGrpSpPr>
+      <p:grpSpPr>
+        <a:xfrm>
+          <a:off x="0" y="0"/>
+          <a:ext cx="0" cy="0"/>
+          <a:chOff x="0" y="0"/>
+          <a:chExt cx="0" cy="0"/>
+        </a:xfrm>
+      </p:grpSpPr>
+      <p:sp>
+        <p:nvSpPr>
+          <p:cNvPr id="3" name="Rectangle 5">
+            <a:extLst>
+              <a:ext uri="{FF2B5EF4-FFF2-40B4-BE49-F238E27FC236}">
+                <a16:creationId xmlns:a16="http://schemas.microsoft.com/office/drawing/2014/main" id="{2A70859C-30BE-5D11-3082-EFC6EFED6D81}"/>
+              </a:ext>
+            </a:extLst>
+          </p:cNvPr>
+          <p:cNvSpPr>
+            <a:spLocks noChangeArrowheads="1"/>
+          </p:cNvSpPr>
+          <p:nvPr/>
+        </p:nvSpPr>
+        <p:spPr bwMode="auto">
+          <a:xfrm>
+            <a:off x="381000" y="3820939"/>
+            <a:ext cx="8763000" cy="2600712"/>
+          </a:xfrm>
+          <a:prstGeom prst="rect">
+            <a:avLst/>
+          </a:prstGeom>
+          <a:noFill/>
+          <a:ln>
+            <a:noFill/>
+          </a:ln>
+          <a:effectLst/>
+          <a:extLst>
+            <a:ext uri="{909E8E84-426E-40DD-AFC4-6F175D3DCCD1}">
+              <a14:hiddenFill xmlns:a14="http://schemas.microsoft.com/office/drawing/2010/main">
+                <a:solidFill>
+                  <a:schemeClr val="accent1"/>
+                </a:solidFill>
+              </a14:hiddenFill>
+            </a:ext>
+            <a:ext uri="{91240B29-F687-4F45-9708-019B960494DF}">
+              <a14:hiddenLine xmlns:a14="http://schemas.microsoft.com/office/drawing/2010/main" w="9525">
+                <a:solidFill>
+                  <a:schemeClr val="tx1"/>
+                </a:solidFill>
+                <a:miter lim="800000"/>
+                <a:headEnd/>
+                <a:tailEnd/>
+              </a14:hiddenLine>
+            </a:ext>
+            <a:ext uri="{AF507438-7753-43E0-B8FC-AC1667EBCBE1}">
+              <a14:hiddenEffects xmlns:a14="http://schemas.microsoft.com/office/drawing/2010/main">
+                <a:effectLst>
+                  <a:outerShdw dist="35921" dir="2700000" algn="ctr" rotWithShape="0">
+                    <a:schemeClr val="bg2"/>
+                  </a:outerShdw>
+                </a:effectLst>
+              </a14:hiddenEffects>
+            </a:ext>
+          </a:extLst>
+        </p:spPr>
+        <p:txBody>
+          <a:bodyPr vert="horz" wrap="square" lIns="91440" tIns="45720" rIns="91440" bIns="45720" numCol="1" anchor="ctr" anchorCtr="0" compatLnSpc="1">
+            <a:prstTxWarp prst="textNoShape">
+              <a:avLst/>
+            </a:prstTxWarp>
+            <a:spAutoFit/>
+          </a:bodyPr>
+          <a:lstStyle/>
+          <a:p>
+            <a:pPr marL="0" marR="0" lvl="0" indent="0" algn="l" defTabSz="914400" rtl="0" eaLnBrk="0" fontAlgn="base" latinLnBrk="0" hangingPunct="0">
+              <a:spcBef>
+                <a:spcPts val="1200"/>
+              </a:spcBef>
+              <a:spcAft>
+                <a:spcPct val="0"/>
+              </a:spcAft>
+              <a:buClrTx/>
+              <a:buSzTx/>
+              <a:buFontTx/>
+              <a:buNone/>
+              <a:tabLst>
+                <a:tab pos="2173288" algn="l"/>
+              </a:tabLst>
+            </a:pPr>
+            <a:r>
+              <a:rPr lang="en-US" altLang="en-US" sz="3200" dirty="0">
+                <a:latin typeface="Arial" panose="020B0604020202020204" pitchFamily="34" charset="0"/>
+              </a:rPr>
+              <a:t>	</a:t>
+            </a:r>
+            <a:r>
+              <a:rPr lang="en-US" altLang="en-US" sz="3200" b="1" dirty="0">
+                <a:latin typeface="Arial" panose="020B0604020202020204" pitchFamily="34" charset="0"/>
+              </a:rPr>
+              <a:t>G = (V, E)</a:t>
+            </a:r>
+          </a:p>
+          <a:p>
+            <a:pPr marL="0" marR="0" lvl="0" indent="0" algn="l" defTabSz="914400" rtl="0" eaLnBrk="0" fontAlgn="base" latinLnBrk="0" hangingPunct="0">
+              <a:spcBef>
+                <a:spcPts val="1800"/>
+              </a:spcBef>
+              <a:spcAft>
+                <a:spcPct val="0"/>
+              </a:spcAft>
+              <a:buClrTx/>
+              <a:buSzTx/>
+              <a:buFontTx/>
+              <a:buNone/>
+              <a:tabLst/>
+            </a:pPr>
+            <a:r>
+              <a:rPr lang="en-US" altLang="en-US" sz="3200" dirty="0">
+                <a:latin typeface="Arial" panose="020B0604020202020204" pitchFamily="34" charset="0"/>
+              </a:rPr>
+              <a:t>V = {A, B, C, D, E, F, G, H}</a:t>
+            </a:r>
+            <a:endParaRPr kumimoji="0" lang="en-US" altLang="en-US" sz="3200" b="0" i="0" u="none" strike="noStrike" cap="none" normalizeH="0" baseline="0" dirty="0">
+              <a:ln>
+                <a:noFill/>
+              </a:ln>
+              <a:solidFill>
+                <a:schemeClr val="tx1"/>
+              </a:solidFill>
+              <a:effectLst/>
+              <a:latin typeface="Arial" panose="020B0604020202020204" pitchFamily="34" charset="0"/>
+            </a:endParaRPr>
+          </a:p>
+          <a:p>
+            <a:pPr marL="0" marR="0" lvl="0" indent="0" algn="l" defTabSz="914400" rtl="0" eaLnBrk="0" fontAlgn="base" latinLnBrk="0" hangingPunct="0">
+              <a:spcBef>
+                <a:spcPts val="1200"/>
+              </a:spcBef>
+              <a:spcAft>
+                <a:spcPct val="0"/>
+              </a:spcAft>
+              <a:buClrTx/>
+              <a:buSzTx/>
+              <a:buFontTx/>
+              <a:buNone/>
+              <a:tabLst/>
+            </a:pPr>
+            <a:r>
+              <a:rPr lang="en-US" altLang="en-US" sz="3200" dirty="0">
+                <a:latin typeface="Arial" panose="020B0604020202020204" pitchFamily="34" charset="0"/>
+              </a:rPr>
+              <a:t>E = </a:t>
+            </a:r>
+            <a:r>
+              <a:rPr kumimoji="0" lang="en-US" altLang="en-US" sz="3200" b="0" i="0" u="none" strike="noStrike" cap="none" normalizeH="0" baseline="0" dirty="0">
+                <a:ln>
+                  <a:noFill/>
+                </a:ln>
+                <a:solidFill>
+                  <a:schemeClr val="tx1"/>
+                </a:solidFill>
+                <a:effectLst/>
+                <a:latin typeface="Arial" panose="020B0604020202020204" pitchFamily="34" charset="0"/>
+              </a:rPr>
+              <a:t>{(A,B),(A,C),(B,D),(B,E),(C,F),(D,H),(E,F),</a:t>
+            </a:r>
+          </a:p>
+          <a:p>
+            <a:pPr marL="0" marR="0" lvl="0" indent="0" algn="l" defTabSz="914400" rtl="0" eaLnBrk="0" fontAlgn="base" latinLnBrk="0" hangingPunct="0">
+              <a:spcBef>
+                <a:spcPts val="1200"/>
+              </a:spcBef>
+              <a:spcAft>
+                <a:spcPct val="0"/>
+              </a:spcAft>
+              <a:buClrTx/>
+              <a:buSzTx/>
+              <a:buFontTx/>
+              <a:buNone/>
+              <a:tabLst/>
+            </a:pPr>
+            <a:r>
+              <a:rPr kumimoji="0" lang="en-US" altLang="en-US" sz="3200" b="0" i="0" u="none" strike="noStrike" cap="none" normalizeH="0" baseline="0" dirty="0">
+                <a:ln>
+                  <a:noFill/>
+                </a:ln>
+                <a:solidFill>
+                  <a:schemeClr val="tx1"/>
+                </a:solidFill>
+                <a:effectLst/>
+                <a:latin typeface="Arial" panose="020B0604020202020204" pitchFamily="34" charset="0"/>
+              </a:rPr>
+              <a:t>        (E,G),(G,H)} </a:t>
+            </a:r>
+            <a:r>
+              <a:rPr kumimoji="0" lang="en-US" altLang="en-US" sz="3200" b="0" i="0" u="none" strike="noStrike" cap="none" normalizeH="0" baseline="0" dirty="0">
+                <a:ln>
+                  <a:noFill/>
+                </a:ln>
+                <a:solidFill>
+                  <a:srgbClr val="0000CC"/>
+                </a:solidFill>
+                <a:effectLst/>
+                <a:latin typeface="Abadi" panose="020B0604020104020204" pitchFamily="34" charset="0"/>
+                <a:sym typeface="Wingdings" panose="05000000000000000000" pitchFamily="2" charset="2"/>
+              </a:rPr>
+              <a:t> these are undirected edges</a:t>
+            </a:r>
+            <a:endParaRPr kumimoji="0" lang="en-US" altLang="en-US" sz="3200" b="0" i="0" u="none" strike="noStrike" cap="none" normalizeH="0" baseline="0" dirty="0">
+              <a:ln>
+                <a:noFill/>
+              </a:ln>
+              <a:solidFill>
+                <a:srgbClr val="0000CC"/>
+              </a:solidFill>
+              <a:effectLst/>
+              <a:latin typeface="Abadi" panose="020B0604020104020204" pitchFamily="34" charset="0"/>
+            </a:endParaRPr>
+          </a:p>
+        </p:txBody>
+      </p:sp>
+      <p:sp>
+        <p:nvSpPr>
+          <p:cNvPr id="4" name="TextBox 3">
+            <a:extLst>
+              <a:ext uri="{FF2B5EF4-FFF2-40B4-BE49-F238E27FC236}">
+                <a16:creationId xmlns:a16="http://schemas.microsoft.com/office/drawing/2014/main" id="{546AF47E-9FA6-A106-8EF3-F0FCC54D97AA}"/>
+              </a:ext>
+            </a:extLst>
+          </p:cNvPr>
+          <p:cNvSpPr txBox="1"/>
+          <p:nvPr/>
+        </p:nvSpPr>
+        <p:spPr>
+          <a:xfrm>
+            <a:off x="1542965" y="300335"/>
+            <a:ext cx="6058069" cy="923330"/>
+          </a:xfrm>
+          <a:prstGeom prst="rect">
+            <a:avLst/>
+          </a:prstGeom>
+          <a:noFill/>
+        </p:spPr>
+        <p:txBody>
+          <a:bodyPr wrap="none" rtlCol="0">
+            <a:spAutoFit/>
+          </a:bodyPr>
+          <a:lstStyle/>
+          <a:p>
+            <a:r>
+              <a:rPr lang="en-US" sz="5400" b="1" dirty="0"/>
+              <a:t>What is a graph?</a:t>
+            </a:r>
+          </a:p>
+        </p:txBody>
+      </p:sp>
+      <p:pic>
+        <p:nvPicPr>
+          <p:cNvPr id="1028" name="Picture 4" descr="Difference Between Tree and Graph (with Comparison chart) - Tech Differences">
+            <a:extLst>
+              <a:ext uri="{FF2B5EF4-FFF2-40B4-BE49-F238E27FC236}">
+                <a16:creationId xmlns:a16="http://schemas.microsoft.com/office/drawing/2014/main" id="{F6362A07-5BB7-123A-1FE2-3924EF15E6B8}"/>
+              </a:ext>
+            </a:extLst>
+          </p:cNvPr>
+          <p:cNvPicPr>
+            <a:picLocks noChangeAspect="1" noChangeArrowheads="1"/>
+          </p:cNvPicPr>
+          <p:nvPr/>
+        </p:nvPicPr>
+        <p:blipFill rotWithShape="1">
+          <a:blip r:embed="rId3">
+            <a:extLst>
+              <a:ext uri="{28A0092B-C50C-407E-A947-70E740481C1C}">
+                <a14:useLocalDpi xmlns:a14="http://schemas.microsoft.com/office/drawing/2010/main" val="0"/>
+              </a:ext>
+            </a:extLst>
+          </a:blip>
+          <a:srcRect l="50231" t="1254" r="1396" b="15783"/>
+          <a:stretch/>
+        </p:blipFill>
+        <p:spPr bwMode="auto">
+          <a:xfrm>
+            <a:off x="6050901" y="1697829"/>
+            <a:ext cx="2707434" cy="2915698"/>
+          </a:xfrm>
+          <a:prstGeom prst="rect">
+            <a:avLst/>
+          </a:prstGeom>
+          <a:noFill/>
+          <a:extLst>
+            <a:ext uri="{909E8E84-426E-40DD-AFC4-6F175D3DCCD1}">
+              <a14:hiddenFill xmlns:a14="http://schemas.microsoft.com/office/drawing/2010/main">
+                <a:solidFill>
+                  <a:srgbClr val="FFFFFF"/>
+                </a:solidFill>
+              </a14:hiddenFill>
+            </a:ext>
+          </a:extLst>
+        </p:spPr>
+      </p:pic>
+      <p:sp>
+        <p:nvSpPr>
+          <p:cNvPr id="6" name="TextBox 5">
+            <a:extLst>
+              <a:ext uri="{FF2B5EF4-FFF2-40B4-BE49-F238E27FC236}">
+                <a16:creationId xmlns:a16="http://schemas.microsoft.com/office/drawing/2014/main" id="{53876BCD-77E1-375E-2146-3FFCE2708521}"/>
+              </a:ext>
+            </a:extLst>
+          </p:cNvPr>
+          <p:cNvSpPr txBox="1"/>
+          <p:nvPr/>
+        </p:nvSpPr>
+        <p:spPr>
+          <a:xfrm>
+            <a:off x="418321" y="1697829"/>
+            <a:ext cx="5403979" cy="1754326"/>
+          </a:xfrm>
+          <a:prstGeom prst="rect">
+            <a:avLst/>
+          </a:prstGeom>
+          <a:noFill/>
+        </p:spPr>
+        <p:txBody>
+          <a:bodyPr wrap="square">
+            <a:spAutoFit/>
+          </a:bodyPr>
+          <a:lstStyle/>
+          <a:p>
+            <a:pPr marL="0" marR="0" lvl="0" indent="0" algn="l" defTabSz="914400" rtl="0" eaLnBrk="0" fontAlgn="base" latinLnBrk="0" hangingPunct="0">
+              <a:lnSpc>
+                <a:spcPct val="100000"/>
+              </a:lnSpc>
+              <a:spcBef>
+                <a:spcPct val="0"/>
+              </a:spcBef>
+              <a:spcAft>
+                <a:spcPct val="0"/>
+              </a:spcAft>
+              <a:buClrTx/>
+              <a:buSzTx/>
+              <a:buFontTx/>
+              <a:buNone/>
+              <a:tabLst/>
+            </a:pPr>
+            <a:r>
+              <a:rPr kumimoji="0" lang="en-US" altLang="en-US" sz="3600" b="0" i="0" u="none" strike="noStrike" cap="none" normalizeH="0" baseline="0" dirty="0">
+                <a:ln>
+                  <a:noFill/>
+                </a:ln>
+                <a:solidFill>
+                  <a:schemeClr val="tx1"/>
+                </a:solidFill>
+                <a:effectLst/>
+                <a:latin typeface="Arial" panose="020B0604020202020204" pitchFamily="34" charset="0"/>
+              </a:rPr>
+              <a:t>A graph is a collection of vertices/nodes and the edges that connect them.</a:t>
+            </a:r>
+          </a:p>
+        </p:txBody>
+      </p:sp>
+      <p:cxnSp>
+        <p:nvCxnSpPr>
+          <p:cNvPr id="8" name="Straight Arrow Connector 7">
+            <a:extLst>
+              <a:ext uri="{FF2B5EF4-FFF2-40B4-BE49-F238E27FC236}">
+                <a16:creationId xmlns:a16="http://schemas.microsoft.com/office/drawing/2014/main" id="{897FEA85-6823-036E-B1D5-3F9E6F8244AC}"/>
+              </a:ext>
+              <a:ext uri="{C183D7F6-B498-43B3-948B-1728B52AA6E4}">
+                <adec:decorative xmlns:adec="http://schemas.microsoft.com/office/drawing/2017/decorative" val="1"/>
+              </a:ext>
+            </a:extLst>
+          </p:cNvPr>
+          <p:cNvCxnSpPr/>
+          <p:nvPr/>
+        </p:nvCxnSpPr>
+        <p:spPr bwMode="auto">
+          <a:xfrm flipV="1">
+            <a:off x="4572000" y="3574718"/>
+            <a:ext cx="1371600" cy="311482"/>
+          </a:xfrm>
+          <a:prstGeom prst="straightConnector1">
+            <a:avLst/>
+          </a:prstGeom>
+          <a:ln w="38100">
+            <a:prstDash val="sysDot"/>
+            <a:headEnd type="none" w="sm" len="sm"/>
+            <a:tailEnd type="triangle"/>
+          </a:ln>
+        </p:spPr>
+        <p:style>
+          <a:lnRef idx="1">
+            <a:schemeClr val="accent2"/>
+          </a:lnRef>
+          <a:fillRef idx="0">
+            <a:schemeClr val="accent2"/>
+          </a:fillRef>
+          <a:effectRef idx="0">
+            <a:schemeClr val="accent2"/>
+          </a:effectRef>
+          <a:fontRef idx="minor">
+            <a:schemeClr val="tx1"/>
+          </a:fontRef>
+        </p:style>
+      </p:cxnSp>
+    </p:spTree>
+    <p:extLst>
+      <p:ext uri="{BB962C8B-B14F-4D97-AF65-F5344CB8AC3E}">
+        <p14:creationId xmlns:p14="http://schemas.microsoft.com/office/powerpoint/2010/main" val="3609059145"/>
+      </p:ext>
+    </p:extLst>
+  </p:cSld>
+  <p:clrMapOvr>
+    <a:masterClrMapping/>
+  </p:clrMapOvr>
+</p:sld>
+</file>
+
+<file path=ppt/slides/slide20.xml><?xml version="1.0" encoding="utf-8"?>
 <p:sld xmlns:a="http://schemas.openxmlformats.org/drawingml/2006/main" xmlns:r="http://schemas.openxmlformats.org/officeDocument/2006/relationships" xmlns:p="http://schemas.openxmlformats.org/presentationml/2006/main">
   <p:cSld>
     <p:spTree>
@@ -20484,433 +22169,7 @@
 </p:sld>
 </file>
 
-<file path=ppt/slides/slide2.xml><?xml version="1.0" encoding="utf-8"?>
-<p:sld xmlns:a="http://schemas.openxmlformats.org/drawingml/2006/main" xmlns:r="http://schemas.openxmlformats.org/officeDocument/2006/relationships" xmlns:p="http://schemas.openxmlformats.org/presentationml/2006/main">
-  <p:cSld>
-    <p:spTree>
-      <p:nvGrpSpPr>
-        <p:cNvPr id="1" name=""/>
-        <p:cNvGrpSpPr/>
-        <p:nvPr/>
-      </p:nvGrpSpPr>
-      <p:grpSpPr>
-        <a:xfrm>
-          <a:off x="0" y="0"/>
-          <a:ext cx="0" cy="0"/>
-          <a:chOff x="0" y="0"/>
-          <a:chExt cx="0" cy="0"/>
-        </a:xfrm>
-      </p:grpSpPr>
-      <p:sp>
-        <p:nvSpPr>
-          <p:cNvPr id="3" name="Rectangle 5">
-            <a:extLst>
-              <a:ext uri="{FF2B5EF4-FFF2-40B4-BE49-F238E27FC236}">
-                <a16:creationId xmlns:a16="http://schemas.microsoft.com/office/drawing/2014/main" id="{2A70859C-30BE-5D11-3082-EFC6EFED6D81}"/>
-              </a:ext>
-            </a:extLst>
-          </p:cNvPr>
-          <p:cNvSpPr>
-            <a:spLocks noChangeArrowheads="1"/>
-          </p:cNvSpPr>
-          <p:nvPr/>
-        </p:nvSpPr>
-        <p:spPr bwMode="auto">
-          <a:xfrm>
-            <a:off x="381000" y="3820939"/>
-            <a:ext cx="8763000" cy="2600712"/>
-          </a:xfrm>
-          <a:prstGeom prst="rect">
-            <a:avLst/>
-          </a:prstGeom>
-          <a:noFill/>
-          <a:ln>
-            <a:noFill/>
-          </a:ln>
-          <a:effectLst/>
-          <a:extLst>
-            <a:ext uri="{909E8E84-426E-40DD-AFC4-6F175D3DCCD1}">
-              <a14:hiddenFill xmlns:a14="http://schemas.microsoft.com/office/drawing/2010/main">
-                <a:solidFill>
-                  <a:schemeClr val="accent1"/>
-                </a:solidFill>
-              </a14:hiddenFill>
-            </a:ext>
-            <a:ext uri="{91240B29-F687-4F45-9708-019B960494DF}">
-              <a14:hiddenLine xmlns:a14="http://schemas.microsoft.com/office/drawing/2010/main" w="9525">
-                <a:solidFill>
-                  <a:schemeClr val="tx1"/>
-                </a:solidFill>
-                <a:miter lim="800000"/>
-                <a:headEnd/>
-                <a:tailEnd/>
-              </a14:hiddenLine>
-            </a:ext>
-            <a:ext uri="{AF507438-7753-43E0-B8FC-AC1667EBCBE1}">
-              <a14:hiddenEffects xmlns:a14="http://schemas.microsoft.com/office/drawing/2010/main">
-                <a:effectLst>
-                  <a:outerShdw dist="35921" dir="2700000" algn="ctr" rotWithShape="0">
-                    <a:schemeClr val="bg2"/>
-                  </a:outerShdw>
-                </a:effectLst>
-              </a14:hiddenEffects>
-            </a:ext>
-          </a:extLst>
-        </p:spPr>
-        <p:txBody>
-          <a:bodyPr vert="horz" wrap="square" lIns="91440" tIns="45720" rIns="91440" bIns="45720" numCol="1" anchor="ctr" anchorCtr="0" compatLnSpc="1">
-            <a:prstTxWarp prst="textNoShape">
-              <a:avLst/>
-            </a:prstTxWarp>
-            <a:spAutoFit/>
-          </a:bodyPr>
-          <a:lstStyle/>
-          <a:p>
-            <a:pPr marL="0" marR="0" lvl="0" indent="0" algn="l" defTabSz="914400" rtl="0" eaLnBrk="0" fontAlgn="base" latinLnBrk="0" hangingPunct="0">
-              <a:spcBef>
-                <a:spcPts val="1200"/>
-              </a:spcBef>
-              <a:spcAft>
-                <a:spcPct val="0"/>
-              </a:spcAft>
-              <a:buClrTx/>
-              <a:buSzTx/>
-              <a:buFontTx/>
-              <a:buNone/>
-              <a:tabLst>
-                <a:tab pos="2173288" algn="l"/>
-              </a:tabLst>
-            </a:pPr>
-            <a:r>
-              <a:rPr lang="en-US" altLang="en-US" sz="3200" dirty="0">
-                <a:latin typeface="Arial" panose="020B0604020202020204" pitchFamily="34" charset="0"/>
-              </a:rPr>
-              <a:t>	</a:t>
-            </a:r>
-            <a:r>
-              <a:rPr lang="en-US" altLang="en-US" sz="3200" b="1" dirty="0">
-                <a:latin typeface="Arial" panose="020B0604020202020204" pitchFamily="34" charset="0"/>
-              </a:rPr>
-              <a:t>G = (V, E)</a:t>
-            </a:r>
-          </a:p>
-          <a:p>
-            <a:pPr marL="0" marR="0" lvl="0" indent="0" algn="l" defTabSz="914400" rtl="0" eaLnBrk="0" fontAlgn="base" latinLnBrk="0" hangingPunct="0">
-              <a:spcBef>
-                <a:spcPts val="1800"/>
-              </a:spcBef>
-              <a:spcAft>
-                <a:spcPct val="0"/>
-              </a:spcAft>
-              <a:buClrTx/>
-              <a:buSzTx/>
-              <a:buFontTx/>
-              <a:buNone/>
-              <a:tabLst/>
-            </a:pPr>
-            <a:r>
-              <a:rPr lang="en-US" altLang="en-US" sz="3200" dirty="0">
-                <a:latin typeface="Arial" panose="020B0604020202020204" pitchFamily="34" charset="0"/>
-              </a:rPr>
-              <a:t>V = {A, B, C, D, E, F, G, H}</a:t>
-            </a:r>
-            <a:endParaRPr kumimoji="0" lang="en-US" altLang="en-US" sz="3200" b="0" i="0" u="none" strike="noStrike" cap="none" normalizeH="0" baseline="0" dirty="0">
-              <a:ln>
-                <a:noFill/>
-              </a:ln>
-              <a:solidFill>
-                <a:schemeClr val="tx1"/>
-              </a:solidFill>
-              <a:effectLst/>
-              <a:latin typeface="Arial" panose="020B0604020202020204" pitchFamily="34" charset="0"/>
-            </a:endParaRPr>
-          </a:p>
-          <a:p>
-            <a:pPr marL="0" marR="0" lvl="0" indent="0" algn="l" defTabSz="914400" rtl="0" eaLnBrk="0" fontAlgn="base" latinLnBrk="0" hangingPunct="0">
-              <a:spcBef>
-                <a:spcPts val="1200"/>
-              </a:spcBef>
-              <a:spcAft>
-                <a:spcPct val="0"/>
-              </a:spcAft>
-              <a:buClrTx/>
-              <a:buSzTx/>
-              <a:buFontTx/>
-              <a:buNone/>
-              <a:tabLst/>
-            </a:pPr>
-            <a:r>
-              <a:rPr lang="en-US" altLang="en-US" sz="3200" dirty="0">
-                <a:latin typeface="Arial" panose="020B0604020202020204" pitchFamily="34" charset="0"/>
-              </a:rPr>
-              <a:t>E = </a:t>
-            </a:r>
-            <a:r>
-              <a:rPr kumimoji="0" lang="en-US" altLang="en-US" sz="3200" b="0" i="0" u="none" strike="noStrike" cap="none" normalizeH="0" baseline="0" dirty="0">
-                <a:ln>
-                  <a:noFill/>
-                </a:ln>
-                <a:solidFill>
-                  <a:schemeClr val="tx1"/>
-                </a:solidFill>
-                <a:effectLst/>
-                <a:latin typeface="Arial" panose="020B0604020202020204" pitchFamily="34" charset="0"/>
-              </a:rPr>
-              <a:t>{(A,B),(A,C),(B,D),(B,E),(C,F),(D,H),(E,F),</a:t>
-            </a:r>
-          </a:p>
-          <a:p>
-            <a:pPr marL="0" marR="0" lvl="0" indent="0" algn="l" defTabSz="914400" rtl="0" eaLnBrk="0" fontAlgn="base" latinLnBrk="0" hangingPunct="0">
-              <a:spcBef>
-                <a:spcPts val="1200"/>
-              </a:spcBef>
-              <a:spcAft>
-                <a:spcPct val="0"/>
-              </a:spcAft>
-              <a:buClrTx/>
-              <a:buSzTx/>
-              <a:buFontTx/>
-              <a:buNone/>
-              <a:tabLst/>
-            </a:pPr>
-            <a:r>
-              <a:rPr kumimoji="0" lang="en-US" altLang="en-US" sz="3200" b="0" i="0" u="none" strike="noStrike" cap="none" normalizeH="0" baseline="0" dirty="0">
-                <a:ln>
-                  <a:noFill/>
-                </a:ln>
-                <a:solidFill>
-                  <a:schemeClr val="tx1"/>
-                </a:solidFill>
-                <a:effectLst/>
-                <a:latin typeface="Arial" panose="020B0604020202020204" pitchFamily="34" charset="0"/>
-              </a:rPr>
-              <a:t>        (E,G),(G,H)} </a:t>
-            </a:r>
-            <a:r>
-              <a:rPr kumimoji="0" lang="en-US" altLang="en-US" sz="3200" b="0" i="0" u="none" strike="noStrike" cap="none" normalizeH="0" baseline="0" dirty="0">
-                <a:ln>
-                  <a:noFill/>
-                </a:ln>
-                <a:solidFill>
-                  <a:srgbClr val="0000CC"/>
-                </a:solidFill>
-                <a:effectLst/>
-                <a:latin typeface="Abadi" panose="020B0604020104020204" pitchFamily="34" charset="0"/>
-                <a:sym typeface="Wingdings" panose="05000000000000000000" pitchFamily="2" charset="2"/>
-              </a:rPr>
-              <a:t> these are undirected edges</a:t>
-            </a:r>
-            <a:endParaRPr kumimoji="0" lang="en-US" altLang="en-US" sz="3200" b="0" i="0" u="none" strike="noStrike" cap="none" normalizeH="0" baseline="0" dirty="0">
-              <a:ln>
-                <a:noFill/>
-              </a:ln>
-              <a:solidFill>
-                <a:srgbClr val="0000CC"/>
-              </a:solidFill>
-              <a:effectLst/>
-              <a:latin typeface="Abadi" panose="020B0604020104020204" pitchFamily="34" charset="0"/>
-            </a:endParaRPr>
-          </a:p>
-        </p:txBody>
-      </p:sp>
-      <p:sp>
-        <p:nvSpPr>
-          <p:cNvPr id="4" name="TextBox 3">
-            <a:extLst>
-              <a:ext uri="{FF2B5EF4-FFF2-40B4-BE49-F238E27FC236}">
-                <a16:creationId xmlns:a16="http://schemas.microsoft.com/office/drawing/2014/main" id="{546AF47E-9FA6-A106-8EF3-F0FCC54D97AA}"/>
-              </a:ext>
-            </a:extLst>
-          </p:cNvPr>
-          <p:cNvSpPr txBox="1"/>
-          <p:nvPr/>
-        </p:nvSpPr>
-        <p:spPr>
-          <a:xfrm>
-            <a:off x="1542965" y="300335"/>
-            <a:ext cx="6058069" cy="923330"/>
-          </a:xfrm>
-          <a:prstGeom prst="rect">
-            <a:avLst/>
-          </a:prstGeom>
-          <a:noFill/>
-        </p:spPr>
-        <p:txBody>
-          <a:bodyPr wrap="none" rtlCol="0">
-            <a:spAutoFit/>
-          </a:bodyPr>
-          <a:lstStyle/>
-          <a:p>
-            <a:r>
-              <a:rPr lang="en-US" sz="5400" b="1" dirty="0"/>
-              <a:t>What is a graph?</a:t>
-            </a:r>
-          </a:p>
-        </p:txBody>
-      </p:sp>
-      <p:pic>
-        <p:nvPicPr>
-          <p:cNvPr id="1028" name="Picture 4" descr="Difference Between Tree and Graph (with Comparison chart) - Tech Differences">
-            <a:extLst>
-              <a:ext uri="{FF2B5EF4-FFF2-40B4-BE49-F238E27FC236}">
-                <a16:creationId xmlns:a16="http://schemas.microsoft.com/office/drawing/2014/main" id="{F6362A07-5BB7-123A-1FE2-3924EF15E6B8}"/>
-              </a:ext>
-            </a:extLst>
-          </p:cNvPr>
-          <p:cNvPicPr>
-            <a:picLocks noChangeAspect="1" noChangeArrowheads="1"/>
-          </p:cNvPicPr>
-          <p:nvPr/>
-        </p:nvPicPr>
-        <p:blipFill rotWithShape="1">
-          <a:blip r:embed="rId3">
-            <a:extLst>
-              <a:ext uri="{28A0092B-C50C-407E-A947-70E740481C1C}">
-                <a14:useLocalDpi xmlns:a14="http://schemas.microsoft.com/office/drawing/2010/main" val="0"/>
-              </a:ext>
-            </a:extLst>
-          </a:blip>
-          <a:srcRect l="50231" t="1254" r="1396" b="15783"/>
-          <a:stretch/>
-        </p:blipFill>
-        <p:spPr bwMode="auto">
-          <a:xfrm>
-            <a:off x="6050901" y="1697829"/>
-            <a:ext cx="2707434" cy="2915698"/>
-          </a:xfrm>
-          <a:prstGeom prst="rect">
-            <a:avLst/>
-          </a:prstGeom>
-          <a:noFill/>
-          <a:extLst>
-            <a:ext uri="{909E8E84-426E-40DD-AFC4-6F175D3DCCD1}">
-              <a14:hiddenFill xmlns:a14="http://schemas.microsoft.com/office/drawing/2010/main">
-                <a:solidFill>
-                  <a:srgbClr val="FFFFFF"/>
-                </a:solidFill>
-              </a14:hiddenFill>
-            </a:ext>
-          </a:extLst>
-        </p:spPr>
-      </p:pic>
-      <p:sp>
-        <p:nvSpPr>
-          <p:cNvPr id="6" name="TextBox 5">
-            <a:extLst>
-              <a:ext uri="{FF2B5EF4-FFF2-40B4-BE49-F238E27FC236}">
-                <a16:creationId xmlns:a16="http://schemas.microsoft.com/office/drawing/2014/main" id="{53876BCD-77E1-375E-2146-3FFCE2708521}"/>
-              </a:ext>
-            </a:extLst>
-          </p:cNvPr>
-          <p:cNvSpPr txBox="1"/>
-          <p:nvPr/>
-        </p:nvSpPr>
-        <p:spPr>
-          <a:xfrm>
-            <a:off x="418321" y="1697829"/>
-            <a:ext cx="5403979" cy="1754326"/>
-          </a:xfrm>
-          <a:prstGeom prst="rect">
-            <a:avLst/>
-          </a:prstGeom>
-          <a:noFill/>
-        </p:spPr>
-        <p:txBody>
-          <a:bodyPr wrap="square">
-            <a:spAutoFit/>
-          </a:bodyPr>
-          <a:lstStyle/>
-          <a:p>
-            <a:pPr marL="0" marR="0" lvl="0" indent="0" algn="l" defTabSz="914400" rtl="0" eaLnBrk="0" fontAlgn="base" latinLnBrk="0" hangingPunct="0">
-              <a:lnSpc>
-                <a:spcPct val="100000"/>
-              </a:lnSpc>
-              <a:spcBef>
-                <a:spcPct val="0"/>
-              </a:spcBef>
-              <a:spcAft>
-                <a:spcPct val="0"/>
-              </a:spcAft>
-              <a:buClrTx/>
-              <a:buSzTx/>
-              <a:buFontTx/>
-              <a:buNone/>
-              <a:tabLst/>
-            </a:pPr>
-            <a:r>
-              <a:rPr kumimoji="0" lang="en-US" altLang="en-US" sz="3600" b="0" i="0" u="none" strike="noStrike" cap="none" normalizeH="0" baseline="0" dirty="0">
-                <a:ln>
-                  <a:noFill/>
-                </a:ln>
-                <a:solidFill>
-                  <a:schemeClr val="tx1"/>
-                </a:solidFill>
-                <a:effectLst/>
-                <a:latin typeface="Arial" panose="020B0604020202020204" pitchFamily="34" charset="0"/>
-              </a:rPr>
-              <a:t>A graph is a collection of vertices/nodes and the edges that connect them.</a:t>
-            </a:r>
-          </a:p>
-        </p:txBody>
-      </p:sp>
-      <p:cxnSp>
-        <p:nvCxnSpPr>
-          <p:cNvPr id="8" name="Straight Arrow Connector 7">
-            <a:extLst>
-              <a:ext uri="{FF2B5EF4-FFF2-40B4-BE49-F238E27FC236}">
-                <a16:creationId xmlns:a16="http://schemas.microsoft.com/office/drawing/2014/main" id="{897FEA85-6823-036E-B1D5-3F9E6F8244AC}"/>
-              </a:ext>
-              <a:ext uri="{C183D7F6-B498-43B3-948B-1728B52AA6E4}">
-                <adec:decorative xmlns:adec="http://schemas.microsoft.com/office/drawing/2017/decorative" val="1"/>
-              </a:ext>
-            </a:extLst>
-          </p:cNvPr>
-          <p:cNvCxnSpPr/>
-          <p:nvPr/>
-        </p:nvCxnSpPr>
-        <p:spPr bwMode="auto">
-          <a:xfrm flipV="1">
-            <a:off x="4572000" y="3574718"/>
-            <a:ext cx="1371600" cy="311482"/>
-          </a:xfrm>
-          <a:prstGeom prst="straightConnector1">
-            <a:avLst/>
-          </a:prstGeom>
-          <a:ln w="38100">
-            <a:prstDash val="sysDot"/>
-            <a:headEnd type="none" w="sm" len="sm"/>
-            <a:tailEnd type="triangle"/>
-          </a:ln>
-        </p:spPr>
-        <p:style>
-          <a:lnRef idx="1">
-            <a:schemeClr val="accent2"/>
-          </a:lnRef>
-          <a:fillRef idx="0">
-            <a:schemeClr val="accent2"/>
-          </a:fillRef>
-          <a:effectRef idx="0">
-            <a:schemeClr val="accent2"/>
-          </a:effectRef>
-          <a:fontRef idx="minor">
-            <a:schemeClr val="tx1"/>
-          </a:fontRef>
-        </p:style>
-      </p:cxnSp>
-    </p:spTree>
-    <p:extLst>
-      <p:ext uri="{BB962C8B-B14F-4D97-AF65-F5344CB8AC3E}">
-        <p14:creationId xmlns:p14="http://schemas.microsoft.com/office/powerpoint/2010/main" val="3609059145"/>
-      </p:ext>
-    </p:extLst>
-  </p:cSld>
-  <p:clrMapOvr>
-    <a:masterClrMapping/>
-  </p:clrMapOvr>
-</p:sld>
-</file>
-
-<file path=ppt/slides/slide20.xml><?xml version="1.0" encoding="utf-8"?>
+<file path=ppt/slides/slide21.xml><?xml version="1.0" encoding="utf-8"?>
 <p:sld xmlns:a="http://schemas.openxmlformats.org/drawingml/2006/main" xmlns:r="http://schemas.openxmlformats.org/officeDocument/2006/relationships" xmlns:p="http://schemas.openxmlformats.org/presentationml/2006/main">
   <p:cSld>
     <p:spTree>
@@ -21107,7 +22366,7 @@
 </p:sld>
 </file>
 
-<file path=ppt/slides/slide21.xml><?xml version="1.0" encoding="utf-8"?>
+<file path=ppt/slides/slide22.xml><?xml version="1.0" encoding="utf-8"?>
 <p:sld xmlns:a="http://schemas.openxmlformats.org/drawingml/2006/main" xmlns:r="http://schemas.openxmlformats.org/officeDocument/2006/relationships" xmlns:p="http://schemas.openxmlformats.org/presentationml/2006/main">
   <p:cSld>
     <p:spTree>
@@ -21322,7 +22581,7 @@
 </p:sld>
 </file>
 
-<file path=ppt/slides/slide22.xml><?xml version="1.0" encoding="utf-8"?>
+<file path=ppt/slides/slide23.xml><?xml version="1.0" encoding="utf-8"?>
 <p:sld xmlns:a="http://schemas.openxmlformats.org/drawingml/2006/main" xmlns:r="http://schemas.openxmlformats.org/officeDocument/2006/relationships" xmlns:p="http://schemas.openxmlformats.org/presentationml/2006/main">
   <p:cSld>
     <p:spTree>
@@ -21490,7 +22749,7 @@
 </p:sld>
 </file>
 
-<file path=ppt/slides/slide23.xml><?xml version="1.0" encoding="utf-8"?>
+<file path=ppt/slides/slide24.xml><?xml version="1.0" encoding="utf-8"?>
 <p:sld xmlns:a="http://schemas.openxmlformats.org/drawingml/2006/main" xmlns:r="http://schemas.openxmlformats.org/officeDocument/2006/relationships" xmlns:p="http://schemas.openxmlformats.org/presentationml/2006/main">
   <p:cSld>
     <p:spTree>
@@ -21756,7 +23015,7 @@
 </p:sld>
 </file>
 
-<file path=ppt/slides/slide24.xml><?xml version="1.0" encoding="utf-8"?>
+<file path=ppt/slides/slide25.xml><?xml version="1.0" encoding="utf-8"?>
 <p:sld xmlns:a="http://schemas.openxmlformats.org/drawingml/2006/main" xmlns:r="http://schemas.openxmlformats.org/officeDocument/2006/relationships" xmlns:p="http://schemas.openxmlformats.org/presentationml/2006/main">
   <p:cSld>
     <p:spTree>
@@ -22118,7 +23377,7 @@
 </p:sld>
 </file>
 
-<file path=ppt/slides/slide25.xml><?xml version="1.0" encoding="utf-8"?>
+<file path=ppt/slides/slide26.xml><?xml version="1.0" encoding="utf-8"?>
 <p:sld xmlns:a="http://schemas.openxmlformats.org/drawingml/2006/main" xmlns:r="http://schemas.openxmlformats.org/officeDocument/2006/relationships" xmlns:p="http://schemas.openxmlformats.org/presentationml/2006/main">
   <p:cSld>
     <p:spTree>
@@ -24196,7 +25455,7 @@
 </p:sld>
 </file>
 
-<file path=ppt/slides/slide26.xml><?xml version="1.0" encoding="utf-8"?>
+<file path=ppt/slides/slide27.xml><?xml version="1.0" encoding="utf-8"?>
 <p:sld xmlns:a="http://schemas.openxmlformats.org/drawingml/2006/main" xmlns:r="http://schemas.openxmlformats.org/officeDocument/2006/relationships" xmlns:p="http://schemas.openxmlformats.org/presentationml/2006/main">
   <p:cSld>
     <p:spTree>
@@ -24252,14 +25511,14 @@
           <a:noFill/>
           <a:extLst>
             <a:ext uri="{909E8E84-426E-40dd-AFC4-6F175D3DCCD1}">
-              <a14:hiddenFill xmlns="" xmlns:a14="http://schemas.microsoft.com/office/drawing/2010/main">
+              <a14:hiddenFill xmlns:a14="http://schemas.microsoft.com/office/drawing/2010/main" xmlns="">
                 <a:solidFill>
                   <a:srgbClr val="FFFFFF"/>
                 </a:solidFill>
               </a14:hiddenFill>
             </a:ext>
             <a:ext uri="{91240B29-F687-4f45-9708-019B960494DF}">
-              <a14:hiddenLine xmlns="" xmlns:a14="http://schemas.microsoft.com/office/drawing/2010/main" w="9525">
+              <a14:hiddenLine xmlns:a14="http://schemas.microsoft.com/office/drawing/2010/main" xmlns="" w="9525">
                 <a:solidFill>
                   <a:srgbClr val="000000"/>
                 </a:solidFill>
@@ -24405,7 +25664,7 @@
                   <a:spcPct val="80000"/>
                 </a:lnSpc>
               </a:pPr>
-              <a:t>26</a:t>
+              <a:t>27</a:t>
             </a:fld>
             <a:endParaRPr lang="en-US" altLang="en-US" sz="1200">
               <a:solidFill>
@@ -24682,14 +25941,14 @@
               </a:ln>
               <a:extLst>
                 <a:ext uri="{909E8E84-426E-40dd-AFC4-6F175D3DCCD1}">
-                  <a14:hiddenFill xmlns="" xmlns:a14="http://schemas.microsoft.com/office/drawing/2010/main">
+                  <a14:hiddenFill xmlns:a14="http://schemas.microsoft.com/office/drawing/2010/main" xmlns="">
                     <a:solidFill>
                       <a:srgbClr val="FFFFFF"/>
                     </a:solidFill>
                   </a14:hiddenFill>
                 </a:ext>
                 <a:ext uri="{91240B29-F687-4f45-9708-019B960494DF}">
-                  <a14:hiddenLine xmlns="" xmlns:a14="http://schemas.microsoft.com/office/drawing/2010/main" w="9525">
+                  <a14:hiddenLine xmlns:a14="http://schemas.microsoft.com/office/drawing/2010/main" xmlns="" w="9525">
                     <a:solidFill>
                       <a:srgbClr val="000000"/>
                     </a:solidFill>
@@ -24917,14 +26176,14 @@
               </a:ln>
               <a:extLst>
                 <a:ext uri="{909E8E84-426E-40dd-AFC4-6F175D3DCCD1}">
-                  <a14:hiddenFill xmlns="" xmlns:a14="http://schemas.microsoft.com/office/drawing/2010/main">
+                  <a14:hiddenFill xmlns:a14="http://schemas.microsoft.com/office/drawing/2010/main" xmlns="">
                     <a:solidFill>
                       <a:srgbClr val="FFFFFF"/>
                     </a:solidFill>
                   </a14:hiddenFill>
                 </a:ext>
                 <a:ext uri="{91240B29-F687-4f45-9708-019B960494DF}">
-                  <a14:hiddenLine xmlns="" xmlns:a14="http://schemas.microsoft.com/office/drawing/2010/main" w="9525">
+                  <a14:hiddenLine xmlns:a14="http://schemas.microsoft.com/office/drawing/2010/main" xmlns="" w="9525">
                     <a:solidFill>
                       <a:srgbClr val="000000"/>
                     </a:solidFill>
@@ -25111,7 +26370,7 @@
               </a:ln>
               <a:extLst>
                 <a:ext uri="{909E8E84-426E-40dd-AFC4-6F175D3DCCD1}">
-                  <a14:hiddenFill xmlns="" xmlns:a14="http://schemas.microsoft.com/office/drawing/2010/main">
+                  <a14:hiddenFill xmlns:a14="http://schemas.microsoft.com/office/drawing/2010/main" xmlns="">
                     <a:solidFill>
                       <a:srgbClr val="FFFFFF"/>
                     </a:solidFill>
@@ -25270,7 +26529,7 @@
               </a:ln>
               <a:extLst>
                 <a:ext uri="{909E8E84-426E-40dd-AFC4-6F175D3DCCD1}">
-                  <a14:hiddenFill xmlns="" xmlns:a14="http://schemas.microsoft.com/office/drawing/2010/main">
+                  <a14:hiddenFill xmlns:a14="http://schemas.microsoft.com/office/drawing/2010/main" xmlns="">
                     <a:solidFill>
                       <a:srgbClr val="FFFFFF"/>
                     </a:solidFill>
@@ -25429,7 +26688,7 @@
               </a:ln>
               <a:extLst>
                 <a:ext uri="{909E8E84-426E-40dd-AFC4-6F175D3DCCD1}">
-                  <a14:hiddenFill xmlns="" xmlns:a14="http://schemas.microsoft.com/office/drawing/2010/main">
+                  <a14:hiddenFill xmlns:a14="http://schemas.microsoft.com/office/drawing/2010/main" xmlns="">
                     <a:solidFill>
                       <a:srgbClr val="FFFFFF"/>
                     </a:solidFill>
@@ -25583,14 +26842,14 @@
               </a:ln>
               <a:extLst>
                 <a:ext uri="{909E8E84-426E-40dd-AFC4-6F175D3DCCD1}">
-                  <a14:hiddenFill xmlns="" xmlns:a14="http://schemas.microsoft.com/office/drawing/2010/main">
+                  <a14:hiddenFill xmlns:a14="http://schemas.microsoft.com/office/drawing/2010/main" xmlns="">
                     <a:solidFill>
                       <a:srgbClr val="FFFFFF"/>
                     </a:solidFill>
                   </a14:hiddenFill>
                 </a:ext>
                 <a:ext uri="{91240B29-F687-4f45-9708-019B960494DF}">
-                  <a14:hiddenLine xmlns="" xmlns:a14="http://schemas.microsoft.com/office/drawing/2010/main" w="12700">
+                  <a14:hiddenLine xmlns:a14="http://schemas.microsoft.com/office/drawing/2010/main" xmlns="" w="12700">
                     <a:solidFill>
                       <a:srgbClr val="000000"/>
                     </a:solidFill>
@@ -25758,14 +27017,14 @@
               </a:ln>
               <a:extLst>
                 <a:ext uri="{909E8E84-426E-40dd-AFC4-6F175D3DCCD1}">
-                  <a14:hiddenFill xmlns="" xmlns:a14="http://schemas.microsoft.com/office/drawing/2010/main">
+                  <a14:hiddenFill xmlns:a14="http://schemas.microsoft.com/office/drawing/2010/main" xmlns="">
                     <a:solidFill>
                       <a:srgbClr val="FFFFFF"/>
                     </a:solidFill>
                   </a14:hiddenFill>
                 </a:ext>
                 <a:ext uri="{91240B29-F687-4f45-9708-019B960494DF}">
-                  <a14:hiddenLine xmlns="" xmlns:a14="http://schemas.microsoft.com/office/drawing/2010/main" w="12700">
+                  <a14:hiddenLine xmlns:a14="http://schemas.microsoft.com/office/drawing/2010/main" xmlns="" w="12700">
                     <a:solidFill>
                       <a:srgbClr val="000000"/>
                     </a:solidFill>
@@ -25933,14 +27192,14 @@
               </a:ln>
               <a:extLst>
                 <a:ext uri="{909E8E84-426E-40dd-AFC4-6F175D3DCCD1}">
-                  <a14:hiddenFill xmlns="" xmlns:a14="http://schemas.microsoft.com/office/drawing/2010/main">
+                  <a14:hiddenFill xmlns:a14="http://schemas.microsoft.com/office/drawing/2010/main" xmlns="">
                     <a:solidFill>
                       <a:srgbClr val="FFFFFF"/>
                     </a:solidFill>
                   </a14:hiddenFill>
                 </a:ext>
                 <a:ext uri="{91240B29-F687-4f45-9708-019B960494DF}">
-                  <a14:hiddenLine xmlns="" xmlns:a14="http://schemas.microsoft.com/office/drawing/2010/main" w="12700">
+                  <a14:hiddenLine xmlns:a14="http://schemas.microsoft.com/office/drawing/2010/main" xmlns="" w="12700">
                     <a:solidFill>
                       <a:srgbClr val="000000"/>
                     </a:solidFill>
@@ -26113,7 +27372,7 @@
               </a:ln>
               <a:extLst>
                 <a:ext uri="{909E8E84-426E-40dd-AFC4-6F175D3DCCD1}">
-                  <a14:hiddenFill xmlns="" xmlns:a14="http://schemas.microsoft.com/office/drawing/2010/main">
+                  <a14:hiddenFill xmlns:a14="http://schemas.microsoft.com/office/drawing/2010/main" xmlns="">
                     <a:noFill/>
                   </a14:hiddenFill>
                 </a:ext>
@@ -26154,7 +27413,7 @@
               </a:ln>
               <a:extLst>
                 <a:ext uri="{909E8E84-426E-40dd-AFC4-6F175D3DCCD1}">
-                  <a14:hiddenFill xmlns="" xmlns:a14="http://schemas.microsoft.com/office/drawing/2010/main">
+                  <a14:hiddenFill xmlns:a14="http://schemas.microsoft.com/office/drawing/2010/main" xmlns="">
                     <a:noFill/>
                   </a14:hiddenFill>
                 </a:ext>
@@ -26195,7 +27454,7 @@
               </a:ln>
               <a:extLst>
                 <a:ext uri="{909E8E84-426E-40dd-AFC4-6F175D3DCCD1}">
-                  <a14:hiddenFill xmlns="" xmlns:a14="http://schemas.microsoft.com/office/drawing/2010/main">
+                  <a14:hiddenFill xmlns:a14="http://schemas.microsoft.com/office/drawing/2010/main" xmlns="">
                     <a:solidFill>
                       <a:srgbClr val="FFFFFF"/>
                     </a:solidFill>
@@ -26354,7 +27613,7 @@
               </a:ln>
               <a:extLst>
                 <a:ext uri="{909E8E84-426E-40dd-AFC4-6F175D3DCCD1}">
-                  <a14:hiddenFill xmlns="" xmlns:a14="http://schemas.microsoft.com/office/drawing/2010/main">
+                  <a14:hiddenFill xmlns:a14="http://schemas.microsoft.com/office/drawing/2010/main" xmlns="">
                     <a:solidFill>
                       <a:srgbClr val="FFFFFF"/>
                     </a:solidFill>
@@ -26513,7 +27772,7 @@
               </a:ln>
               <a:extLst>
                 <a:ext uri="{909E8E84-426E-40dd-AFC4-6F175D3DCCD1}">
-                  <a14:hiddenFill xmlns="" xmlns:a14="http://schemas.microsoft.com/office/drawing/2010/main">
+                  <a14:hiddenFill xmlns:a14="http://schemas.microsoft.com/office/drawing/2010/main" xmlns="">
                     <a:solidFill>
                       <a:srgbClr val="FFFFFF"/>
                     </a:solidFill>
@@ -26667,14 +27926,14 @@
               </a:ln>
               <a:extLst>
                 <a:ext uri="{909E8E84-426E-40dd-AFC4-6F175D3DCCD1}">
-                  <a14:hiddenFill xmlns="" xmlns:a14="http://schemas.microsoft.com/office/drawing/2010/main">
+                  <a14:hiddenFill xmlns:a14="http://schemas.microsoft.com/office/drawing/2010/main" xmlns="">
                     <a:solidFill>
                       <a:srgbClr val="FFFFFF"/>
                     </a:solidFill>
                   </a14:hiddenFill>
                 </a:ext>
                 <a:ext uri="{91240B29-F687-4f45-9708-019B960494DF}">
-                  <a14:hiddenLine xmlns="" xmlns:a14="http://schemas.microsoft.com/office/drawing/2010/main" w="12700">
+                  <a14:hiddenLine xmlns:a14="http://schemas.microsoft.com/office/drawing/2010/main" xmlns="" w="12700">
                     <a:solidFill>
                       <a:srgbClr val="000000"/>
                     </a:solidFill>
@@ -26842,14 +28101,14 @@
               </a:ln>
               <a:extLst>
                 <a:ext uri="{909E8E84-426E-40dd-AFC4-6F175D3DCCD1}">
-                  <a14:hiddenFill xmlns="" xmlns:a14="http://schemas.microsoft.com/office/drawing/2010/main">
+                  <a14:hiddenFill xmlns:a14="http://schemas.microsoft.com/office/drawing/2010/main" xmlns="">
                     <a:solidFill>
                       <a:srgbClr val="FFFFFF"/>
                     </a:solidFill>
                   </a14:hiddenFill>
                 </a:ext>
                 <a:ext uri="{91240B29-F687-4f45-9708-019B960494DF}">
-                  <a14:hiddenLine xmlns="" xmlns:a14="http://schemas.microsoft.com/office/drawing/2010/main" w="12700">
+                  <a14:hiddenLine xmlns:a14="http://schemas.microsoft.com/office/drawing/2010/main" xmlns="" w="12700">
                     <a:solidFill>
                       <a:srgbClr val="000000"/>
                     </a:solidFill>
@@ -27022,7 +28281,7 @@
               </a:ln>
               <a:extLst>
                 <a:ext uri="{909E8E84-426E-40dd-AFC4-6F175D3DCCD1}">
-                  <a14:hiddenFill xmlns="" xmlns:a14="http://schemas.microsoft.com/office/drawing/2010/main">
+                  <a14:hiddenFill xmlns:a14="http://schemas.microsoft.com/office/drawing/2010/main" xmlns="">
                     <a:noFill/>
                   </a14:hiddenFill>
                 </a:ext>
@@ -27063,7 +28322,7 @@
               </a:ln>
               <a:extLst>
                 <a:ext uri="{909E8E84-426E-40dd-AFC4-6F175D3DCCD1}">
-                  <a14:hiddenFill xmlns="" xmlns:a14="http://schemas.microsoft.com/office/drawing/2010/main">
+                  <a14:hiddenFill xmlns:a14="http://schemas.microsoft.com/office/drawing/2010/main" xmlns="">
                     <a:noFill/>
                   </a14:hiddenFill>
                 </a:ext>
@@ -27104,7 +28363,7 @@
               </a:ln>
               <a:extLst>
                 <a:ext uri="{909E8E84-426E-40dd-AFC4-6F175D3DCCD1}">
-                  <a14:hiddenFill xmlns="" xmlns:a14="http://schemas.microsoft.com/office/drawing/2010/main">
+                  <a14:hiddenFill xmlns:a14="http://schemas.microsoft.com/office/drawing/2010/main" xmlns="">
                     <a:solidFill>
                       <a:srgbClr val="FFFFFF"/>
                     </a:solidFill>
@@ -27263,7 +28522,7 @@
               </a:ln>
               <a:extLst>
                 <a:ext uri="{909E8E84-426E-40dd-AFC4-6F175D3DCCD1}">
-                  <a14:hiddenFill xmlns="" xmlns:a14="http://schemas.microsoft.com/office/drawing/2010/main">
+                  <a14:hiddenFill xmlns:a14="http://schemas.microsoft.com/office/drawing/2010/main" xmlns="">
                     <a:noFill/>
                   </a14:hiddenFill>
                 </a:ext>
@@ -27304,7 +28563,7 @@
               </a:ln>
               <a:extLst>
                 <a:ext uri="{909E8E84-426E-40dd-AFC4-6F175D3DCCD1}">
-                  <a14:hiddenFill xmlns="" xmlns:a14="http://schemas.microsoft.com/office/drawing/2010/main">
+                  <a14:hiddenFill xmlns:a14="http://schemas.microsoft.com/office/drawing/2010/main" xmlns="">
                     <a:noFill/>
                   </a14:hiddenFill>
                 </a:ext>
@@ -27340,14 +28599,14 @@
               </a:ln>
               <a:extLst>
                 <a:ext uri="{909E8E84-426E-40dd-AFC4-6F175D3DCCD1}">
-                  <a14:hiddenFill xmlns="" xmlns:a14="http://schemas.microsoft.com/office/drawing/2010/main">
+                  <a14:hiddenFill xmlns:a14="http://schemas.microsoft.com/office/drawing/2010/main" xmlns="">
                     <a:solidFill>
                       <a:srgbClr val="FFFFFF"/>
                     </a:solidFill>
                   </a14:hiddenFill>
                 </a:ext>
                 <a:ext uri="{91240B29-F687-4f45-9708-019B960494DF}">
-                  <a14:hiddenLine xmlns="" xmlns:a14="http://schemas.microsoft.com/office/drawing/2010/main" w="12700">
+                  <a14:hiddenLine xmlns:a14="http://schemas.microsoft.com/office/drawing/2010/main" xmlns="" w="12700">
                     <a:solidFill>
                       <a:srgbClr val="000000"/>
                     </a:solidFill>
@@ -27515,14 +28774,14 @@
               </a:ln>
               <a:extLst>
                 <a:ext uri="{909E8E84-426E-40dd-AFC4-6F175D3DCCD1}">
-                  <a14:hiddenFill xmlns="" xmlns:a14="http://schemas.microsoft.com/office/drawing/2010/main">
+                  <a14:hiddenFill xmlns:a14="http://schemas.microsoft.com/office/drawing/2010/main" xmlns="">
                     <a:solidFill>
                       <a:srgbClr val="FFFFFF"/>
                     </a:solidFill>
                   </a14:hiddenFill>
                 </a:ext>
                 <a:ext uri="{91240B29-F687-4f45-9708-019B960494DF}">
-                  <a14:hiddenLine xmlns="" xmlns:a14="http://schemas.microsoft.com/office/drawing/2010/main" w="12700">
+                  <a14:hiddenLine xmlns:a14="http://schemas.microsoft.com/office/drawing/2010/main" xmlns="" w="12700">
                     <a:solidFill>
                       <a:srgbClr val="000000"/>
                     </a:solidFill>
@@ -27679,7 +28938,7 @@
 </p:sld>
 </file>
 
-<file path=ppt/slides/slide27.xml><?xml version="1.0" encoding="utf-8"?>
+<file path=ppt/slides/slide28.xml><?xml version="1.0" encoding="utf-8"?>
 <p:sld xmlns:a="http://schemas.openxmlformats.org/drawingml/2006/main" xmlns:r="http://schemas.openxmlformats.org/officeDocument/2006/relationships" xmlns:p="http://schemas.openxmlformats.org/presentationml/2006/main">
   <p:cSld>
     <p:spTree>
@@ -30480,7 +31739,7 @@
 </p:sld>
 </file>
 
-<file path=ppt/slides/slide28.xml><?xml version="1.0" encoding="utf-8"?>
+<file path=ppt/slides/slide29.xml><?xml version="1.0" encoding="utf-8"?>
 <p:sld xmlns:a="http://schemas.openxmlformats.org/drawingml/2006/main" xmlns:r="http://schemas.openxmlformats.org/officeDocument/2006/relationships" xmlns:p="http://schemas.openxmlformats.org/presentationml/2006/main">
   <p:cSld>
     <p:spTree>
@@ -30720,7 +31979,479 @@
 </p:sld>
 </file>
 
-<file path=ppt/slides/slide29.xml><?xml version="1.0" encoding="utf-8"?>
+<file path=ppt/slides/slide3.xml><?xml version="1.0" encoding="utf-8"?>
+<p:sld xmlns:a="http://schemas.openxmlformats.org/drawingml/2006/main" xmlns:r="http://schemas.openxmlformats.org/officeDocument/2006/relationships" xmlns:p="http://schemas.openxmlformats.org/presentationml/2006/main">
+  <p:cSld>
+    <p:spTree>
+      <p:nvGrpSpPr>
+        <p:cNvPr id="1" name=""/>
+        <p:cNvGrpSpPr/>
+        <p:nvPr/>
+      </p:nvGrpSpPr>
+      <p:grpSpPr>
+        <a:xfrm>
+          <a:off x="0" y="0"/>
+          <a:ext cx="0" cy="0"/>
+          <a:chOff x="0" y="0"/>
+          <a:chExt cx="0" cy="0"/>
+        </a:xfrm>
+      </p:grpSpPr>
+      <p:sp>
+        <p:nvSpPr>
+          <p:cNvPr id="3" name="Rectangle 5">
+            <a:extLst>
+              <a:ext uri="{FF2B5EF4-FFF2-40B4-BE49-F238E27FC236}">
+                <a16:creationId xmlns:a16="http://schemas.microsoft.com/office/drawing/2014/main" id="{2A70859C-30BE-5D11-3082-EFC6EFED6D81}"/>
+              </a:ext>
+            </a:extLst>
+          </p:cNvPr>
+          <p:cNvSpPr>
+            <a:spLocks noChangeArrowheads="1"/>
+          </p:cNvSpPr>
+          <p:nvPr/>
+        </p:nvSpPr>
+        <p:spPr bwMode="auto">
+          <a:xfrm>
+            <a:off x="228600" y="3723888"/>
+            <a:ext cx="8686800" cy="2600712"/>
+          </a:xfrm>
+          <a:prstGeom prst="rect">
+            <a:avLst/>
+          </a:prstGeom>
+          <a:noFill/>
+          <a:ln>
+            <a:noFill/>
+          </a:ln>
+          <a:effectLst/>
+          <a:extLst>
+            <a:ext uri="{909E8E84-426E-40DD-AFC4-6F175D3DCCD1}">
+              <a14:hiddenFill xmlns:a14="http://schemas.microsoft.com/office/drawing/2010/main">
+                <a:solidFill>
+                  <a:schemeClr val="accent1"/>
+                </a:solidFill>
+              </a14:hiddenFill>
+            </a:ext>
+            <a:ext uri="{91240B29-F687-4F45-9708-019B960494DF}">
+              <a14:hiddenLine xmlns:a14="http://schemas.microsoft.com/office/drawing/2010/main" w="9525">
+                <a:solidFill>
+                  <a:schemeClr val="tx1"/>
+                </a:solidFill>
+                <a:miter lim="800000"/>
+                <a:headEnd/>
+                <a:tailEnd/>
+              </a14:hiddenLine>
+            </a:ext>
+            <a:ext uri="{AF507438-7753-43E0-B8FC-AC1667EBCBE1}">
+              <a14:hiddenEffects xmlns:a14="http://schemas.microsoft.com/office/drawing/2010/main">
+                <a:effectLst>
+                  <a:outerShdw dist="35921" dir="2700000" algn="ctr" rotWithShape="0">
+                    <a:schemeClr val="bg2"/>
+                  </a:outerShdw>
+                </a:effectLst>
+              </a14:hiddenEffects>
+            </a:ext>
+          </a:extLst>
+        </p:spPr>
+        <p:txBody>
+          <a:bodyPr vert="horz" wrap="square" lIns="91440" tIns="45720" rIns="91440" bIns="45720" numCol="1" anchor="ctr" anchorCtr="0" compatLnSpc="1">
+            <a:prstTxWarp prst="textNoShape">
+              <a:avLst/>
+            </a:prstTxWarp>
+            <a:spAutoFit/>
+          </a:bodyPr>
+          <a:lstStyle/>
+          <a:p>
+            <a:pPr marL="0" marR="0" lvl="0" indent="0" algn="l" defTabSz="914400" rtl="0" eaLnBrk="0" fontAlgn="base" latinLnBrk="0" hangingPunct="0">
+              <a:spcBef>
+                <a:spcPts val="1200"/>
+              </a:spcBef>
+              <a:spcAft>
+                <a:spcPct val="0"/>
+              </a:spcAft>
+              <a:buClrTx/>
+              <a:buSzTx/>
+              <a:buFontTx/>
+              <a:buNone/>
+              <a:tabLst>
+                <a:tab pos="2173288" algn="l"/>
+              </a:tabLst>
+            </a:pPr>
+            <a:r>
+              <a:rPr lang="en-US" altLang="en-US" sz="3200" dirty="0">
+                <a:latin typeface="Arial" panose="020B0604020202020204" pitchFamily="34" charset="0"/>
+              </a:rPr>
+              <a:t>	</a:t>
+            </a:r>
+            <a:r>
+              <a:rPr lang="en-US" altLang="en-US" sz="3200" b="1" dirty="0">
+                <a:latin typeface="Arial" panose="020B0604020202020204" pitchFamily="34" charset="0"/>
+              </a:rPr>
+              <a:t>T = (V, E)</a:t>
+            </a:r>
+          </a:p>
+          <a:p>
+            <a:pPr marL="0" marR="0" lvl="0" indent="0" algn="l" defTabSz="914400" rtl="0" eaLnBrk="0" fontAlgn="base" latinLnBrk="0" hangingPunct="0">
+              <a:spcBef>
+                <a:spcPts val="1800"/>
+              </a:spcBef>
+              <a:spcAft>
+                <a:spcPct val="0"/>
+              </a:spcAft>
+              <a:buClrTx/>
+              <a:buSzTx/>
+              <a:buFontTx/>
+              <a:buNone/>
+              <a:tabLst/>
+            </a:pPr>
+            <a:r>
+              <a:rPr lang="en-US" altLang="en-US" sz="3200" dirty="0">
+                <a:latin typeface="Arial" panose="020B0604020202020204" pitchFamily="34" charset="0"/>
+              </a:rPr>
+              <a:t>V = {A, B, C, D, E, F, G, H}</a:t>
+            </a:r>
+            <a:endParaRPr kumimoji="0" lang="en-US" altLang="en-US" sz="3200" b="0" i="0" u="none" strike="noStrike" cap="none" normalizeH="0" baseline="0" dirty="0">
+              <a:ln>
+                <a:noFill/>
+              </a:ln>
+              <a:solidFill>
+                <a:schemeClr val="tx1"/>
+              </a:solidFill>
+              <a:effectLst/>
+              <a:latin typeface="Arial" panose="020B0604020202020204" pitchFamily="34" charset="0"/>
+            </a:endParaRPr>
+          </a:p>
+          <a:p>
+            <a:pPr marL="0" marR="0" lvl="0" indent="0" algn="l" defTabSz="914400" rtl="0" eaLnBrk="0" fontAlgn="base" latinLnBrk="0" hangingPunct="0">
+              <a:spcBef>
+                <a:spcPts val="1200"/>
+              </a:spcBef>
+              <a:spcAft>
+                <a:spcPct val="0"/>
+              </a:spcAft>
+              <a:buClrTx/>
+              <a:buSzTx/>
+              <a:buFontTx/>
+              <a:buNone/>
+              <a:tabLst/>
+            </a:pPr>
+            <a:r>
+              <a:rPr lang="en-US" altLang="en-US" sz="3200" dirty="0">
+                <a:latin typeface="Arial" panose="020B0604020202020204" pitchFamily="34" charset="0"/>
+              </a:rPr>
+              <a:t>E = </a:t>
+            </a:r>
+            <a:r>
+              <a:rPr kumimoji="0" lang="en-US" altLang="en-US" sz="3200" b="0" i="0" u="none" strike="noStrike" cap="none" normalizeH="0" baseline="0" dirty="0">
+                <a:ln>
+                  <a:noFill/>
+                </a:ln>
+                <a:solidFill>
+                  <a:schemeClr val="tx1"/>
+                </a:solidFill>
+                <a:effectLst/>
+                <a:latin typeface="Arial" panose="020B0604020202020204" pitchFamily="34" charset="0"/>
+              </a:rPr>
+              <a:t>{(A,B),(A,C),(B,D),(B,E),(C,F),(D,H),(E,F),</a:t>
+            </a:r>
+          </a:p>
+          <a:p>
+            <a:pPr marL="0" marR="0" lvl="0" indent="0" algn="l" defTabSz="914400" rtl="0" eaLnBrk="0" fontAlgn="base" latinLnBrk="0" hangingPunct="0">
+              <a:spcBef>
+                <a:spcPts val="1200"/>
+              </a:spcBef>
+              <a:spcAft>
+                <a:spcPct val="0"/>
+              </a:spcAft>
+              <a:buClrTx/>
+              <a:buSzTx/>
+              <a:buFontTx/>
+              <a:buNone/>
+              <a:tabLst/>
+            </a:pPr>
+            <a:r>
+              <a:rPr kumimoji="0" lang="en-US" altLang="en-US" sz="3200" b="0" i="0" u="none" strike="noStrike" cap="none" normalizeH="0" baseline="0" dirty="0">
+                <a:ln>
+                  <a:noFill/>
+                </a:ln>
+                <a:solidFill>
+                  <a:schemeClr val="tx1"/>
+                </a:solidFill>
+                <a:effectLst/>
+                <a:latin typeface="Arial" panose="020B0604020202020204" pitchFamily="34" charset="0"/>
+              </a:rPr>
+              <a:t>        (E,G),(G,H)} </a:t>
+            </a:r>
+            <a:r>
+              <a:rPr kumimoji="0" lang="en-US" altLang="en-US" sz="3200" b="0" i="0" u="none" strike="noStrike" cap="none" normalizeH="0" baseline="0" dirty="0">
+                <a:ln>
+                  <a:noFill/>
+                </a:ln>
+                <a:solidFill>
+                  <a:srgbClr val="0000CC"/>
+                </a:solidFill>
+                <a:effectLst/>
+                <a:latin typeface="Abadi" panose="020B0604020104020204" pitchFamily="34" charset="0"/>
+                <a:sym typeface="Wingdings" panose="05000000000000000000" pitchFamily="2" charset="2"/>
+              </a:rPr>
+              <a:t> these are </a:t>
+            </a:r>
+            <a:r>
+              <a:rPr kumimoji="0" lang="en-US" altLang="en-US" sz="3200" b="0" i="0" u="sng" strike="noStrike" cap="none" normalizeH="0" baseline="0" dirty="0">
+                <a:ln>
+                  <a:noFill/>
+                </a:ln>
+                <a:solidFill>
+                  <a:srgbClr val="0000CC"/>
+                </a:solidFill>
+                <a:effectLst/>
+                <a:latin typeface="Abadi" panose="020B0604020104020204" pitchFamily="34" charset="0"/>
+                <a:sym typeface="Wingdings" panose="05000000000000000000" pitchFamily="2" charset="2"/>
+              </a:rPr>
+              <a:t>directed</a:t>
+            </a:r>
+            <a:r>
+              <a:rPr kumimoji="0" lang="en-US" altLang="en-US" sz="3200" b="0" i="0" u="none" strike="noStrike" cap="none" normalizeH="0" baseline="0" dirty="0">
+                <a:ln>
+                  <a:noFill/>
+                </a:ln>
+                <a:solidFill>
+                  <a:srgbClr val="0000CC"/>
+                </a:solidFill>
+                <a:effectLst/>
+                <a:latin typeface="Abadi" panose="020B0604020104020204" pitchFamily="34" charset="0"/>
+                <a:sym typeface="Wingdings" panose="05000000000000000000" pitchFamily="2" charset="2"/>
+              </a:rPr>
+              <a:t> edges</a:t>
+            </a:r>
+            <a:endParaRPr kumimoji="0" lang="en-US" altLang="en-US" sz="3200" b="0" i="0" u="none" strike="noStrike" cap="none" normalizeH="0" baseline="0" dirty="0">
+              <a:ln>
+                <a:noFill/>
+              </a:ln>
+              <a:solidFill>
+                <a:srgbClr val="0000CC"/>
+              </a:solidFill>
+              <a:effectLst/>
+              <a:latin typeface="Abadi" panose="020B0604020104020204" pitchFamily="34" charset="0"/>
+            </a:endParaRPr>
+          </a:p>
+        </p:txBody>
+      </p:sp>
+      <p:sp>
+        <p:nvSpPr>
+          <p:cNvPr id="4" name="TextBox 3">
+            <a:extLst>
+              <a:ext uri="{FF2B5EF4-FFF2-40B4-BE49-F238E27FC236}">
+                <a16:creationId xmlns:a16="http://schemas.microsoft.com/office/drawing/2014/main" id="{546AF47E-9FA6-A106-8EF3-F0FCC54D97AA}"/>
+              </a:ext>
+            </a:extLst>
+          </p:cNvPr>
+          <p:cNvSpPr txBox="1"/>
+          <p:nvPr/>
+        </p:nvSpPr>
+        <p:spPr>
+          <a:xfrm>
+            <a:off x="1542965" y="300335"/>
+            <a:ext cx="5439310" cy="923330"/>
+          </a:xfrm>
+          <a:prstGeom prst="rect">
+            <a:avLst/>
+          </a:prstGeom>
+          <a:noFill/>
+        </p:spPr>
+        <p:txBody>
+          <a:bodyPr wrap="none" rtlCol="0">
+            <a:spAutoFit/>
+          </a:bodyPr>
+          <a:lstStyle/>
+          <a:p>
+            <a:r>
+              <a:rPr lang="en-US" sz="5400" b="1" dirty="0"/>
+              <a:t>What is a tree?</a:t>
+            </a:r>
+          </a:p>
+        </p:txBody>
+      </p:sp>
+      <p:sp>
+        <p:nvSpPr>
+          <p:cNvPr id="6" name="TextBox 5">
+            <a:extLst>
+              <a:ext uri="{FF2B5EF4-FFF2-40B4-BE49-F238E27FC236}">
+                <a16:creationId xmlns:a16="http://schemas.microsoft.com/office/drawing/2014/main" id="{53876BCD-77E1-375E-2146-3FFCE2708521}"/>
+              </a:ext>
+            </a:extLst>
+          </p:cNvPr>
+          <p:cNvSpPr txBox="1"/>
+          <p:nvPr/>
+        </p:nvSpPr>
+        <p:spPr>
+          <a:xfrm>
+            <a:off x="418321" y="1697829"/>
+            <a:ext cx="5632580" cy="1754326"/>
+          </a:xfrm>
+          <a:prstGeom prst="rect">
+            <a:avLst/>
+          </a:prstGeom>
+          <a:noFill/>
+        </p:spPr>
+        <p:txBody>
+          <a:bodyPr wrap="square">
+            <a:spAutoFit/>
+          </a:bodyPr>
+          <a:lstStyle/>
+          <a:p>
+            <a:pPr marL="0" marR="0" lvl="0" indent="0" algn="l" defTabSz="914400" rtl="0" eaLnBrk="0" fontAlgn="base" latinLnBrk="0" hangingPunct="0">
+              <a:lnSpc>
+                <a:spcPct val="100000"/>
+              </a:lnSpc>
+              <a:spcBef>
+                <a:spcPct val="0"/>
+              </a:spcBef>
+              <a:spcAft>
+                <a:spcPct val="0"/>
+              </a:spcAft>
+              <a:buClrTx/>
+              <a:buSzTx/>
+              <a:buFontTx/>
+              <a:buNone/>
+              <a:tabLst/>
+            </a:pPr>
+            <a:r>
+              <a:rPr kumimoji="0" lang="en-US" altLang="en-US" sz="3600" b="0" i="0" u="none" strike="noStrike" cap="none" normalizeH="0" baseline="0" dirty="0">
+                <a:ln>
+                  <a:noFill/>
+                </a:ln>
+                <a:solidFill>
+                  <a:schemeClr val="tx1"/>
+                </a:solidFill>
+                <a:effectLst/>
+                <a:latin typeface="Arial" panose="020B0604020202020204" pitchFamily="34" charset="0"/>
+              </a:rPr>
+              <a:t>A tre</a:t>
+            </a:r>
+            <a:r>
+              <a:rPr lang="en-US" altLang="en-US" sz="3600" dirty="0">
+                <a:latin typeface="Arial" panose="020B0604020202020204" pitchFamily="34" charset="0"/>
+              </a:rPr>
+              <a:t>e is a graph in which there is exactly one path connecting any two nodes</a:t>
+            </a:r>
+            <a:r>
+              <a:rPr kumimoji="0" lang="en-US" altLang="en-US" sz="3600" b="0" i="0" u="none" strike="noStrike" cap="none" normalizeH="0" baseline="0" dirty="0">
+                <a:ln>
+                  <a:noFill/>
+                </a:ln>
+                <a:solidFill>
+                  <a:schemeClr val="tx1"/>
+                </a:solidFill>
+                <a:effectLst/>
+                <a:latin typeface="Arial" panose="020B0604020202020204" pitchFamily="34" charset="0"/>
+              </a:rPr>
+              <a:t>.</a:t>
+            </a:r>
+          </a:p>
+        </p:txBody>
+      </p:sp>
+      <p:cxnSp>
+        <p:nvCxnSpPr>
+          <p:cNvPr id="8" name="Straight Arrow Connector 7">
+            <a:extLst>
+              <a:ext uri="{FF2B5EF4-FFF2-40B4-BE49-F238E27FC236}">
+                <a16:creationId xmlns:a16="http://schemas.microsoft.com/office/drawing/2014/main" id="{897FEA85-6823-036E-B1D5-3F9E6F8244AC}"/>
+              </a:ext>
+            </a:extLst>
+          </p:cNvPr>
+          <p:cNvCxnSpPr>
+            <a:cxnSpLocks/>
+          </p:cNvCxnSpPr>
+          <p:nvPr/>
+        </p:nvCxnSpPr>
+        <p:spPr bwMode="auto">
+          <a:xfrm flipV="1">
+            <a:off x="4343400" y="3574718"/>
+            <a:ext cx="1600200" cy="387682"/>
+          </a:xfrm>
+          <a:prstGeom prst="straightConnector1">
+            <a:avLst/>
+          </a:prstGeom>
+          <a:ln w="38100">
+            <a:prstDash val="sysDot"/>
+            <a:headEnd type="none" w="sm" len="sm"/>
+            <a:tailEnd type="triangle"/>
+          </a:ln>
+        </p:spPr>
+        <p:style>
+          <a:lnRef idx="1">
+            <a:schemeClr val="accent2"/>
+          </a:lnRef>
+          <a:fillRef idx="0">
+            <a:schemeClr val="accent2"/>
+          </a:fillRef>
+          <a:effectRef idx="0">
+            <a:schemeClr val="accent2"/>
+          </a:effectRef>
+          <a:fontRef idx="minor">
+            <a:schemeClr val="tx1"/>
+          </a:fontRef>
+        </p:style>
+      </p:cxnSp>
+      <p:pic>
+        <p:nvPicPr>
+          <p:cNvPr id="2" name="Picture 4" descr="Difference Between Tree and Graph (with Comparison chart) - Tech Differences">
+            <a:extLst>
+              <a:ext uri="{FF2B5EF4-FFF2-40B4-BE49-F238E27FC236}">
+                <a16:creationId xmlns:a16="http://schemas.microsoft.com/office/drawing/2014/main" id="{C837E834-A2DE-F358-C732-9F1749106AAF}"/>
+              </a:ext>
+            </a:extLst>
+          </p:cNvPr>
+          <p:cNvPicPr>
+            <a:picLocks noChangeAspect="1" noChangeArrowheads="1"/>
+          </p:cNvPicPr>
+          <p:nvPr/>
+        </p:nvPicPr>
+        <p:blipFill rotWithShape="1">
+          <a:blip r:embed="rId3">
+            <a:extLst>
+              <a:ext uri="{28A0092B-C50C-407E-A947-70E740481C1C}">
+                <a14:useLocalDpi xmlns:a14="http://schemas.microsoft.com/office/drawing/2010/main" val="0"/>
+              </a:ext>
+            </a:extLst>
+          </a:blip>
+          <a:srcRect l="1861" t="4217" r="51898" b="15782"/>
+          <a:stretch/>
+        </p:blipFill>
+        <p:spPr bwMode="auto">
+          <a:xfrm>
+            <a:off x="6068007" y="1673058"/>
+            <a:ext cx="2847393" cy="3093153"/>
+          </a:xfrm>
+          <a:prstGeom prst="rect">
+            <a:avLst/>
+          </a:prstGeom>
+          <a:noFill/>
+          <a:extLst>
+            <a:ext uri="{909E8E84-426E-40DD-AFC4-6F175D3DCCD1}">
+              <a14:hiddenFill xmlns:a14="http://schemas.microsoft.com/office/drawing/2010/main">
+                <a:solidFill>
+                  <a:srgbClr val="FFFFFF"/>
+                </a:solidFill>
+              </a14:hiddenFill>
+            </a:ext>
+          </a:extLst>
+        </p:spPr>
+      </p:pic>
+    </p:spTree>
+    <p:extLst>
+      <p:ext uri="{BB962C8B-B14F-4D97-AF65-F5344CB8AC3E}">
+        <p14:creationId xmlns:p14="http://schemas.microsoft.com/office/powerpoint/2010/main" val="2029425185"/>
+      </p:ext>
+    </p:extLst>
+  </p:cSld>
+  <p:clrMapOvr>
+    <a:masterClrMapping/>
+  </p:clrMapOvr>
+</p:sld>
+</file>
+
+<file path=ppt/slides/slide30.xml><?xml version="1.0" encoding="utf-8"?>
 <p:sld xmlns:a="http://schemas.openxmlformats.org/drawingml/2006/main" xmlns:r="http://schemas.openxmlformats.org/officeDocument/2006/relationships" xmlns:p="http://schemas.openxmlformats.org/presentationml/2006/main">
   <p:cSld>
     <p:spTree>
@@ -30780,14 +32511,14 @@
           <a:noFill/>
           <a:extLst>
             <a:ext uri="{909E8E84-426E-40dd-AFC4-6F175D3DCCD1}">
-              <a14:hiddenFill xmlns:a14="http://schemas.microsoft.com/office/drawing/2010/main" xmlns="">
+              <a14:hiddenFill xmlns="" xmlns:a14="http://schemas.microsoft.com/office/drawing/2010/main">
                 <a:solidFill>
                   <a:srgbClr val="FFFFFF"/>
                 </a:solidFill>
               </a14:hiddenFill>
             </a:ext>
             <a:ext uri="{91240B29-F687-4f45-9708-019B960494DF}">
-              <a14:hiddenLine xmlns:a14="http://schemas.microsoft.com/office/drawing/2010/main" xmlns="" w="9525">
+              <a14:hiddenLine xmlns="" xmlns:a14="http://schemas.microsoft.com/office/drawing/2010/main" w="9525">
                 <a:solidFill>
                   <a:srgbClr val="000000"/>
                 </a:solidFill>
@@ -30933,7 +32664,7 @@
                   <a:spcPct val="80000"/>
                 </a:lnSpc>
               </a:pPr>
-              <a:t>29</a:t>
+              <a:t>30</a:t>
             </a:fld>
             <a:endParaRPr lang="en-US" altLang="en-US" sz="1200">
               <a:solidFill>
@@ -31026,479 +32757,7 @@
 </p:sld>
 </file>
 
-<file path=ppt/slides/slide3.xml><?xml version="1.0" encoding="utf-8"?>
-<p:sld xmlns:a="http://schemas.openxmlformats.org/drawingml/2006/main" xmlns:r="http://schemas.openxmlformats.org/officeDocument/2006/relationships" xmlns:p="http://schemas.openxmlformats.org/presentationml/2006/main">
-  <p:cSld>
-    <p:spTree>
-      <p:nvGrpSpPr>
-        <p:cNvPr id="1" name=""/>
-        <p:cNvGrpSpPr/>
-        <p:nvPr/>
-      </p:nvGrpSpPr>
-      <p:grpSpPr>
-        <a:xfrm>
-          <a:off x="0" y="0"/>
-          <a:ext cx="0" cy="0"/>
-          <a:chOff x="0" y="0"/>
-          <a:chExt cx="0" cy="0"/>
-        </a:xfrm>
-      </p:grpSpPr>
-      <p:sp>
-        <p:nvSpPr>
-          <p:cNvPr id="3" name="Rectangle 5">
-            <a:extLst>
-              <a:ext uri="{FF2B5EF4-FFF2-40B4-BE49-F238E27FC236}">
-                <a16:creationId xmlns:a16="http://schemas.microsoft.com/office/drawing/2014/main" id="{2A70859C-30BE-5D11-3082-EFC6EFED6D81}"/>
-              </a:ext>
-            </a:extLst>
-          </p:cNvPr>
-          <p:cNvSpPr>
-            <a:spLocks noChangeArrowheads="1"/>
-          </p:cNvSpPr>
-          <p:nvPr/>
-        </p:nvSpPr>
-        <p:spPr bwMode="auto">
-          <a:xfrm>
-            <a:off x="228600" y="3723888"/>
-            <a:ext cx="8686800" cy="2600712"/>
-          </a:xfrm>
-          <a:prstGeom prst="rect">
-            <a:avLst/>
-          </a:prstGeom>
-          <a:noFill/>
-          <a:ln>
-            <a:noFill/>
-          </a:ln>
-          <a:effectLst/>
-          <a:extLst>
-            <a:ext uri="{909E8E84-426E-40DD-AFC4-6F175D3DCCD1}">
-              <a14:hiddenFill xmlns:a14="http://schemas.microsoft.com/office/drawing/2010/main">
-                <a:solidFill>
-                  <a:schemeClr val="accent1"/>
-                </a:solidFill>
-              </a14:hiddenFill>
-            </a:ext>
-            <a:ext uri="{91240B29-F687-4F45-9708-019B960494DF}">
-              <a14:hiddenLine xmlns:a14="http://schemas.microsoft.com/office/drawing/2010/main" w="9525">
-                <a:solidFill>
-                  <a:schemeClr val="tx1"/>
-                </a:solidFill>
-                <a:miter lim="800000"/>
-                <a:headEnd/>
-                <a:tailEnd/>
-              </a14:hiddenLine>
-            </a:ext>
-            <a:ext uri="{AF507438-7753-43E0-B8FC-AC1667EBCBE1}">
-              <a14:hiddenEffects xmlns:a14="http://schemas.microsoft.com/office/drawing/2010/main">
-                <a:effectLst>
-                  <a:outerShdw dist="35921" dir="2700000" algn="ctr" rotWithShape="0">
-                    <a:schemeClr val="bg2"/>
-                  </a:outerShdw>
-                </a:effectLst>
-              </a14:hiddenEffects>
-            </a:ext>
-          </a:extLst>
-        </p:spPr>
-        <p:txBody>
-          <a:bodyPr vert="horz" wrap="square" lIns="91440" tIns="45720" rIns="91440" bIns="45720" numCol="1" anchor="ctr" anchorCtr="0" compatLnSpc="1">
-            <a:prstTxWarp prst="textNoShape">
-              <a:avLst/>
-            </a:prstTxWarp>
-            <a:spAutoFit/>
-          </a:bodyPr>
-          <a:lstStyle/>
-          <a:p>
-            <a:pPr marL="0" marR="0" lvl="0" indent="0" algn="l" defTabSz="914400" rtl="0" eaLnBrk="0" fontAlgn="base" latinLnBrk="0" hangingPunct="0">
-              <a:spcBef>
-                <a:spcPts val="1200"/>
-              </a:spcBef>
-              <a:spcAft>
-                <a:spcPct val="0"/>
-              </a:spcAft>
-              <a:buClrTx/>
-              <a:buSzTx/>
-              <a:buFontTx/>
-              <a:buNone/>
-              <a:tabLst>
-                <a:tab pos="2173288" algn="l"/>
-              </a:tabLst>
-            </a:pPr>
-            <a:r>
-              <a:rPr lang="en-US" altLang="en-US" sz="3200" dirty="0">
-                <a:latin typeface="Arial" panose="020B0604020202020204" pitchFamily="34" charset="0"/>
-              </a:rPr>
-              <a:t>	</a:t>
-            </a:r>
-            <a:r>
-              <a:rPr lang="en-US" altLang="en-US" sz="3200" b="1" dirty="0">
-                <a:latin typeface="Arial" panose="020B0604020202020204" pitchFamily="34" charset="0"/>
-              </a:rPr>
-              <a:t>T = (V, E)</a:t>
-            </a:r>
-          </a:p>
-          <a:p>
-            <a:pPr marL="0" marR="0" lvl="0" indent="0" algn="l" defTabSz="914400" rtl="0" eaLnBrk="0" fontAlgn="base" latinLnBrk="0" hangingPunct="0">
-              <a:spcBef>
-                <a:spcPts val="1800"/>
-              </a:spcBef>
-              <a:spcAft>
-                <a:spcPct val="0"/>
-              </a:spcAft>
-              <a:buClrTx/>
-              <a:buSzTx/>
-              <a:buFontTx/>
-              <a:buNone/>
-              <a:tabLst/>
-            </a:pPr>
-            <a:r>
-              <a:rPr lang="en-US" altLang="en-US" sz="3200" dirty="0">
-                <a:latin typeface="Arial" panose="020B0604020202020204" pitchFamily="34" charset="0"/>
-              </a:rPr>
-              <a:t>V = {A, B, C, D, E, F, G, H}</a:t>
-            </a:r>
-            <a:endParaRPr kumimoji="0" lang="en-US" altLang="en-US" sz="3200" b="0" i="0" u="none" strike="noStrike" cap="none" normalizeH="0" baseline="0" dirty="0">
-              <a:ln>
-                <a:noFill/>
-              </a:ln>
-              <a:solidFill>
-                <a:schemeClr val="tx1"/>
-              </a:solidFill>
-              <a:effectLst/>
-              <a:latin typeface="Arial" panose="020B0604020202020204" pitchFamily="34" charset="0"/>
-            </a:endParaRPr>
-          </a:p>
-          <a:p>
-            <a:pPr marL="0" marR="0" lvl="0" indent="0" algn="l" defTabSz="914400" rtl="0" eaLnBrk="0" fontAlgn="base" latinLnBrk="0" hangingPunct="0">
-              <a:spcBef>
-                <a:spcPts val="1200"/>
-              </a:spcBef>
-              <a:spcAft>
-                <a:spcPct val="0"/>
-              </a:spcAft>
-              <a:buClrTx/>
-              <a:buSzTx/>
-              <a:buFontTx/>
-              <a:buNone/>
-              <a:tabLst/>
-            </a:pPr>
-            <a:r>
-              <a:rPr lang="en-US" altLang="en-US" sz="3200" dirty="0">
-                <a:latin typeface="Arial" panose="020B0604020202020204" pitchFamily="34" charset="0"/>
-              </a:rPr>
-              <a:t>E = </a:t>
-            </a:r>
-            <a:r>
-              <a:rPr kumimoji="0" lang="en-US" altLang="en-US" sz="3200" b="0" i="0" u="none" strike="noStrike" cap="none" normalizeH="0" baseline="0" dirty="0">
-                <a:ln>
-                  <a:noFill/>
-                </a:ln>
-                <a:solidFill>
-                  <a:schemeClr val="tx1"/>
-                </a:solidFill>
-                <a:effectLst/>
-                <a:latin typeface="Arial" panose="020B0604020202020204" pitchFamily="34" charset="0"/>
-              </a:rPr>
-              <a:t>{(A,B),(A,C),(B,D),(B,E),(C,F),(D,H),(E,F),</a:t>
-            </a:r>
-          </a:p>
-          <a:p>
-            <a:pPr marL="0" marR="0" lvl="0" indent="0" algn="l" defTabSz="914400" rtl="0" eaLnBrk="0" fontAlgn="base" latinLnBrk="0" hangingPunct="0">
-              <a:spcBef>
-                <a:spcPts val="1200"/>
-              </a:spcBef>
-              <a:spcAft>
-                <a:spcPct val="0"/>
-              </a:spcAft>
-              <a:buClrTx/>
-              <a:buSzTx/>
-              <a:buFontTx/>
-              <a:buNone/>
-              <a:tabLst/>
-            </a:pPr>
-            <a:r>
-              <a:rPr kumimoji="0" lang="en-US" altLang="en-US" sz="3200" b="0" i="0" u="none" strike="noStrike" cap="none" normalizeH="0" baseline="0" dirty="0">
-                <a:ln>
-                  <a:noFill/>
-                </a:ln>
-                <a:solidFill>
-                  <a:schemeClr val="tx1"/>
-                </a:solidFill>
-                <a:effectLst/>
-                <a:latin typeface="Arial" panose="020B0604020202020204" pitchFamily="34" charset="0"/>
-              </a:rPr>
-              <a:t>        (E,G),(G,H)} </a:t>
-            </a:r>
-            <a:r>
-              <a:rPr kumimoji="0" lang="en-US" altLang="en-US" sz="3200" b="0" i="0" u="none" strike="noStrike" cap="none" normalizeH="0" baseline="0" dirty="0">
-                <a:ln>
-                  <a:noFill/>
-                </a:ln>
-                <a:solidFill>
-                  <a:srgbClr val="0000CC"/>
-                </a:solidFill>
-                <a:effectLst/>
-                <a:latin typeface="Abadi" panose="020B0604020104020204" pitchFamily="34" charset="0"/>
-                <a:sym typeface="Wingdings" panose="05000000000000000000" pitchFamily="2" charset="2"/>
-              </a:rPr>
-              <a:t> these are </a:t>
-            </a:r>
-            <a:r>
-              <a:rPr kumimoji="0" lang="en-US" altLang="en-US" sz="3200" b="0" i="0" u="sng" strike="noStrike" cap="none" normalizeH="0" baseline="0" dirty="0">
-                <a:ln>
-                  <a:noFill/>
-                </a:ln>
-                <a:solidFill>
-                  <a:srgbClr val="0000CC"/>
-                </a:solidFill>
-                <a:effectLst/>
-                <a:latin typeface="Abadi" panose="020B0604020104020204" pitchFamily="34" charset="0"/>
-                <a:sym typeface="Wingdings" panose="05000000000000000000" pitchFamily="2" charset="2"/>
-              </a:rPr>
-              <a:t>directed</a:t>
-            </a:r>
-            <a:r>
-              <a:rPr kumimoji="0" lang="en-US" altLang="en-US" sz="3200" b="0" i="0" u="none" strike="noStrike" cap="none" normalizeH="0" baseline="0" dirty="0">
-                <a:ln>
-                  <a:noFill/>
-                </a:ln>
-                <a:solidFill>
-                  <a:srgbClr val="0000CC"/>
-                </a:solidFill>
-                <a:effectLst/>
-                <a:latin typeface="Abadi" panose="020B0604020104020204" pitchFamily="34" charset="0"/>
-                <a:sym typeface="Wingdings" panose="05000000000000000000" pitchFamily="2" charset="2"/>
-              </a:rPr>
-              <a:t> edges</a:t>
-            </a:r>
-            <a:endParaRPr kumimoji="0" lang="en-US" altLang="en-US" sz="3200" b="0" i="0" u="none" strike="noStrike" cap="none" normalizeH="0" baseline="0" dirty="0">
-              <a:ln>
-                <a:noFill/>
-              </a:ln>
-              <a:solidFill>
-                <a:srgbClr val="0000CC"/>
-              </a:solidFill>
-              <a:effectLst/>
-              <a:latin typeface="Abadi" panose="020B0604020104020204" pitchFamily="34" charset="0"/>
-            </a:endParaRPr>
-          </a:p>
-        </p:txBody>
-      </p:sp>
-      <p:sp>
-        <p:nvSpPr>
-          <p:cNvPr id="4" name="TextBox 3">
-            <a:extLst>
-              <a:ext uri="{FF2B5EF4-FFF2-40B4-BE49-F238E27FC236}">
-                <a16:creationId xmlns:a16="http://schemas.microsoft.com/office/drawing/2014/main" id="{546AF47E-9FA6-A106-8EF3-F0FCC54D97AA}"/>
-              </a:ext>
-            </a:extLst>
-          </p:cNvPr>
-          <p:cNvSpPr txBox="1"/>
-          <p:nvPr/>
-        </p:nvSpPr>
-        <p:spPr>
-          <a:xfrm>
-            <a:off x="1542965" y="300335"/>
-            <a:ext cx="5439310" cy="923330"/>
-          </a:xfrm>
-          <a:prstGeom prst="rect">
-            <a:avLst/>
-          </a:prstGeom>
-          <a:noFill/>
-        </p:spPr>
-        <p:txBody>
-          <a:bodyPr wrap="none" rtlCol="0">
-            <a:spAutoFit/>
-          </a:bodyPr>
-          <a:lstStyle/>
-          <a:p>
-            <a:r>
-              <a:rPr lang="en-US" sz="5400" b="1" dirty="0"/>
-              <a:t>What is a tree?</a:t>
-            </a:r>
-          </a:p>
-        </p:txBody>
-      </p:sp>
-      <p:sp>
-        <p:nvSpPr>
-          <p:cNvPr id="6" name="TextBox 5">
-            <a:extLst>
-              <a:ext uri="{FF2B5EF4-FFF2-40B4-BE49-F238E27FC236}">
-                <a16:creationId xmlns:a16="http://schemas.microsoft.com/office/drawing/2014/main" id="{53876BCD-77E1-375E-2146-3FFCE2708521}"/>
-              </a:ext>
-            </a:extLst>
-          </p:cNvPr>
-          <p:cNvSpPr txBox="1"/>
-          <p:nvPr/>
-        </p:nvSpPr>
-        <p:spPr>
-          <a:xfrm>
-            <a:off x="418321" y="1697829"/>
-            <a:ext cx="5632580" cy="1754326"/>
-          </a:xfrm>
-          <a:prstGeom prst="rect">
-            <a:avLst/>
-          </a:prstGeom>
-          <a:noFill/>
-        </p:spPr>
-        <p:txBody>
-          <a:bodyPr wrap="square">
-            <a:spAutoFit/>
-          </a:bodyPr>
-          <a:lstStyle/>
-          <a:p>
-            <a:pPr marL="0" marR="0" lvl="0" indent="0" algn="l" defTabSz="914400" rtl="0" eaLnBrk="0" fontAlgn="base" latinLnBrk="0" hangingPunct="0">
-              <a:lnSpc>
-                <a:spcPct val="100000"/>
-              </a:lnSpc>
-              <a:spcBef>
-                <a:spcPct val="0"/>
-              </a:spcBef>
-              <a:spcAft>
-                <a:spcPct val="0"/>
-              </a:spcAft>
-              <a:buClrTx/>
-              <a:buSzTx/>
-              <a:buFontTx/>
-              <a:buNone/>
-              <a:tabLst/>
-            </a:pPr>
-            <a:r>
-              <a:rPr kumimoji="0" lang="en-US" altLang="en-US" sz="3600" b="0" i="0" u="none" strike="noStrike" cap="none" normalizeH="0" baseline="0" dirty="0">
-                <a:ln>
-                  <a:noFill/>
-                </a:ln>
-                <a:solidFill>
-                  <a:schemeClr val="tx1"/>
-                </a:solidFill>
-                <a:effectLst/>
-                <a:latin typeface="Arial" panose="020B0604020202020204" pitchFamily="34" charset="0"/>
-              </a:rPr>
-              <a:t>A tre</a:t>
-            </a:r>
-            <a:r>
-              <a:rPr lang="en-US" altLang="en-US" sz="3600" dirty="0">
-                <a:latin typeface="Arial" panose="020B0604020202020204" pitchFamily="34" charset="0"/>
-              </a:rPr>
-              <a:t>e is a graph in which there is exactly one path connecting any two nodes</a:t>
-            </a:r>
-            <a:r>
-              <a:rPr kumimoji="0" lang="en-US" altLang="en-US" sz="3600" b="0" i="0" u="none" strike="noStrike" cap="none" normalizeH="0" baseline="0" dirty="0">
-                <a:ln>
-                  <a:noFill/>
-                </a:ln>
-                <a:solidFill>
-                  <a:schemeClr val="tx1"/>
-                </a:solidFill>
-                <a:effectLst/>
-                <a:latin typeface="Arial" panose="020B0604020202020204" pitchFamily="34" charset="0"/>
-              </a:rPr>
-              <a:t>.</a:t>
-            </a:r>
-          </a:p>
-        </p:txBody>
-      </p:sp>
-      <p:cxnSp>
-        <p:nvCxnSpPr>
-          <p:cNvPr id="8" name="Straight Arrow Connector 7">
-            <a:extLst>
-              <a:ext uri="{FF2B5EF4-FFF2-40B4-BE49-F238E27FC236}">
-                <a16:creationId xmlns:a16="http://schemas.microsoft.com/office/drawing/2014/main" id="{897FEA85-6823-036E-B1D5-3F9E6F8244AC}"/>
-              </a:ext>
-            </a:extLst>
-          </p:cNvPr>
-          <p:cNvCxnSpPr>
-            <a:cxnSpLocks/>
-          </p:cNvCxnSpPr>
-          <p:nvPr/>
-        </p:nvCxnSpPr>
-        <p:spPr bwMode="auto">
-          <a:xfrm flipV="1">
-            <a:off x="4343400" y="3574718"/>
-            <a:ext cx="1600200" cy="387682"/>
-          </a:xfrm>
-          <a:prstGeom prst="straightConnector1">
-            <a:avLst/>
-          </a:prstGeom>
-          <a:ln w="38100">
-            <a:prstDash val="sysDot"/>
-            <a:headEnd type="none" w="sm" len="sm"/>
-            <a:tailEnd type="triangle"/>
-          </a:ln>
-        </p:spPr>
-        <p:style>
-          <a:lnRef idx="1">
-            <a:schemeClr val="accent2"/>
-          </a:lnRef>
-          <a:fillRef idx="0">
-            <a:schemeClr val="accent2"/>
-          </a:fillRef>
-          <a:effectRef idx="0">
-            <a:schemeClr val="accent2"/>
-          </a:effectRef>
-          <a:fontRef idx="minor">
-            <a:schemeClr val="tx1"/>
-          </a:fontRef>
-        </p:style>
-      </p:cxnSp>
-      <p:pic>
-        <p:nvPicPr>
-          <p:cNvPr id="2" name="Picture 4" descr="Difference Between Tree and Graph (with Comparison chart) - Tech Differences">
-            <a:extLst>
-              <a:ext uri="{FF2B5EF4-FFF2-40B4-BE49-F238E27FC236}">
-                <a16:creationId xmlns:a16="http://schemas.microsoft.com/office/drawing/2014/main" id="{C837E834-A2DE-F358-C732-9F1749106AAF}"/>
-              </a:ext>
-            </a:extLst>
-          </p:cNvPr>
-          <p:cNvPicPr>
-            <a:picLocks noChangeAspect="1" noChangeArrowheads="1"/>
-          </p:cNvPicPr>
-          <p:nvPr/>
-        </p:nvPicPr>
-        <p:blipFill rotWithShape="1">
-          <a:blip r:embed="rId3">
-            <a:extLst>
-              <a:ext uri="{28A0092B-C50C-407E-A947-70E740481C1C}">
-                <a14:useLocalDpi xmlns:a14="http://schemas.microsoft.com/office/drawing/2010/main" val="0"/>
-              </a:ext>
-            </a:extLst>
-          </a:blip>
-          <a:srcRect l="1861" t="4217" r="51898" b="15782"/>
-          <a:stretch/>
-        </p:blipFill>
-        <p:spPr bwMode="auto">
-          <a:xfrm>
-            <a:off x="6068007" y="1673058"/>
-            <a:ext cx="2847393" cy="3093153"/>
-          </a:xfrm>
-          <a:prstGeom prst="rect">
-            <a:avLst/>
-          </a:prstGeom>
-          <a:noFill/>
-          <a:extLst>
-            <a:ext uri="{909E8E84-426E-40DD-AFC4-6F175D3DCCD1}">
-              <a14:hiddenFill xmlns:a14="http://schemas.microsoft.com/office/drawing/2010/main">
-                <a:solidFill>
-                  <a:srgbClr val="FFFFFF"/>
-                </a:solidFill>
-              </a14:hiddenFill>
-            </a:ext>
-          </a:extLst>
-        </p:spPr>
-      </p:pic>
-    </p:spTree>
-    <p:extLst>
-      <p:ext uri="{BB962C8B-B14F-4D97-AF65-F5344CB8AC3E}">
-        <p14:creationId xmlns:p14="http://schemas.microsoft.com/office/powerpoint/2010/main" val="2029425185"/>
-      </p:ext>
-    </p:extLst>
-  </p:cSld>
-  <p:clrMapOvr>
-    <a:masterClrMapping/>
-  </p:clrMapOvr>
-</p:sld>
-</file>
-
-<file path=ppt/slides/slide30.xml><?xml version="1.0" encoding="utf-8"?>
+<file path=ppt/slides/slide31.xml><?xml version="1.0" encoding="utf-8"?>
 <p:sld xmlns:a="http://schemas.openxmlformats.org/drawingml/2006/main" xmlns:r="http://schemas.openxmlformats.org/officeDocument/2006/relationships" xmlns:p="http://schemas.openxmlformats.org/presentationml/2006/main">
   <p:cSld>
     <p:spTree>
@@ -31557,14 +32816,14 @@
           <a:noFill/>
           <a:extLst>
             <a:ext uri="{909E8E84-426E-40dd-AFC4-6F175D3DCCD1}">
-              <a14:hiddenFill xmlns:a14="http://schemas.microsoft.com/office/drawing/2010/main" xmlns="">
+              <a14:hiddenFill xmlns="" xmlns:a14="http://schemas.microsoft.com/office/drawing/2010/main">
                 <a:solidFill>
                   <a:srgbClr val="FFFFFF"/>
                 </a:solidFill>
               </a14:hiddenFill>
             </a:ext>
             <a:ext uri="{91240B29-F687-4f45-9708-019B960494DF}">
-              <a14:hiddenLine xmlns:a14="http://schemas.microsoft.com/office/drawing/2010/main" xmlns="" w="9525">
+              <a14:hiddenLine xmlns="" xmlns:a14="http://schemas.microsoft.com/office/drawing/2010/main" w="9525">
                 <a:solidFill>
                   <a:srgbClr val="000000"/>
                 </a:solidFill>
@@ -31710,7 +32969,7 @@
                   <a:spcPct val="80000"/>
                 </a:lnSpc>
               </a:pPr>
-              <a:t>30</a:t>
+              <a:t>31</a:t>
             </a:fld>
             <a:endParaRPr lang="en-US" altLang="en-US" sz="1200">
               <a:solidFill>
@@ -31809,7 +33068,7 @@
 </p:sld>
 </file>
 
-<file path=ppt/slides/slide31.xml><?xml version="1.0" encoding="utf-8"?>
+<file path=ppt/slides/slide32.xml><?xml version="1.0" encoding="utf-8"?>
 <p:sld xmlns:a="http://schemas.openxmlformats.org/drawingml/2006/main" xmlns:r="http://schemas.openxmlformats.org/officeDocument/2006/relationships" xmlns:p="http://schemas.openxmlformats.org/presentationml/2006/main">
   <p:cSld>
     <p:spTree>
@@ -31868,14 +33127,14 @@
           <a:noFill/>
           <a:extLst>
             <a:ext uri="{909E8E84-426E-40dd-AFC4-6F175D3DCCD1}">
-              <a14:hiddenFill xmlns:a14="http://schemas.microsoft.com/office/drawing/2010/main" xmlns="">
+              <a14:hiddenFill xmlns="" xmlns:a14="http://schemas.microsoft.com/office/drawing/2010/main">
                 <a:solidFill>
                   <a:srgbClr val="FFFFFF"/>
                 </a:solidFill>
               </a14:hiddenFill>
             </a:ext>
             <a:ext uri="{91240B29-F687-4f45-9708-019B960494DF}">
-              <a14:hiddenLine xmlns:a14="http://schemas.microsoft.com/office/drawing/2010/main" xmlns="" w="9525">
+              <a14:hiddenLine xmlns="" xmlns:a14="http://schemas.microsoft.com/office/drawing/2010/main" w="9525">
                 <a:solidFill>
                   <a:srgbClr val="000000"/>
                 </a:solidFill>
@@ -32021,7 +33280,7 @@
                   <a:spcPct val="80000"/>
                 </a:lnSpc>
               </a:pPr>
-              <a:t>31</a:t>
+              <a:t>32</a:t>
             </a:fld>
             <a:endParaRPr lang="en-US" altLang="en-US" sz="1200">
               <a:solidFill>
@@ -32212,7 +33471,7 @@
 </p:sld>
 </file>
 
-<file path=ppt/slides/slide32.xml><?xml version="1.0" encoding="utf-8"?>
+<file path=ppt/slides/slide33.xml><?xml version="1.0" encoding="utf-8"?>
 <p:sld xmlns:a="http://schemas.openxmlformats.org/drawingml/2006/main" xmlns:r="http://schemas.openxmlformats.org/officeDocument/2006/relationships" xmlns:p="http://schemas.openxmlformats.org/presentationml/2006/main">
   <p:cSld>
     <p:spTree>
@@ -32271,14 +33530,14 @@
           <a:noFill/>
           <a:extLst>
             <a:ext uri="{909E8E84-426E-40dd-AFC4-6F175D3DCCD1}">
-              <a14:hiddenFill xmlns:a14="http://schemas.microsoft.com/office/drawing/2010/main" xmlns="">
+              <a14:hiddenFill xmlns="" xmlns:a14="http://schemas.microsoft.com/office/drawing/2010/main">
                 <a:solidFill>
                   <a:srgbClr val="FFFFFF"/>
                 </a:solidFill>
               </a14:hiddenFill>
             </a:ext>
             <a:ext uri="{91240B29-F687-4f45-9708-019B960494DF}">
-              <a14:hiddenLine xmlns:a14="http://schemas.microsoft.com/office/drawing/2010/main" xmlns="" w="9525">
+              <a14:hiddenLine xmlns="" xmlns:a14="http://schemas.microsoft.com/office/drawing/2010/main" w="9525">
                 <a:solidFill>
                   <a:srgbClr val="000000"/>
                 </a:solidFill>
@@ -32424,7 +33683,7 @@
                   <a:spcPct val="80000"/>
                 </a:lnSpc>
               </a:pPr>
-              <a:t>32</a:t>
+              <a:t>33</a:t>
             </a:fld>
             <a:endParaRPr lang="en-US" altLang="en-US" sz="1200">
               <a:solidFill>
@@ -32648,7 +33907,7 @@
 </p:sld>
 </file>
 
-<file path=ppt/slides/slide33.xml><?xml version="1.0" encoding="utf-8"?>
+<file path=ppt/slides/slide34.xml><?xml version="1.0" encoding="utf-8"?>
 <p:sld xmlns:a="http://schemas.openxmlformats.org/drawingml/2006/main" xmlns:r="http://schemas.openxmlformats.org/officeDocument/2006/relationships" xmlns:p="http://schemas.openxmlformats.org/presentationml/2006/main">
   <p:cSld>
     <p:spTree>
@@ -32707,14 +33966,14 @@
           <a:noFill/>
           <a:extLst>
             <a:ext uri="{909E8E84-426E-40dd-AFC4-6F175D3DCCD1}">
-              <a14:hiddenFill xmlns:a14="http://schemas.microsoft.com/office/drawing/2010/main" xmlns="">
+              <a14:hiddenFill xmlns="" xmlns:a14="http://schemas.microsoft.com/office/drawing/2010/main">
                 <a:solidFill>
                   <a:srgbClr val="FFFFFF"/>
                 </a:solidFill>
               </a14:hiddenFill>
             </a:ext>
             <a:ext uri="{91240B29-F687-4f45-9708-019B960494DF}">
-              <a14:hiddenLine xmlns:a14="http://schemas.microsoft.com/office/drawing/2010/main" xmlns="" w="9525">
+              <a14:hiddenLine xmlns="" xmlns:a14="http://schemas.microsoft.com/office/drawing/2010/main" w="9525">
                 <a:solidFill>
                   <a:srgbClr val="000000"/>
                 </a:solidFill>
@@ -32860,7 +34119,7 @@
                   <a:spcPct val="80000"/>
                 </a:lnSpc>
               </a:pPr>
-              <a:t>33</a:t>
+              <a:t>34</a:t>
             </a:fld>
             <a:endParaRPr lang="en-US" altLang="en-US" sz="1200">
               <a:solidFill>
@@ -33084,7 +34343,7 @@
 </p:sld>
 </file>
 
-<file path=ppt/slides/slide34.xml><?xml version="1.0" encoding="utf-8"?>
+<file path=ppt/slides/slide35.xml><?xml version="1.0" encoding="utf-8"?>
 <p:sld xmlns:a="http://schemas.openxmlformats.org/drawingml/2006/main" xmlns:r="http://schemas.openxmlformats.org/officeDocument/2006/relationships" xmlns:p="http://schemas.openxmlformats.org/presentationml/2006/main">
   <p:cSld>
     <p:spTree>
@@ -33143,14 +34402,14 @@
           <a:noFill/>
           <a:extLst>
             <a:ext uri="{909E8E84-426E-40dd-AFC4-6F175D3DCCD1}">
-              <a14:hiddenFill xmlns:a14="http://schemas.microsoft.com/office/drawing/2010/main" xmlns="">
+              <a14:hiddenFill xmlns="" xmlns:a14="http://schemas.microsoft.com/office/drawing/2010/main">
                 <a:solidFill>
                   <a:srgbClr val="FFFFFF"/>
                 </a:solidFill>
               </a14:hiddenFill>
             </a:ext>
             <a:ext uri="{91240B29-F687-4f45-9708-019B960494DF}">
-              <a14:hiddenLine xmlns:a14="http://schemas.microsoft.com/office/drawing/2010/main" xmlns="" w="9525">
+              <a14:hiddenLine xmlns="" xmlns:a14="http://schemas.microsoft.com/office/drawing/2010/main" w="9525">
                 <a:solidFill>
                   <a:srgbClr val="000000"/>
                 </a:solidFill>
@@ -33296,7 +34555,7 @@
                   <a:spcPct val="80000"/>
                 </a:lnSpc>
               </a:pPr>
-              <a:t>34</a:t>
+              <a:t>35</a:t>
             </a:fld>
             <a:endParaRPr lang="en-US" altLang="en-US" sz="1200">
               <a:solidFill>
@@ -33597,7 +34856,7 @@
 </p:sld>
 </file>
 
-<file path=ppt/slides/slide35.xml><?xml version="1.0" encoding="utf-8"?>
+<file path=ppt/slides/slide36.xml><?xml version="1.0" encoding="utf-8"?>
 <p:sld xmlns:a="http://schemas.openxmlformats.org/drawingml/2006/main" xmlns:r="http://schemas.openxmlformats.org/officeDocument/2006/relationships" xmlns:p="http://schemas.openxmlformats.org/presentationml/2006/main">
   <p:cSld>
     <p:spTree>
@@ -33656,14 +34915,14 @@
           <a:noFill/>
           <a:extLst>
             <a:ext uri="{909E8E84-426E-40dd-AFC4-6F175D3DCCD1}">
-              <a14:hiddenFill xmlns:a14="http://schemas.microsoft.com/office/drawing/2010/main" xmlns="">
+              <a14:hiddenFill xmlns="" xmlns:a14="http://schemas.microsoft.com/office/drawing/2010/main">
                 <a:solidFill>
                   <a:srgbClr val="FFFFFF"/>
                 </a:solidFill>
               </a14:hiddenFill>
             </a:ext>
             <a:ext uri="{91240B29-F687-4f45-9708-019B960494DF}">
-              <a14:hiddenLine xmlns:a14="http://schemas.microsoft.com/office/drawing/2010/main" xmlns="" w="9525">
+              <a14:hiddenLine xmlns="" xmlns:a14="http://schemas.microsoft.com/office/drawing/2010/main" w="9525">
                 <a:solidFill>
                   <a:srgbClr val="000000"/>
                 </a:solidFill>
@@ -33809,7 +35068,7 @@
                   <a:spcPct val="80000"/>
                 </a:lnSpc>
               </a:pPr>
-              <a:t>35</a:t>
+              <a:t>36</a:t>
             </a:fld>
             <a:endParaRPr lang="en-US" altLang="en-US" sz="1200">
               <a:solidFill>
@@ -34138,7 +35397,7 @@
 </p:sld>
 </file>
 
-<file path=ppt/slides/slide36.xml><?xml version="1.0" encoding="utf-8"?>
+<file path=ppt/slides/slide37.xml><?xml version="1.0" encoding="utf-8"?>
 <p:sld xmlns:a="http://schemas.openxmlformats.org/drawingml/2006/main" xmlns:r="http://schemas.openxmlformats.org/officeDocument/2006/relationships" xmlns:p="http://schemas.openxmlformats.org/presentationml/2006/main">
   <p:cSld>
     <p:spTree>
@@ -34197,14 +35456,14 @@
           <a:noFill/>
           <a:extLst>
             <a:ext uri="{909E8E84-426E-40dd-AFC4-6F175D3DCCD1}">
-              <a14:hiddenFill xmlns:a14="http://schemas.microsoft.com/office/drawing/2010/main" xmlns="">
+              <a14:hiddenFill xmlns="" xmlns:a14="http://schemas.microsoft.com/office/drawing/2010/main">
                 <a:solidFill>
                   <a:srgbClr val="FFFFFF"/>
                 </a:solidFill>
               </a14:hiddenFill>
             </a:ext>
             <a:ext uri="{91240B29-F687-4f45-9708-019B960494DF}">
-              <a14:hiddenLine xmlns:a14="http://schemas.microsoft.com/office/drawing/2010/main" xmlns="" w="9525">
+              <a14:hiddenLine xmlns="" xmlns:a14="http://schemas.microsoft.com/office/drawing/2010/main" w="9525">
                 <a:solidFill>
                   <a:srgbClr val="000000"/>
                 </a:solidFill>
@@ -34350,7 +35609,7 @@
                   <a:spcPct val="80000"/>
                 </a:lnSpc>
               </a:pPr>
-              <a:t>36</a:t>
+              <a:t>37</a:t>
             </a:fld>
             <a:endParaRPr lang="en-US" altLang="en-US" sz="1200">
               <a:solidFill>
@@ -34679,7 +35938,7 @@
 </p:sld>
 </file>
 
-<file path=ppt/slides/slide37.xml><?xml version="1.0" encoding="utf-8"?>
+<file path=ppt/slides/slide38.xml><?xml version="1.0" encoding="utf-8"?>
 <p:sld xmlns:a="http://schemas.openxmlformats.org/drawingml/2006/main" xmlns:r="http://schemas.openxmlformats.org/officeDocument/2006/relationships" xmlns:p="http://schemas.openxmlformats.org/presentationml/2006/main">
   <p:cSld>
     <p:spTree>
@@ -34738,14 +35997,14 @@
           <a:noFill/>
           <a:extLst>
             <a:ext uri="{909E8E84-426E-40dd-AFC4-6F175D3DCCD1}">
-              <a14:hiddenFill xmlns:a14="http://schemas.microsoft.com/office/drawing/2010/main" xmlns="">
+              <a14:hiddenFill xmlns="" xmlns:a14="http://schemas.microsoft.com/office/drawing/2010/main">
                 <a:solidFill>
                   <a:srgbClr val="FFFFFF"/>
                 </a:solidFill>
               </a14:hiddenFill>
             </a:ext>
             <a:ext uri="{91240B29-F687-4f45-9708-019B960494DF}">
-              <a14:hiddenLine xmlns:a14="http://schemas.microsoft.com/office/drawing/2010/main" xmlns="" w="9525">
+              <a14:hiddenLine xmlns="" xmlns:a14="http://schemas.microsoft.com/office/drawing/2010/main" w="9525">
                 <a:solidFill>
                   <a:srgbClr val="000000"/>
                 </a:solidFill>
@@ -34891,7 +36150,7 @@
                   <a:spcPct val="80000"/>
                 </a:lnSpc>
               </a:pPr>
-              <a:t>37</a:t>
+              <a:t>38</a:t>
             </a:fld>
             <a:endParaRPr lang="en-US" altLang="en-US" sz="1200">
               <a:solidFill>
@@ -35334,7 +36593,7 @@
 </p:sld>
 </file>
 
-<file path=ppt/slides/slide38.xml><?xml version="1.0" encoding="utf-8"?>
+<file path=ppt/slides/slide39.xml><?xml version="1.0" encoding="utf-8"?>
 <p:sld xmlns:a="http://schemas.openxmlformats.org/drawingml/2006/main" xmlns:r="http://schemas.openxmlformats.org/officeDocument/2006/relationships" xmlns:p="http://schemas.openxmlformats.org/presentationml/2006/main">
   <p:cSld>
     <p:spTree>
@@ -35393,14 +36652,14 @@
           <a:noFill/>
           <a:extLst>
             <a:ext uri="{909E8E84-426E-40dd-AFC4-6F175D3DCCD1}">
-              <a14:hiddenFill xmlns:a14="http://schemas.microsoft.com/office/drawing/2010/main" xmlns="">
+              <a14:hiddenFill xmlns="" xmlns:a14="http://schemas.microsoft.com/office/drawing/2010/main">
                 <a:solidFill>
                   <a:srgbClr val="FFFFFF"/>
                 </a:solidFill>
               </a14:hiddenFill>
             </a:ext>
             <a:ext uri="{91240B29-F687-4f45-9708-019B960494DF}">
-              <a14:hiddenLine xmlns:a14="http://schemas.microsoft.com/office/drawing/2010/main" xmlns="" w="9525">
+              <a14:hiddenLine xmlns="" xmlns:a14="http://schemas.microsoft.com/office/drawing/2010/main" w="9525">
                 <a:solidFill>
                   <a:srgbClr val="000000"/>
                 </a:solidFill>
@@ -35546,7 +36805,7 @@
                   <a:spcPct val="80000"/>
                 </a:lnSpc>
               </a:pPr>
-              <a:t>38</a:t>
+              <a:t>39</a:t>
             </a:fld>
             <a:endParaRPr lang="en-US" altLang="en-US" sz="1200">
               <a:solidFill>
@@ -35989,7 +37248,297 @@
 </p:sld>
 </file>
 
-<file path=ppt/slides/slide39.xml><?xml version="1.0" encoding="utf-8"?>
+<file path=ppt/slides/slide4.xml><?xml version="1.0" encoding="utf-8"?>
+<p:sld xmlns:a="http://schemas.openxmlformats.org/drawingml/2006/main" xmlns:r="http://schemas.openxmlformats.org/officeDocument/2006/relationships" xmlns:p="http://schemas.openxmlformats.org/presentationml/2006/main">
+  <p:cSld>
+    <p:spTree>
+      <p:nvGrpSpPr>
+        <p:cNvPr id="1" name=""/>
+        <p:cNvGrpSpPr/>
+        <p:nvPr/>
+      </p:nvGrpSpPr>
+      <p:grpSpPr>
+        <a:xfrm>
+          <a:off x="0" y="0"/>
+          <a:ext cx="0" cy="0"/>
+          <a:chOff x="0" y="0"/>
+          <a:chExt cx="0" cy="0"/>
+        </a:xfrm>
+      </p:grpSpPr>
+      <p:sp>
+        <p:nvSpPr>
+          <p:cNvPr id="8195" name="WordArt 2"/>
+          <p:cNvSpPr>
+            <a:spLocks noChangeArrowheads="1" noChangeShapeType="1" noTextEdit="1"/>
+          </p:cNvSpPr>
+          <p:nvPr/>
+        </p:nvSpPr>
+        <p:spPr bwMode="auto">
+          <a:xfrm>
+            <a:off x="1933575" y="521304"/>
+            <a:ext cx="4953000" cy="685800"/>
+          </a:xfrm>
+          <a:prstGeom prst="rect">
+            <a:avLst/>
+          </a:prstGeom>
+        </p:spPr>
+        <p:txBody>
+          <a:bodyPr wrap="none" fromWordArt="1">
+            <a:prstTxWarp prst="textPlain">
+              <a:avLst>
+                <a:gd name="adj" fmla="val 50000"/>
+              </a:avLst>
+            </a:prstTxWarp>
+          </a:bodyPr>
+          <a:lstStyle/>
+          <a:p>
+            <a:pPr algn="ctr"/>
+            <a:r>
+              <a:rPr lang="en-US" sz="3600" kern="10">
+                <a:ln w="9525">
+                  <a:solidFill>
+                    <a:srgbClr val="FFCC99"/>
+                  </a:solidFill>
+                  <a:round/>
+                  <a:headEnd type="none" w="sm" len="sm"/>
+                  <a:tailEnd type="none" w="sm" len="sm"/>
+                </a:ln>
+                <a:solidFill>
+                  <a:srgbClr val="0000FF"/>
+                </a:solidFill>
+                <a:effectLst>
+                  <a:outerShdw dist="35921" dir="2700000" algn="ctr" rotWithShape="0">
+                    <a:srgbClr val="C0C0C0"/>
+                  </a:outerShdw>
+                </a:effectLst>
+                <a:latin typeface="Impact"/>
+              </a:rPr>
+              <a:t>Binary Tree</a:t>
+            </a:r>
+          </a:p>
+        </p:txBody>
+      </p:sp>
+      <p:sp>
+        <p:nvSpPr>
+          <p:cNvPr id="8196" name="Text Box 3"/>
+          <p:cNvSpPr txBox="1">
+            <a:spLocks noChangeArrowheads="1"/>
+          </p:cNvSpPr>
+          <p:nvPr/>
+        </p:nvSpPr>
+        <p:spPr bwMode="auto">
+          <a:xfrm>
+            <a:off x="304800" y="1613118"/>
+            <a:ext cx="8534400" cy="1815882"/>
+          </a:xfrm>
+          <a:prstGeom prst="rect">
+            <a:avLst/>
+          </a:prstGeom>
+          <a:noFill/>
+          <a:ln>
+            <a:noFill/>
+          </a:ln>
+          <a:effectLst/>
+          <a:extLst>
+            <a:ext uri="{909E8E84-426E-40DD-AFC4-6F175D3DCCD1}">
+              <a14:hiddenFill xmlns:a14="http://schemas.microsoft.com/office/drawing/2010/main">
+                <a:solidFill>
+                  <a:schemeClr val="accent1"/>
+                </a:solidFill>
+              </a14:hiddenFill>
+            </a:ext>
+            <a:ext uri="{91240B29-F687-4F45-9708-019B960494DF}">
+              <a14:hiddenLine xmlns:a14="http://schemas.microsoft.com/office/drawing/2010/main" w="12700">
+                <a:solidFill>
+                  <a:schemeClr val="tx1"/>
+                </a:solidFill>
+                <a:miter lim="800000"/>
+                <a:headEnd type="none" w="sm" len="sm"/>
+                <a:tailEnd type="none" w="sm" len="sm"/>
+              </a14:hiddenLine>
+            </a:ext>
+            <a:ext uri="{AF507438-7753-43E0-B8FC-AC1667EBCBE1}">
+              <a14:hiddenEffects xmlns:a14="http://schemas.microsoft.com/office/drawing/2010/main">
+                <a:effectLst>
+                  <a:outerShdw dist="35921" dir="2700000" algn="ctr" rotWithShape="0">
+                    <a:schemeClr val="bg2"/>
+                  </a:outerShdw>
+                </a:effectLst>
+              </a14:hiddenEffects>
+            </a:ext>
+          </a:extLst>
+        </p:spPr>
+        <p:txBody>
+          <a:bodyPr wrap="square">
+            <a:spAutoFit/>
+          </a:bodyPr>
+          <a:lstStyle>
+            <a:lvl1pPr>
+              <a:defRPr sz="2400">
+                <a:solidFill>
+                  <a:schemeClr val="tx1"/>
+                </a:solidFill>
+                <a:latin typeface="Tahoma" pitchFamily="34" charset="0"/>
+              </a:defRPr>
+            </a:lvl1pPr>
+            <a:lvl2pPr marL="742950" indent="-285750">
+              <a:defRPr sz="2400">
+                <a:solidFill>
+                  <a:schemeClr val="tx1"/>
+                </a:solidFill>
+                <a:latin typeface="Tahoma" pitchFamily="34" charset="0"/>
+              </a:defRPr>
+            </a:lvl2pPr>
+            <a:lvl3pPr marL="1143000" indent="-228600">
+              <a:defRPr sz="2400">
+                <a:solidFill>
+                  <a:schemeClr val="tx1"/>
+                </a:solidFill>
+                <a:latin typeface="Tahoma" pitchFamily="34" charset="0"/>
+              </a:defRPr>
+            </a:lvl3pPr>
+            <a:lvl4pPr marL="1600200" indent="-228600">
+              <a:defRPr sz="2400">
+                <a:solidFill>
+                  <a:schemeClr val="tx1"/>
+                </a:solidFill>
+                <a:latin typeface="Tahoma" pitchFamily="34" charset="0"/>
+              </a:defRPr>
+            </a:lvl4pPr>
+            <a:lvl5pPr marL="2057400" indent="-228600">
+              <a:defRPr sz="2400">
+                <a:solidFill>
+                  <a:schemeClr val="tx1"/>
+                </a:solidFill>
+                <a:latin typeface="Tahoma" pitchFamily="34" charset="0"/>
+              </a:defRPr>
+            </a:lvl5pPr>
+            <a:lvl6pPr marL="2514600" indent="-228600" eaLnBrk="0" fontAlgn="base" hangingPunct="0">
+              <a:spcBef>
+                <a:spcPct val="0"/>
+              </a:spcBef>
+              <a:spcAft>
+                <a:spcPct val="0"/>
+              </a:spcAft>
+              <a:defRPr sz="2400">
+                <a:solidFill>
+                  <a:schemeClr val="tx1"/>
+                </a:solidFill>
+                <a:latin typeface="Tahoma" pitchFamily="34" charset="0"/>
+              </a:defRPr>
+            </a:lvl6pPr>
+            <a:lvl7pPr marL="2971800" indent="-228600" eaLnBrk="0" fontAlgn="base" hangingPunct="0">
+              <a:spcBef>
+                <a:spcPct val="0"/>
+              </a:spcBef>
+              <a:spcAft>
+                <a:spcPct val="0"/>
+              </a:spcAft>
+              <a:defRPr sz="2400">
+                <a:solidFill>
+                  <a:schemeClr val="tx1"/>
+                </a:solidFill>
+                <a:latin typeface="Tahoma" pitchFamily="34" charset="0"/>
+              </a:defRPr>
+            </a:lvl7pPr>
+            <a:lvl8pPr marL="3429000" indent="-228600" eaLnBrk="0" fontAlgn="base" hangingPunct="0">
+              <a:spcBef>
+                <a:spcPct val="0"/>
+              </a:spcBef>
+              <a:spcAft>
+                <a:spcPct val="0"/>
+              </a:spcAft>
+              <a:defRPr sz="2400">
+                <a:solidFill>
+                  <a:schemeClr val="tx1"/>
+                </a:solidFill>
+                <a:latin typeface="Tahoma" pitchFamily="34" charset="0"/>
+              </a:defRPr>
+            </a:lvl8pPr>
+            <a:lvl9pPr marL="3886200" indent="-228600" eaLnBrk="0" fontAlgn="base" hangingPunct="0">
+              <a:spcBef>
+                <a:spcPct val="0"/>
+              </a:spcBef>
+              <a:spcAft>
+                <a:spcPct val="0"/>
+              </a:spcAft>
+              <a:defRPr sz="2400">
+                <a:solidFill>
+                  <a:schemeClr val="tx1"/>
+                </a:solidFill>
+                <a:latin typeface="Tahoma" pitchFamily="34" charset="0"/>
+              </a:defRPr>
+            </a:lvl9pPr>
+          </a:lstStyle>
+          <a:p>
+            <a:r>
+              <a:rPr lang="en-US" sz="2800" dirty="0"/>
+              <a:t>A binary tree is one where each vertex can have a maximum of two children, distinctly labeled as a "left child" and a "right child," with edges connecting each parent vertex to its respective children</a:t>
+            </a:r>
+          </a:p>
+        </p:txBody>
+      </p:sp>
+      <p:pic>
+        <p:nvPicPr>
+          <p:cNvPr id="1028" name="Picture 4" descr="Difference Between Tree and Graph (with Comparison chart) - Tech Differences">
+            <a:extLst>
+              <a:ext uri="{FF2B5EF4-FFF2-40B4-BE49-F238E27FC236}">
+                <a16:creationId xmlns:a16="http://schemas.microsoft.com/office/drawing/2014/main" id="{F6362A07-5BB7-123A-1FE2-3924EF15E6B8}"/>
+              </a:ext>
+            </a:extLst>
+          </p:cNvPr>
+          <p:cNvPicPr>
+            <a:picLocks noChangeAspect="1" noChangeArrowheads="1"/>
+          </p:cNvPicPr>
+          <p:nvPr/>
+        </p:nvPicPr>
+        <p:blipFill>
+          <a:blip r:embed="rId3">
+            <a:extLst>
+              <a:ext uri="{28A0092B-C50C-407E-A947-70E740481C1C}">
+                <a14:useLocalDpi xmlns:a14="http://schemas.microsoft.com/office/drawing/2010/main" val="0"/>
+              </a:ext>
+            </a:extLst>
+          </a:blip>
+          <a:srcRect/>
+          <a:stretch>
+            <a:fillRect/>
+          </a:stretch>
+        </p:blipFill>
+        <p:spPr bwMode="auto">
+          <a:xfrm>
+            <a:off x="2057400" y="3505200"/>
+            <a:ext cx="5029200" cy="3157870"/>
+          </a:xfrm>
+          <a:prstGeom prst="rect">
+            <a:avLst/>
+          </a:prstGeom>
+          <a:noFill/>
+          <a:extLst>
+            <a:ext uri="{909E8E84-426E-40DD-AFC4-6F175D3DCCD1}">
+              <a14:hiddenFill xmlns:a14="http://schemas.microsoft.com/office/drawing/2010/main">
+                <a:solidFill>
+                  <a:srgbClr val="FFFFFF"/>
+                </a:solidFill>
+              </a14:hiddenFill>
+            </a:ext>
+          </a:extLst>
+        </p:spPr>
+      </p:pic>
+    </p:spTree>
+    <p:extLst>
+      <p:ext uri="{BB962C8B-B14F-4D97-AF65-F5344CB8AC3E}">
+        <p14:creationId xmlns:p14="http://schemas.microsoft.com/office/powerpoint/2010/main" val="1393948420"/>
+      </p:ext>
+    </p:extLst>
+  </p:cSld>
+  <p:clrMapOvr>
+    <a:masterClrMapping/>
+  </p:clrMapOvr>
+</p:sld>
+</file>
+
+<file path=ppt/slides/slide40.xml><?xml version="1.0" encoding="utf-8"?>
 <p:sld xmlns:a="http://schemas.openxmlformats.org/drawingml/2006/main" xmlns:r="http://schemas.openxmlformats.org/officeDocument/2006/relationships" xmlns:p="http://schemas.openxmlformats.org/presentationml/2006/main">
   <p:cSld>
     <p:spTree>
@@ -36048,14 +37597,14 @@
           <a:noFill/>
           <a:extLst>
             <a:ext uri="{909E8E84-426E-40dd-AFC4-6F175D3DCCD1}">
-              <a14:hiddenFill xmlns:a14="http://schemas.microsoft.com/office/drawing/2010/main" xmlns="">
+              <a14:hiddenFill xmlns="" xmlns:a14="http://schemas.microsoft.com/office/drawing/2010/main">
                 <a:solidFill>
                   <a:srgbClr val="FFFFFF"/>
                 </a:solidFill>
               </a14:hiddenFill>
             </a:ext>
             <a:ext uri="{91240B29-F687-4f45-9708-019B960494DF}">
-              <a14:hiddenLine xmlns:a14="http://schemas.microsoft.com/office/drawing/2010/main" xmlns="" w="9525">
+              <a14:hiddenLine xmlns="" xmlns:a14="http://schemas.microsoft.com/office/drawing/2010/main" w="9525">
                 <a:solidFill>
                   <a:srgbClr val="000000"/>
                 </a:solidFill>
@@ -36201,7 +37750,7 @@
                   <a:spcPct val="80000"/>
                 </a:lnSpc>
               </a:pPr>
-              <a:t>39</a:t>
+              <a:t>40</a:t>
             </a:fld>
             <a:endParaRPr lang="en-US" altLang="en-US" sz="1200">
               <a:solidFill>
@@ -36644,297 +38193,7 @@
 </p:sld>
 </file>
 
-<file path=ppt/slides/slide4.xml><?xml version="1.0" encoding="utf-8"?>
-<p:sld xmlns:a="http://schemas.openxmlformats.org/drawingml/2006/main" xmlns:r="http://schemas.openxmlformats.org/officeDocument/2006/relationships" xmlns:p="http://schemas.openxmlformats.org/presentationml/2006/main">
-  <p:cSld>
-    <p:spTree>
-      <p:nvGrpSpPr>
-        <p:cNvPr id="1" name=""/>
-        <p:cNvGrpSpPr/>
-        <p:nvPr/>
-      </p:nvGrpSpPr>
-      <p:grpSpPr>
-        <a:xfrm>
-          <a:off x="0" y="0"/>
-          <a:ext cx="0" cy="0"/>
-          <a:chOff x="0" y="0"/>
-          <a:chExt cx="0" cy="0"/>
-        </a:xfrm>
-      </p:grpSpPr>
-      <p:sp>
-        <p:nvSpPr>
-          <p:cNvPr id="8195" name="WordArt 2"/>
-          <p:cNvSpPr>
-            <a:spLocks noChangeArrowheads="1" noChangeShapeType="1" noTextEdit="1"/>
-          </p:cNvSpPr>
-          <p:nvPr/>
-        </p:nvSpPr>
-        <p:spPr bwMode="auto">
-          <a:xfrm>
-            <a:off x="1933575" y="521304"/>
-            <a:ext cx="4953000" cy="685800"/>
-          </a:xfrm>
-          <a:prstGeom prst="rect">
-            <a:avLst/>
-          </a:prstGeom>
-        </p:spPr>
-        <p:txBody>
-          <a:bodyPr wrap="none" fromWordArt="1">
-            <a:prstTxWarp prst="textPlain">
-              <a:avLst>
-                <a:gd name="adj" fmla="val 50000"/>
-              </a:avLst>
-            </a:prstTxWarp>
-          </a:bodyPr>
-          <a:lstStyle/>
-          <a:p>
-            <a:pPr algn="ctr"/>
-            <a:r>
-              <a:rPr lang="en-US" sz="3600" kern="10">
-                <a:ln w="9525">
-                  <a:solidFill>
-                    <a:srgbClr val="FFCC99"/>
-                  </a:solidFill>
-                  <a:round/>
-                  <a:headEnd type="none" w="sm" len="sm"/>
-                  <a:tailEnd type="none" w="sm" len="sm"/>
-                </a:ln>
-                <a:solidFill>
-                  <a:srgbClr val="0000FF"/>
-                </a:solidFill>
-                <a:effectLst>
-                  <a:outerShdw dist="35921" dir="2700000" algn="ctr" rotWithShape="0">
-                    <a:srgbClr val="C0C0C0"/>
-                  </a:outerShdw>
-                </a:effectLst>
-                <a:latin typeface="Impact"/>
-              </a:rPr>
-              <a:t>Binary Tree</a:t>
-            </a:r>
-          </a:p>
-        </p:txBody>
-      </p:sp>
-      <p:sp>
-        <p:nvSpPr>
-          <p:cNvPr id="8196" name="Text Box 3"/>
-          <p:cNvSpPr txBox="1">
-            <a:spLocks noChangeArrowheads="1"/>
-          </p:cNvSpPr>
-          <p:nvPr/>
-        </p:nvSpPr>
-        <p:spPr bwMode="auto">
-          <a:xfrm>
-            <a:off x="304800" y="1613118"/>
-            <a:ext cx="8534400" cy="1815882"/>
-          </a:xfrm>
-          <a:prstGeom prst="rect">
-            <a:avLst/>
-          </a:prstGeom>
-          <a:noFill/>
-          <a:ln>
-            <a:noFill/>
-          </a:ln>
-          <a:effectLst/>
-          <a:extLst>
-            <a:ext uri="{909E8E84-426E-40DD-AFC4-6F175D3DCCD1}">
-              <a14:hiddenFill xmlns:a14="http://schemas.microsoft.com/office/drawing/2010/main">
-                <a:solidFill>
-                  <a:schemeClr val="accent1"/>
-                </a:solidFill>
-              </a14:hiddenFill>
-            </a:ext>
-            <a:ext uri="{91240B29-F687-4F45-9708-019B960494DF}">
-              <a14:hiddenLine xmlns:a14="http://schemas.microsoft.com/office/drawing/2010/main" w="12700">
-                <a:solidFill>
-                  <a:schemeClr val="tx1"/>
-                </a:solidFill>
-                <a:miter lim="800000"/>
-                <a:headEnd type="none" w="sm" len="sm"/>
-                <a:tailEnd type="none" w="sm" len="sm"/>
-              </a14:hiddenLine>
-            </a:ext>
-            <a:ext uri="{AF507438-7753-43E0-B8FC-AC1667EBCBE1}">
-              <a14:hiddenEffects xmlns:a14="http://schemas.microsoft.com/office/drawing/2010/main">
-                <a:effectLst>
-                  <a:outerShdw dist="35921" dir="2700000" algn="ctr" rotWithShape="0">
-                    <a:schemeClr val="bg2"/>
-                  </a:outerShdw>
-                </a:effectLst>
-              </a14:hiddenEffects>
-            </a:ext>
-          </a:extLst>
-        </p:spPr>
-        <p:txBody>
-          <a:bodyPr wrap="square">
-            <a:spAutoFit/>
-          </a:bodyPr>
-          <a:lstStyle>
-            <a:lvl1pPr>
-              <a:defRPr sz="2400">
-                <a:solidFill>
-                  <a:schemeClr val="tx1"/>
-                </a:solidFill>
-                <a:latin typeface="Tahoma" pitchFamily="34" charset="0"/>
-              </a:defRPr>
-            </a:lvl1pPr>
-            <a:lvl2pPr marL="742950" indent="-285750">
-              <a:defRPr sz="2400">
-                <a:solidFill>
-                  <a:schemeClr val="tx1"/>
-                </a:solidFill>
-                <a:latin typeface="Tahoma" pitchFamily="34" charset="0"/>
-              </a:defRPr>
-            </a:lvl2pPr>
-            <a:lvl3pPr marL="1143000" indent="-228600">
-              <a:defRPr sz="2400">
-                <a:solidFill>
-                  <a:schemeClr val="tx1"/>
-                </a:solidFill>
-                <a:latin typeface="Tahoma" pitchFamily="34" charset="0"/>
-              </a:defRPr>
-            </a:lvl3pPr>
-            <a:lvl4pPr marL="1600200" indent="-228600">
-              <a:defRPr sz="2400">
-                <a:solidFill>
-                  <a:schemeClr val="tx1"/>
-                </a:solidFill>
-                <a:latin typeface="Tahoma" pitchFamily="34" charset="0"/>
-              </a:defRPr>
-            </a:lvl4pPr>
-            <a:lvl5pPr marL="2057400" indent="-228600">
-              <a:defRPr sz="2400">
-                <a:solidFill>
-                  <a:schemeClr val="tx1"/>
-                </a:solidFill>
-                <a:latin typeface="Tahoma" pitchFamily="34" charset="0"/>
-              </a:defRPr>
-            </a:lvl5pPr>
-            <a:lvl6pPr marL="2514600" indent="-228600" eaLnBrk="0" fontAlgn="base" hangingPunct="0">
-              <a:spcBef>
-                <a:spcPct val="0"/>
-              </a:spcBef>
-              <a:spcAft>
-                <a:spcPct val="0"/>
-              </a:spcAft>
-              <a:defRPr sz="2400">
-                <a:solidFill>
-                  <a:schemeClr val="tx1"/>
-                </a:solidFill>
-                <a:latin typeface="Tahoma" pitchFamily="34" charset="0"/>
-              </a:defRPr>
-            </a:lvl6pPr>
-            <a:lvl7pPr marL="2971800" indent="-228600" eaLnBrk="0" fontAlgn="base" hangingPunct="0">
-              <a:spcBef>
-                <a:spcPct val="0"/>
-              </a:spcBef>
-              <a:spcAft>
-                <a:spcPct val="0"/>
-              </a:spcAft>
-              <a:defRPr sz="2400">
-                <a:solidFill>
-                  <a:schemeClr val="tx1"/>
-                </a:solidFill>
-                <a:latin typeface="Tahoma" pitchFamily="34" charset="0"/>
-              </a:defRPr>
-            </a:lvl7pPr>
-            <a:lvl8pPr marL="3429000" indent="-228600" eaLnBrk="0" fontAlgn="base" hangingPunct="0">
-              <a:spcBef>
-                <a:spcPct val="0"/>
-              </a:spcBef>
-              <a:spcAft>
-                <a:spcPct val="0"/>
-              </a:spcAft>
-              <a:defRPr sz="2400">
-                <a:solidFill>
-                  <a:schemeClr val="tx1"/>
-                </a:solidFill>
-                <a:latin typeface="Tahoma" pitchFamily="34" charset="0"/>
-              </a:defRPr>
-            </a:lvl8pPr>
-            <a:lvl9pPr marL="3886200" indent="-228600" eaLnBrk="0" fontAlgn="base" hangingPunct="0">
-              <a:spcBef>
-                <a:spcPct val="0"/>
-              </a:spcBef>
-              <a:spcAft>
-                <a:spcPct val="0"/>
-              </a:spcAft>
-              <a:defRPr sz="2400">
-                <a:solidFill>
-                  <a:schemeClr val="tx1"/>
-                </a:solidFill>
-                <a:latin typeface="Tahoma" pitchFamily="34" charset="0"/>
-              </a:defRPr>
-            </a:lvl9pPr>
-          </a:lstStyle>
-          <a:p>
-            <a:r>
-              <a:rPr lang="en-US" sz="2800" dirty="0"/>
-              <a:t>A binary tree is one where each vertex can have a maximum of two children, distinctly labeled as a "left child" and a "right child," with edges connecting each parent vertex to its respective children</a:t>
-            </a:r>
-          </a:p>
-        </p:txBody>
-      </p:sp>
-      <p:pic>
-        <p:nvPicPr>
-          <p:cNvPr id="1028" name="Picture 4" descr="Difference Between Tree and Graph (with Comparison chart) - Tech Differences">
-            <a:extLst>
-              <a:ext uri="{FF2B5EF4-FFF2-40B4-BE49-F238E27FC236}">
-                <a16:creationId xmlns:a16="http://schemas.microsoft.com/office/drawing/2014/main" id="{F6362A07-5BB7-123A-1FE2-3924EF15E6B8}"/>
-              </a:ext>
-            </a:extLst>
-          </p:cNvPr>
-          <p:cNvPicPr>
-            <a:picLocks noChangeAspect="1" noChangeArrowheads="1"/>
-          </p:cNvPicPr>
-          <p:nvPr/>
-        </p:nvPicPr>
-        <p:blipFill>
-          <a:blip r:embed="rId3">
-            <a:extLst>
-              <a:ext uri="{28A0092B-C50C-407E-A947-70E740481C1C}">
-                <a14:useLocalDpi xmlns:a14="http://schemas.microsoft.com/office/drawing/2010/main" val="0"/>
-              </a:ext>
-            </a:extLst>
-          </a:blip>
-          <a:srcRect/>
-          <a:stretch>
-            <a:fillRect/>
-          </a:stretch>
-        </p:blipFill>
-        <p:spPr bwMode="auto">
-          <a:xfrm>
-            <a:off x="2057400" y="3505200"/>
-            <a:ext cx="5029200" cy="3157870"/>
-          </a:xfrm>
-          <a:prstGeom prst="rect">
-            <a:avLst/>
-          </a:prstGeom>
-          <a:noFill/>
-          <a:extLst>
-            <a:ext uri="{909E8E84-426E-40DD-AFC4-6F175D3DCCD1}">
-              <a14:hiddenFill xmlns:a14="http://schemas.microsoft.com/office/drawing/2010/main">
-                <a:solidFill>
-                  <a:srgbClr val="FFFFFF"/>
-                </a:solidFill>
-              </a14:hiddenFill>
-            </a:ext>
-          </a:extLst>
-        </p:spPr>
-      </p:pic>
-    </p:spTree>
-    <p:extLst>
-      <p:ext uri="{BB962C8B-B14F-4D97-AF65-F5344CB8AC3E}">
-        <p14:creationId xmlns:p14="http://schemas.microsoft.com/office/powerpoint/2010/main" val="1393948420"/>
-      </p:ext>
-    </p:extLst>
-  </p:cSld>
-  <p:clrMapOvr>
-    <a:masterClrMapping/>
-  </p:clrMapOvr>
-</p:sld>
-</file>
-
-<file path=ppt/slides/slide40.xml><?xml version="1.0" encoding="utf-8"?>
+<file path=ppt/slides/slide41.xml><?xml version="1.0" encoding="utf-8"?>
 <p:sld xmlns:a="http://schemas.openxmlformats.org/drawingml/2006/main" xmlns:r="http://schemas.openxmlformats.org/officeDocument/2006/relationships" xmlns:p="http://schemas.openxmlformats.org/presentationml/2006/main">
   <p:cSld>
     <p:spTree>
@@ -36993,14 +38252,14 @@
           <a:noFill/>
           <a:extLst>
             <a:ext uri="{909E8E84-426E-40dd-AFC4-6F175D3DCCD1}">
-              <a14:hiddenFill xmlns:a14="http://schemas.microsoft.com/office/drawing/2010/main" xmlns="">
+              <a14:hiddenFill xmlns="" xmlns:a14="http://schemas.microsoft.com/office/drawing/2010/main">
                 <a:solidFill>
                   <a:srgbClr val="FFFFFF"/>
                 </a:solidFill>
               </a14:hiddenFill>
             </a:ext>
             <a:ext uri="{91240B29-F687-4f45-9708-019B960494DF}">
-              <a14:hiddenLine xmlns:a14="http://schemas.microsoft.com/office/drawing/2010/main" xmlns="" w="9525">
+              <a14:hiddenLine xmlns="" xmlns:a14="http://schemas.microsoft.com/office/drawing/2010/main" w="9525">
                 <a:solidFill>
                   <a:srgbClr val="000000"/>
                 </a:solidFill>
@@ -37146,7 +38405,7 @@
                   <a:spcPct val="80000"/>
                 </a:lnSpc>
               </a:pPr>
-              <a:t>40</a:t>
+              <a:t>41</a:t>
             </a:fld>
             <a:endParaRPr lang="en-US" altLang="en-US" sz="1200">
               <a:solidFill>
@@ -37594,7 +38853,7 @@
 </p:sld>
 </file>
 
-<file path=ppt/slides/slide41.xml><?xml version="1.0" encoding="utf-8"?>
+<file path=ppt/slides/slide42.xml><?xml version="1.0" encoding="utf-8"?>
 <p:sld xmlns:a="http://schemas.openxmlformats.org/drawingml/2006/main" xmlns:r="http://schemas.openxmlformats.org/officeDocument/2006/relationships" xmlns:p="http://schemas.openxmlformats.org/presentationml/2006/main">
   <p:cSld>
     <p:spTree>
@@ -38500,7 +39759,7 @@
 </p:sld>
 </file>
 
-<file path=ppt/slides/slide42.xml><?xml version="1.0" encoding="utf-8"?>
+<file path=ppt/slides/slide43.xml><?xml version="1.0" encoding="utf-8"?>
 <p:sld xmlns:a="http://schemas.openxmlformats.org/drawingml/2006/main" xmlns:r="http://schemas.openxmlformats.org/officeDocument/2006/relationships" xmlns:p="http://schemas.openxmlformats.org/presentationml/2006/main">
   <p:cSld>
     <p:spTree>
@@ -38807,7 +40066,7 @@
 </p:sld>
 </file>
 
-<file path=ppt/slides/slide43.xml><?xml version="1.0" encoding="utf-8"?>
+<file path=ppt/slides/slide44.xml><?xml version="1.0" encoding="utf-8"?>
 <p:sld xmlns:a="http://schemas.openxmlformats.org/drawingml/2006/main" xmlns:r="http://schemas.openxmlformats.org/officeDocument/2006/relationships" xmlns:p="http://schemas.openxmlformats.org/presentationml/2006/main">
   <p:cSld>
     <p:spTree>
